--- a/20261007_サンクスLINE誘導のご提案_業界別ver3.6.pptx
+++ b/20261007_サンクスLINE誘導のご提案_業界別ver3.6.pptx
@@ -14176,8 +14176,8 @@
         </p:nvSpPr>
         <p:spPr>
           <a:xfrm>
-            <a:off x="1000800" y="3832200"/>
-            <a:ext cx="152861" cy="199800"/>
+            <a:off x="792000" y="2484000"/>
+            <a:ext cx="1475999" cy="251999"/>
           </a:xfrm>
           <a:prstGeom prst="rect">
             <a:avLst/>
@@ -14206,631 +14206,6 @@
         </p:style>
         <p:txBody>
           <a:bodyPr rtlCol="0" anchor="ctr" wrap="square" lIns="72000" tIns="18000" rIns="72000" bIns="18000"/>
-          <a:lstStyle/>
-          <a:p>
-            <a:pPr algn="ctr"/>
-          </a:p>
-        </p:txBody>
-      </p:sp>
-      <p:sp>
-        <p:nvSpPr>
-          <p:cNvPr id="21" name="Rectangle 20"/>
-          <p:cNvSpPr/>
-          <p:nvPr/>
-        </p:nvSpPr>
-        <p:spPr>
-          <a:xfrm>
-            <a:off x="1211261" y="3765599"/>
-            <a:ext cx="152861" cy="266400"/>
-          </a:xfrm>
-          <a:prstGeom prst="rect">
-            <a:avLst/>
-          </a:prstGeom>
-          <a:solidFill>
-            <a:srgbClr val="C9D2EC"/>
-          </a:solidFill>
-          <a:ln>
-            <a:noFill/>
-          </a:ln>
-          <a:effectLst/>
-        </p:spPr>
-        <p:style>
-          <a:lnRef idx="1">
-            <a:schemeClr val="accent1"/>
-          </a:lnRef>
-          <a:fillRef idx="3">
-            <a:schemeClr val="accent1"/>
-          </a:fillRef>
-          <a:effectRef idx="0">
-            <a:schemeClr val="accent1"/>
-          </a:effectRef>
-          <a:fontRef idx="minor">
-            <a:schemeClr val="lt1"/>
-          </a:fontRef>
-        </p:style>
-        <p:txBody>
-          <a:bodyPr rtlCol="0" anchor="ctr" wrap="square" lIns="72000" tIns="18000" rIns="72000" bIns="18000"/>
-          <a:lstStyle/>
-          <a:p>
-            <a:pPr algn="ctr"/>
-          </a:p>
-        </p:txBody>
-      </p:sp>
-      <p:sp>
-        <p:nvSpPr>
-          <p:cNvPr id="22" name="Rectangle 21"/>
-          <p:cNvSpPr/>
-          <p:nvPr/>
-        </p:nvSpPr>
-        <p:spPr>
-          <a:xfrm>
-            <a:off x="1421723" y="3632400"/>
-            <a:ext cx="152861" cy="399600"/>
-          </a:xfrm>
-          <a:prstGeom prst="rect">
-            <a:avLst/>
-          </a:prstGeom>
-          <a:solidFill>
-            <a:srgbClr val="C9D2EC"/>
-          </a:solidFill>
-          <a:ln>
-            <a:noFill/>
-          </a:ln>
-          <a:effectLst/>
-        </p:spPr>
-        <p:style>
-          <a:lnRef idx="1">
-            <a:schemeClr val="accent1"/>
-          </a:lnRef>
-          <a:fillRef idx="3">
-            <a:schemeClr val="accent1"/>
-          </a:fillRef>
-          <a:effectRef idx="0">
-            <a:schemeClr val="accent1"/>
-          </a:effectRef>
-          <a:fontRef idx="minor">
-            <a:schemeClr val="lt1"/>
-          </a:fontRef>
-        </p:style>
-        <p:txBody>
-          <a:bodyPr rtlCol="0" anchor="ctr" wrap="square" lIns="72000" tIns="18000" rIns="72000" bIns="18000"/>
-          <a:lstStyle/>
-          <a:p>
-            <a:pPr algn="ctr"/>
-          </a:p>
-        </p:txBody>
-      </p:sp>
-      <p:sp>
-        <p:nvSpPr>
-          <p:cNvPr id="23" name="Rectangle 22"/>
-          <p:cNvSpPr/>
-          <p:nvPr/>
-        </p:nvSpPr>
-        <p:spPr>
-          <a:xfrm>
-            <a:off x="1632184" y="3432600"/>
-            <a:ext cx="152861" cy="599400"/>
-          </a:xfrm>
-          <a:prstGeom prst="rect">
-            <a:avLst/>
-          </a:prstGeom>
-          <a:solidFill>
-            <a:srgbClr val="C9D2EC"/>
-          </a:solidFill>
-          <a:ln>
-            <a:noFill/>
-          </a:ln>
-          <a:effectLst/>
-        </p:spPr>
-        <p:style>
-          <a:lnRef idx="1">
-            <a:schemeClr val="accent1"/>
-          </a:lnRef>
-          <a:fillRef idx="3">
-            <a:schemeClr val="accent1"/>
-          </a:fillRef>
-          <a:effectRef idx="0">
-            <a:schemeClr val="accent1"/>
-          </a:effectRef>
-          <a:fontRef idx="minor">
-            <a:schemeClr val="lt1"/>
-          </a:fontRef>
-        </p:style>
-        <p:txBody>
-          <a:bodyPr rtlCol="0" anchor="ctr" wrap="square" lIns="72000" tIns="18000" rIns="72000" bIns="18000"/>
-          <a:lstStyle/>
-          <a:p>
-            <a:pPr algn="ctr"/>
-          </a:p>
-        </p:txBody>
-      </p:sp>
-      <p:sp>
-        <p:nvSpPr>
-          <p:cNvPr id="24" name="Rectangle 23"/>
-          <p:cNvSpPr/>
-          <p:nvPr/>
-        </p:nvSpPr>
-        <p:spPr>
-          <a:xfrm>
-            <a:off x="1842646" y="3166199"/>
-            <a:ext cx="152861" cy="865800"/>
-          </a:xfrm>
-          <a:prstGeom prst="rect">
-            <a:avLst/>
-          </a:prstGeom>
-          <a:solidFill>
-            <a:srgbClr val="C9D2EC"/>
-          </a:solidFill>
-          <a:ln>
-            <a:noFill/>
-          </a:ln>
-          <a:effectLst/>
-        </p:spPr>
-        <p:style>
-          <a:lnRef idx="1">
-            <a:schemeClr val="accent1"/>
-          </a:lnRef>
-          <a:fillRef idx="3">
-            <a:schemeClr val="accent1"/>
-          </a:fillRef>
-          <a:effectRef idx="0">
-            <a:schemeClr val="accent1"/>
-          </a:effectRef>
-          <a:fontRef idx="minor">
-            <a:schemeClr val="lt1"/>
-          </a:fontRef>
-        </p:style>
-        <p:txBody>
-          <a:bodyPr rtlCol="0" anchor="ctr" wrap="square" lIns="72000" tIns="18000" rIns="72000" bIns="18000"/>
-          <a:lstStyle/>
-          <a:p>
-            <a:pPr algn="ctr"/>
-          </a:p>
-        </p:txBody>
-      </p:sp>
-      <p:sp>
-        <p:nvSpPr>
-          <p:cNvPr id="25" name="Rectangle 24"/>
-          <p:cNvSpPr/>
-          <p:nvPr/>
-        </p:nvSpPr>
-        <p:spPr>
-          <a:xfrm>
-            <a:off x="2053107" y="2899800"/>
-            <a:ext cx="152861" cy="1132200"/>
-          </a:xfrm>
-          <a:prstGeom prst="rect">
-            <a:avLst/>
-          </a:prstGeom>
-          <a:solidFill>
-            <a:srgbClr val="C9D2EC"/>
-          </a:solidFill>
-          <a:ln>
-            <a:noFill/>
-          </a:ln>
-          <a:effectLst/>
-        </p:spPr>
-        <p:style>
-          <a:lnRef idx="1">
-            <a:schemeClr val="accent1"/>
-          </a:lnRef>
-          <a:fillRef idx="3">
-            <a:schemeClr val="accent1"/>
-          </a:fillRef>
-          <a:effectRef idx="0">
-            <a:schemeClr val="accent1"/>
-          </a:effectRef>
-          <a:fontRef idx="minor">
-            <a:schemeClr val="lt1"/>
-          </a:fontRef>
-        </p:style>
-        <p:txBody>
-          <a:bodyPr rtlCol="0" anchor="ctr" wrap="square" lIns="72000" tIns="18000" rIns="72000" bIns="18000"/>
-          <a:lstStyle/>
-          <a:p>
-            <a:pPr algn="ctr"/>
-          </a:p>
-        </p:txBody>
-      </p:sp>
-      <p:sp>
-        <p:nvSpPr>
-          <p:cNvPr id="26" name="Rectangle 25"/>
-          <p:cNvSpPr/>
-          <p:nvPr/>
-        </p:nvSpPr>
-        <p:spPr>
-          <a:xfrm>
-            <a:off x="2263569" y="2699999"/>
-            <a:ext cx="152861" cy="1332000"/>
-          </a:xfrm>
-          <a:prstGeom prst="rect">
-            <a:avLst/>
-          </a:prstGeom>
-          <a:solidFill>
-            <a:srgbClr val="1F285A"/>
-          </a:solidFill>
-          <a:ln>
-            <a:noFill/>
-          </a:ln>
-          <a:effectLst/>
-        </p:spPr>
-        <p:style>
-          <a:lnRef idx="1">
-            <a:schemeClr val="accent1"/>
-          </a:lnRef>
-          <a:fillRef idx="3">
-            <a:schemeClr val="accent1"/>
-          </a:fillRef>
-          <a:effectRef idx="0">
-            <a:schemeClr val="accent1"/>
-          </a:effectRef>
-          <a:fontRef idx="minor">
-            <a:schemeClr val="lt1"/>
-          </a:fontRef>
-        </p:style>
-        <p:txBody>
-          <a:bodyPr rtlCol="0" anchor="ctr" wrap="square" lIns="72000" tIns="18000" rIns="72000" bIns="18000"/>
-          <a:lstStyle/>
-          <a:p>
-            <a:pPr algn="ctr"/>
-          </a:p>
-        </p:txBody>
-      </p:sp>
-      <p:sp>
-        <p:nvSpPr>
-          <p:cNvPr id="27" name="Rectangle 26"/>
-          <p:cNvSpPr/>
-          <p:nvPr/>
-        </p:nvSpPr>
-        <p:spPr>
-          <a:xfrm>
-            <a:off x="2474030" y="2966399"/>
-            <a:ext cx="152861" cy="1065600"/>
-          </a:xfrm>
-          <a:prstGeom prst="rect">
-            <a:avLst/>
-          </a:prstGeom>
-          <a:solidFill>
-            <a:srgbClr val="1F285A"/>
-          </a:solidFill>
-          <a:ln>
-            <a:noFill/>
-          </a:ln>
-          <a:effectLst/>
-        </p:spPr>
-        <p:style>
-          <a:lnRef idx="1">
-            <a:schemeClr val="accent1"/>
-          </a:lnRef>
-          <a:fillRef idx="3">
-            <a:schemeClr val="accent1"/>
-          </a:fillRef>
-          <a:effectRef idx="0">
-            <a:schemeClr val="accent1"/>
-          </a:effectRef>
-          <a:fontRef idx="minor">
-            <a:schemeClr val="lt1"/>
-          </a:fontRef>
-        </p:style>
-        <p:txBody>
-          <a:bodyPr rtlCol="0" anchor="ctr" wrap="square" lIns="72000" tIns="18000" rIns="72000" bIns="18000"/>
-          <a:lstStyle/>
-          <a:p>
-            <a:pPr algn="ctr"/>
-          </a:p>
-        </p:txBody>
-      </p:sp>
-      <p:sp>
-        <p:nvSpPr>
-          <p:cNvPr id="28" name="Rectangle 27"/>
-          <p:cNvSpPr/>
-          <p:nvPr/>
-        </p:nvSpPr>
-        <p:spPr>
-          <a:xfrm>
-            <a:off x="2684492" y="3232799"/>
-            <a:ext cx="152861" cy="799200"/>
-          </a:xfrm>
-          <a:prstGeom prst="rect">
-            <a:avLst/>
-          </a:prstGeom>
-          <a:solidFill>
-            <a:srgbClr val="1F285A"/>
-          </a:solidFill>
-          <a:ln>
-            <a:noFill/>
-          </a:ln>
-          <a:effectLst/>
-        </p:spPr>
-        <p:style>
-          <a:lnRef idx="1">
-            <a:schemeClr val="accent1"/>
-          </a:lnRef>
-          <a:fillRef idx="3">
-            <a:schemeClr val="accent1"/>
-          </a:fillRef>
-          <a:effectRef idx="0">
-            <a:schemeClr val="accent1"/>
-          </a:effectRef>
-          <a:fontRef idx="minor">
-            <a:schemeClr val="lt1"/>
-          </a:fontRef>
-        </p:style>
-        <p:txBody>
-          <a:bodyPr rtlCol="0" anchor="ctr" wrap="square" lIns="72000" tIns="18000" rIns="72000" bIns="18000"/>
-          <a:lstStyle/>
-          <a:p>
-            <a:pPr algn="ctr"/>
-          </a:p>
-        </p:txBody>
-      </p:sp>
-      <p:sp>
-        <p:nvSpPr>
-          <p:cNvPr id="29" name="Rectangle 28"/>
-          <p:cNvSpPr/>
-          <p:nvPr/>
-        </p:nvSpPr>
-        <p:spPr>
-          <a:xfrm>
-            <a:off x="2894953" y="3366000"/>
-            <a:ext cx="152861" cy="666000"/>
-          </a:xfrm>
-          <a:prstGeom prst="rect">
-            <a:avLst/>
-          </a:prstGeom>
-          <a:solidFill>
-            <a:srgbClr val="1F285A"/>
-          </a:solidFill>
-          <a:ln>
-            <a:noFill/>
-          </a:ln>
-          <a:effectLst/>
-        </p:spPr>
-        <p:style>
-          <a:lnRef idx="1">
-            <a:schemeClr val="accent1"/>
-          </a:lnRef>
-          <a:fillRef idx="3">
-            <a:schemeClr val="accent1"/>
-          </a:fillRef>
-          <a:effectRef idx="0">
-            <a:schemeClr val="accent1"/>
-          </a:effectRef>
-          <a:fontRef idx="minor">
-            <a:schemeClr val="lt1"/>
-          </a:fontRef>
-        </p:style>
-        <p:txBody>
-          <a:bodyPr rtlCol="0" anchor="ctr" wrap="square" lIns="72000" tIns="18000" rIns="72000" bIns="18000"/>
-          <a:lstStyle/>
-          <a:p>
-            <a:pPr algn="ctr"/>
-          </a:p>
-        </p:txBody>
-      </p:sp>
-      <p:sp>
-        <p:nvSpPr>
-          <p:cNvPr id="30" name="Rectangle 29"/>
-          <p:cNvSpPr/>
-          <p:nvPr/>
-        </p:nvSpPr>
-        <p:spPr>
-          <a:xfrm>
-            <a:off x="3105415" y="3499199"/>
-            <a:ext cx="152861" cy="532800"/>
-          </a:xfrm>
-          <a:prstGeom prst="rect">
-            <a:avLst/>
-          </a:prstGeom>
-          <a:solidFill>
-            <a:srgbClr val="1F285A"/>
-          </a:solidFill>
-          <a:ln>
-            <a:noFill/>
-          </a:ln>
-          <a:effectLst/>
-        </p:spPr>
-        <p:style>
-          <a:lnRef idx="1">
-            <a:schemeClr val="accent1"/>
-          </a:lnRef>
-          <a:fillRef idx="3">
-            <a:schemeClr val="accent1"/>
-          </a:fillRef>
-          <a:effectRef idx="0">
-            <a:schemeClr val="accent1"/>
-          </a:effectRef>
-          <a:fontRef idx="minor">
-            <a:schemeClr val="lt1"/>
-          </a:fontRef>
-        </p:style>
-        <p:txBody>
-          <a:bodyPr rtlCol="0" anchor="ctr" wrap="square" lIns="72000" tIns="18000" rIns="72000" bIns="18000"/>
-          <a:lstStyle/>
-          <a:p>
-            <a:pPr algn="ctr"/>
-          </a:p>
-        </p:txBody>
-      </p:sp>
-      <p:sp>
-        <p:nvSpPr>
-          <p:cNvPr id="31" name="Rectangle 30"/>
-          <p:cNvSpPr/>
-          <p:nvPr/>
-        </p:nvSpPr>
-        <p:spPr>
-          <a:xfrm>
-            <a:off x="3315876" y="3632400"/>
-            <a:ext cx="152861" cy="399600"/>
-          </a:xfrm>
-          <a:prstGeom prst="rect">
-            <a:avLst/>
-          </a:prstGeom>
-          <a:solidFill>
-            <a:srgbClr val="1F285A"/>
-          </a:solidFill>
-          <a:ln>
-            <a:noFill/>
-          </a:ln>
-          <a:effectLst/>
-        </p:spPr>
-        <p:style>
-          <a:lnRef idx="1">
-            <a:schemeClr val="accent1"/>
-          </a:lnRef>
-          <a:fillRef idx="3">
-            <a:schemeClr val="accent1"/>
-          </a:fillRef>
-          <a:effectRef idx="0">
-            <a:schemeClr val="accent1"/>
-          </a:effectRef>
-          <a:fontRef idx="minor">
-            <a:schemeClr val="lt1"/>
-          </a:fontRef>
-        </p:style>
-        <p:txBody>
-          <a:bodyPr rtlCol="0" anchor="ctr" wrap="square" lIns="72000" tIns="18000" rIns="72000" bIns="18000"/>
-          <a:lstStyle/>
-          <a:p>
-            <a:pPr algn="ctr"/>
-          </a:p>
-        </p:txBody>
-      </p:sp>
-      <p:sp>
-        <p:nvSpPr>
-          <p:cNvPr id="32" name="Rectangle 31"/>
-          <p:cNvSpPr/>
-          <p:nvPr/>
-        </p:nvSpPr>
-        <p:spPr>
-          <a:xfrm>
-            <a:off x="3526338" y="3765599"/>
-            <a:ext cx="152861" cy="266400"/>
-          </a:xfrm>
-          <a:prstGeom prst="rect">
-            <a:avLst/>
-          </a:prstGeom>
-          <a:solidFill>
-            <a:srgbClr val="1F285A"/>
-          </a:solidFill>
-          <a:ln>
-            <a:noFill/>
-          </a:ln>
-          <a:effectLst/>
-        </p:spPr>
-        <p:style>
-          <a:lnRef idx="1">
-            <a:schemeClr val="accent1"/>
-          </a:lnRef>
-          <a:fillRef idx="3">
-            <a:schemeClr val="accent1"/>
-          </a:fillRef>
-          <a:effectRef idx="0">
-            <a:schemeClr val="accent1"/>
-          </a:effectRef>
-          <a:fontRef idx="minor">
-            <a:schemeClr val="lt1"/>
-          </a:fontRef>
-        </p:style>
-        <p:txBody>
-          <a:bodyPr rtlCol="0" anchor="ctr" wrap="square" lIns="72000" tIns="18000" rIns="72000" bIns="18000"/>
-          <a:lstStyle/>
-          <a:p>
-            <a:pPr algn="ctr"/>
-          </a:p>
-        </p:txBody>
-      </p:sp>
-      <p:cxnSp>
-        <p:nvCxnSpPr>
-          <p:cNvPr id="33" name="Connector 32"/>
-          <p:cNvCxnSpPr/>
-          <p:nvPr/>
-        </p:nvCxnSpPr>
-        <p:spPr>
-          <a:xfrm>
-            <a:off x="936000" y="4031999"/>
-            <a:ext cx="2808000" cy="0"/>
-          </a:xfrm>
-          <a:prstGeom prst="line">
-            <a:avLst/>
-          </a:prstGeom>
-          <a:ln w="9525">
-            <a:solidFill>
-              <a:srgbClr val="7F7F7F"/>
-            </a:solidFill>
-          </a:ln>
-        </p:spPr>
-        <p:style>
-          <a:lnRef idx="2">
-            <a:schemeClr val="accent1"/>
-          </a:lnRef>
-          <a:fillRef idx="0">
-            <a:schemeClr val="accent1"/>
-          </a:fillRef>
-          <a:effectRef idx="0">
-            <a:schemeClr val="accent1"/>
-          </a:effectRef>
-          <a:fontRef idx="minor">
-            <a:schemeClr val="tx1"/>
-          </a:fontRef>
-        </p:style>
-      </p:cxnSp>
-      <p:cxnSp>
-        <p:nvCxnSpPr>
-          <p:cNvPr id="34" name="Connector 33"/>
-          <p:cNvCxnSpPr/>
-          <p:nvPr/>
-        </p:nvCxnSpPr>
-        <p:spPr>
-          <a:xfrm>
-            <a:off x="2339999" y="2484000"/>
-            <a:ext cx="0" cy="1547999"/>
-          </a:xfrm>
-          <a:prstGeom prst="line">
-            <a:avLst/>
-          </a:prstGeom>
-          <a:ln w="12700">
-            <a:solidFill>
-              <a:srgbClr val="1F285A"/>
-            </a:solidFill>
-            <a:prstDash val="dash"/>
-          </a:ln>
-        </p:spPr>
-        <p:style>
-          <a:lnRef idx="2">
-            <a:schemeClr val="accent1"/>
-          </a:lnRef>
-          <a:fillRef idx="0">
-            <a:schemeClr val="accent1"/>
-          </a:fillRef>
-          <a:effectRef idx="0">
-            <a:schemeClr val="accent1"/>
-          </a:effectRef>
-          <a:fontRef idx="minor">
-            <a:schemeClr val="tx1"/>
-          </a:fontRef>
-        </p:style>
-      </p:cxnSp>
-      <p:sp>
-        <p:nvSpPr>
-          <p:cNvPr id="35" name="TextBox 34"/>
-          <p:cNvSpPr txBox="1"/>
-          <p:nvPr/>
-        </p:nvSpPr>
-        <p:spPr>
-          <a:xfrm>
-            <a:off x="1907999" y="2286000"/>
-            <a:ext cx="864000" cy="198000"/>
-          </a:xfrm>
-          <a:prstGeom prst="rect">
-            <a:avLst/>
-          </a:prstGeom>
-          <a:noFill/>
-        </p:spPr>
-        <p:txBody>
-          <a:bodyPr wrap="square" anchor="ctr" lIns="36000" rIns="36000" tIns="18000" bIns="18000">
-            <a:spAutoFit/>
-          </a:bodyPr>
           <a:lstStyle/>
           <a:p>
             <a:pPr algn="ctr">
@@ -14842,7 +14217,7 @@
               </a:spcAft>
             </a:pPr>
             <a:r>
-              <a:rPr sz="950" b="1">
+              <a:rPr sz="900" b="1">
                 <a:solidFill>
                   <a:srgbClr val="1F285A"/>
                 </a:solidFill>
@@ -14850,21 +14225,67 @@
                 <a:ea typeface="メイリオ"/>
                 <a:cs typeface="メイリオ"/>
               </a:rPr>
-              <a:t>検索</a:t>
-            </a:r>
-          </a:p>
-        </p:txBody>
-      </p:sp>
-      <p:sp>
-        <p:nvSpPr>
-          <p:cNvPr id="36" name="TextBox 35"/>
+              <a:t>検索前のキーワード</a:t>
+            </a:r>
+          </a:p>
+        </p:txBody>
+      </p:sp>
+      <p:sp>
+        <p:nvSpPr>
+          <p:cNvPr id="21" name="Rectangle 20"/>
+          <p:cNvSpPr/>
+          <p:nvPr/>
+        </p:nvSpPr>
+        <p:spPr>
+          <a:xfrm>
+            <a:off x="792000" y="2736000"/>
+            <a:ext cx="1475999" cy="1295999"/>
+          </a:xfrm>
+          <a:prstGeom prst="rect">
+            <a:avLst/>
+          </a:prstGeom>
+          <a:solidFill>
+            <a:srgbClr val="FFFFFF"/>
+          </a:solidFill>
+          <a:ln w="9525">
+            <a:solidFill>
+              <a:srgbClr val="D9D9D9"/>
+            </a:solidFill>
+          </a:ln>
+          <a:effectLst/>
+        </p:spPr>
+        <p:style>
+          <a:lnRef idx="1">
+            <a:schemeClr val="accent1"/>
+          </a:lnRef>
+          <a:fillRef idx="3">
+            <a:schemeClr val="accent1"/>
+          </a:fillRef>
+          <a:effectRef idx="0">
+            <a:schemeClr val="accent1"/>
+          </a:effectRef>
+          <a:fontRef idx="minor">
+            <a:schemeClr val="lt1"/>
+          </a:fontRef>
+        </p:style>
+        <p:txBody>
+          <a:bodyPr rtlCol="0" anchor="ctr" wrap="square" lIns="72000" tIns="18000" rIns="72000" bIns="18000"/>
+          <a:lstStyle/>
+          <a:p>
+            <a:pPr algn="ctr"/>
+          </a:p>
+        </p:txBody>
+      </p:sp>
+      <p:sp>
+        <p:nvSpPr>
+          <p:cNvPr id="22" name="TextBox 21"/>
           <p:cNvSpPr txBox="1"/>
           <p:nvPr/>
         </p:nvSpPr>
         <p:spPr>
           <a:xfrm>
-            <a:off x="936000" y="4050000"/>
-            <a:ext cx="1403999" cy="180000"/>
+            <a:off x="810000" y="2736000"/>
+            <a:ext cx="180000" cy="259200"/>
           </a:xfrm>
           <a:prstGeom prst="rect">
             <a:avLst/>
@@ -14872,7 +14293,7 @@
           <a:noFill/>
         </p:spPr>
         <p:txBody>
-          <a:bodyPr wrap="square" anchor="t" lIns="36000" rIns="36000" tIns="18000" bIns="18000">
+          <a:bodyPr wrap="square" anchor="ctr" lIns="36000" rIns="36000" tIns="18000" bIns="18000">
             <a:spAutoFit/>
           </a:bodyPr>
           <a:lstStyle/>
@@ -14886,7 +14307,7 @@
               </a:spcAft>
             </a:pPr>
             <a:r>
-              <a:rPr sz="950" b="0">
+              <a:rPr sz="800" b="1">
                 <a:solidFill>
                   <a:srgbClr val="7F7F7F"/>
                 </a:solidFill>
@@ -14894,21 +14315,146 @@
                 <a:ea typeface="メイリオ"/>
                 <a:cs typeface="メイリオ"/>
               </a:rPr>
-              <a:t>検索前</a:t>
-            </a:r>
-          </a:p>
-        </p:txBody>
-      </p:sp>
-      <p:sp>
-        <p:nvSpPr>
-          <p:cNvPr id="37" name="TextBox 36"/>
+              <a:t>1</a:t>
+            </a:r>
+          </a:p>
+        </p:txBody>
+      </p:sp>
+      <p:sp>
+        <p:nvSpPr>
+          <p:cNvPr id="23" name="Rounded Rectangle 22"/>
+          <p:cNvSpPr/>
+          <p:nvPr/>
+        </p:nvSpPr>
+        <p:spPr>
+          <a:xfrm>
+            <a:off x="990000" y="2813760"/>
+            <a:ext cx="446399" cy="103679"/>
+          </a:xfrm>
+          <a:prstGeom prst="roundRect">
+            <a:avLst>
+              <a:gd name="adj" fmla="val 50000"/>
+            </a:avLst>
+          </a:prstGeom>
+          <a:solidFill>
+            <a:srgbClr val="D9D9D9"/>
+          </a:solidFill>
+          <a:ln>
+            <a:noFill/>
+          </a:ln>
+          <a:effectLst/>
+        </p:spPr>
+        <p:style>
+          <a:lnRef idx="1">
+            <a:schemeClr val="accent1"/>
+          </a:lnRef>
+          <a:fillRef idx="3">
+            <a:schemeClr val="accent1"/>
+          </a:fillRef>
+          <a:effectRef idx="0">
+            <a:schemeClr val="accent1"/>
+          </a:effectRef>
+          <a:fontRef idx="minor">
+            <a:schemeClr val="lt1"/>
+          </a:fontRef>
+        </p:style>
+        <p:txBody>
+          <a:bodyPr rtlCol="0" anchor="ctr" wrap="square" lIns="72000" tIns="18000" rIns="72000" bIns="18000"/>
+          <a:lstStyle/>
+          <a:p>
+            <a:pPr algn="ctr"/>
+          </a:p>
+        </p:txBody>
+      </p:sp>
+      <p:sp>
+        <p:nvSpPr>
+          <p:cNvPr id="24" name="Rectangle 23"/>
+          <p:cNvSpPr/>
+          <p:nvPr/>
+        </p:nvSpPr>
+        <p:spPr>
+          <a:xfrm>
+            <a:off x="1745999" y="2818944"/>
+            <a:ext cx="468000" cy="93312"/>
+          </a:xfrm>
+          <a:prstGeom prst="rect">
+            <a:avLst/>
+          </a:prstGeom>
+          <a:solidFill>
+            <a:srgbClr val="C9D2EC"/>
+          </a:solidFill>
+          <a:ln>
+            <a:noFill/>
+          </a:ln>
+          <a:effectLst/>
+        </p:spPr>
+        <p:style>
+          <a:lnRef idx="1">
+            <a:schemeClr val="accent1"/>
+          </a:lnRef>
+          <a:fillRef idx="3">
+            <a:schemeClr val="accent1"/>
+          </a:fillRef>
+          <a:effectRef idx="0">
+            <a:schemeClr val="accent1"/>
+          </a:effectRef>
+          <a:fontRef idx="minor">
+            <a:schemeClr val="lt1"/>
+          </a:fontRef>
+        </p:style>
+        <p:txBody>
+          <a:bodyPr rtlCol="0" anchor="ctr" wrap="square" lIns="72000" tIns="18000" rIns="72000" bIns="18000"/>
+          <a:lstStyle/>
+          <a:p>
+            <a:pPr algn="ctr"/>
+          </a:p>
+        </p:txBody>
+      </p:sp>
+      <p:cxnSp>
+        <p:nvCxnSpPr>
+          <p:cNvPr id="25" name="Connector 24"/>
+          <p:cNvCxnSpPr/>
+          <p:nvPr/>
+        </p:nvCxnSpPr>
+        <p:spPr>
+          <a:xfrm>
+            <a:off x="828000" y="2995200"/>
+            <a:ext cx="1404000" cy="0"/>
+          </a:xfrm>
+          <a:prstGeom prst="line">
+            <a:avLst/>
+          </a:prstGeom>
+          <a:ln w="6350">
+            <a:solidFill>
+              <a:srgbClr val="F2F2F2"/>
+            </a:solidFill>
+          </a:ln>
+        </p:spPr>
+        <p:style>
+          <a:lnRef idx="2">
+            <a:schemeClr val="accent1"/>
+          </a:lnRef>
+          <a:fillRef idx="0">
+            <a:schemeClr val="accent1"/>
+          </a:fillRef>
+          <a:effectRef idx="0">
+            <a:schemeClr val="accent1"/>
+          </a:effectRef>
+          <a:fontRef idx="minor">
+            <a:schemeClr val="tx1"/>
+          </a:fontRef>
+        </p:style>
+      </p:cxnSp>
+      <p:sp>
+        <p:nvSpPr>
+          <p:cNvPr id="26" name="TextBox 25"/>
           <p:cNvSpPr txBox="1"/>
           <p:nvPr/>
         </p:nvSpPr>
         <p:spPr>
           <a:xfrm>
-            <a:off x="2339999" y="4050000"/>
-            <a:ext cx="1404000" cy="180000"/>
+            <a:off x="810000" y="2995200"/>
+            <a:ext cx="180000" cy="259200"/>
           </a:xfrm>
           <a:prstGeom prst="rect">
             <a:avLst/>
@@ -14916,7 +14462,7 @@
           <a:noFill/>
         </p:spPr>
         <p:txBody>
-          <a:bodyPr wrap="square" anchor="t" lIns="36000" rIns="36000" tIns="18000" bIns="18000">
+          <a:bodyPr wrap="square" anchor="ctr" lIns="36000" rIns="36000" tIns="18000" bIns="18000">
             <a:spAutoFit/>
           </a:bodyPr>
           <a:lstStyle/>
@@ -14930,7 +14476,7 @@
               </a:spcAft>
             </a:pPr>
             <a:r>
-              <a:rPr sz="950" b="0">
+              <a:rPr sz="800" b="1">
                 <a:solidFill>
                   <a:srgbClr val="7F7F7F"/>
                 </a:solidFill>
@@ -14938,14 +14484,1573 @@
                 <a:ea typeface="メイリオ"/>
                 <a:cs typeface="メイリオ"/>
               </a:rPr>
-              <a:t>検索後</a:t>
-            </a:r>
-          </a:p>
-        </p:txBody>
-      </p:sp>
+              <a:t>2</a:t>
+            </a:r>
+          </a:p>
+        </p:txBody>
+      </p:sp>
+      <p:sp>
+        <p:nvSpPr>
+          <p:cNvPr id="27" name="Rounded Rectangle 26"/>
+          <p:cNvSpPr/>
+          <p:nvPr/>
+        </p:nvSpPr>
+        <p:spPr>
+          <a:xfrm>
+            <a:off x="990000" y="3072960"/>
+            <a:ext cx="345599" cy="103679"/>
+          </a:xfrm>
+          <a:prstGeom prst="roundRect">
+            <a:avLst>
+              <a:gd name="adj" fmla="val 50000"/>
+            </a:avLst>
+          </a:prstGeom>
+          <a:solidFill>
+            <a:srgbClr val="D9D9D9"/>
+          </a:solidFill>
+          <a:ln>
+            <a:noFill/>
+          </a:ln>
+          <a:effectLst/>
+        </p:spPr>
+        <p:style>
+          <a:lnRef idx="1">
+            <a:schemeClr val="accent1"/>
+          </a:lnRef>
+          <a:fillRef idx="3">
+            <a:schemeClr val="accent1"/>
+          </a:fillRef>
+          <a:effectRef idx="0">
+            <a:schemeClr val="accent1"/>
+          </a:effectRef>
+          <a:fontRef idx="minor">
+            <a:schemeClr val="lt1"/>
+          </a:fontRef>
+        </p:style>
+        <p:txBody>
+          <a:bodyPr rtlCol="0" anchor="ctr" wrap="square" lIns="72000" tIns="18000" rIns="72000" bIns="18000"/>
+          <a:lstStyle/>
+          <a:p>
+            <a:pPr algn="ctr"/>
+          </a:p>
+        </p:txBody>
+      </p:sp>
+      <p:sp>
+        <p:nvSpPr>
+          <p:cNvPr id="28" name="Rectangle 27"/>
+          <p:cNvSpPr/>
+          <p:nvPr/>
+        </p:nvSpPr>
+        <p:spPr>
+          <a:xfrm>
+            <a:off x="1745999" y="3078144"/>
+            <a:ext cx="351000" cy="93312"/>
+          </a:xfrm>
+          <a:prstGeom prst="rect">
+            <a:avLst/>
+          </a:prstGeom>
+          <a:solidFill>
+            <a:srgbClr val="C9D2EC"/>
+          </a:solidFill>
+          <a:ln>
+            <a:noFill/>
+          </a:ln>
+          <a:effectLst/>
+        </p:spPr>
+        <p:style>
+          <a:lnRef idx="1">
+            <a:schemeClr val="accent1"/>
+          </a:lnRef>
+          <a:fillRef idx="3">
+            <a:schemeClr val="accent1"/>
+          </a:fillRef>
+          <a:effectRef idx="0">
+            <a:schemeClr val="accent1"/>
+          </a:effectRef>
+          <a:fontRef idx="minor">
+            <a:schemeClr val="lt1"/>
+          </a:fontRef>
+        </p:style>
+        <p:txBody>
+          <a:bodyPr rtlCol="0" anchor="ctr" wrap="square" lIns="72000" tIns="18000" rIns="72000" bIns="18000"/>
+          <a:lstStyle/>
+          <a:p>
+            <a:pPr algn="ctr"/>
+          </a:p>
+        </p:txBody>
+      </p:sp>
+      <p:cxnSp>
+        <p:nvCxnSpPr>
+          <p:cNvPr id="29" name="Connector 28"/>
+          <p:cNvCxnSpPr/>
+          <p:nvPr/>
+        </p:nvCxnSpPr>
+        <p:spPr>
+          <a:xfrm>
+            <a:off x="828000" y="3254399"/>
+            <a:ext cx="1404000" cy="0"/>
+          </a:xfrm>
+          <a:prstGeom prst="line">
+            <a:avLst/>
+          </a:prstGeom>
+          <a:ln w="6350">
+            <a:solidFill>
+              <a:srgbClr val="F2F2F2"/>
+            </a:solidFill>
+          </a:ln>
+        </p:spPr>
+        <p:style>
+          <a:lnRef idx="2">
+            <a:schemeClr val="accent1"/>
+          </a:lnRef>
+          <a:fillRef idx="0">
+            <a:schemeClr val="accent1"/>
+          </a:fillRef>
+          <a:effectRef idx="0">
+            <a:schemeClr val="accent1"/>
+          </a:effectRef>
+          <a:fontRef idx="minor">
+            <a:schemeClr val="tx1"/>
+          </a:fontRef>
+        </p:style>
+      </p:cxnSp>
+      <p:sp>
+        <p:nvSpPr>
+          <p:cNvPr id="30" name="TextBox 29"/>
+          <p:cNvSpPr txBox="1"/>
+          <p:nvPr/>
+        </p:nvSpPr>
+        <p:spPr>
+          <a:xfrm>
+            <a:off x="810000" y="3254399"/>
+            <a:ext cx="180000" cy="259200"/>
+          </a:xfrm>
+          <a:prstGeom prst="rect">
+            <a:avLst/>
+          </a:prstGeom>
+          <a:noFill/>
+        </p:spPr>
+        <p:txBody>
+          <a:bodyPr wrap="square" anchor="ctr" lIns="36000" rIns="36000" tIns="18000" bIns="18000">
+            <a:spAutoFit/>
+          </a:bodyPr>
+          <a:lstStyle/>
+          <a:p>
+            <a:pPr algn="ctr">
+              <a:lnSpc>
+                <a:spcPct val="110000"/>
+              </a:lnSpc>
+              <a:spcAft>
+                <a:spcPts val="0"/>
+              </a:spcAft>
+            </a:pPr>
+            <a:r>
+              <a:rPr sz="800" b="1">
+                <a:solidFill>
+                  <a:srgbClr val="7F7F7F"/>
+                </a:solidFill>
+                <a:latin typeface="メイリオ"/>
+                <a:ea typeface="メイリオ"/>
+                <a:cs typeface="メイリオ"/>
+              </a:rPr>
+              <a:t>3</a:t>
+            </a:r>
+          </a:p>
+        </p:txBody>
+      </p:sp>
+      <p:sp>
+        <p:nvSpPr>
+          <p:cNvPr id="31" name="Rounded Rectangle 30"/>
+          <p:cNvSpPr/>
+          <p:nvPr/>
+        </p:nvSpPr>
+        <p:spPr>
+          <a:xfrm>
+            <a:off x="990000" y="3332159"/>
+            <a:ext cx="503999" cy="103679"/>
+          </a:xfrm>
+          <a:prstGeom prst="roundRect">
+            <a:avLst>
+              <a:gd name="adj" fmla="val 50000"/>
+            </a:avLst>
+          </a:prstGeom>
+          <a:solidFill>
+            <a:srgbClr val="D9D9D9"/>
+          </a:solidFill>
+          <a:ln>
+            <a:noFill/>
+          </a:ln>
+          <a:effectLst/>
+        </p:spPr>
+        <p:style>
+          <a:lnRef idx="1">
+            <a:schemeClr val="accent1"/>
+          </a:lnRef>
+          <a:fillRef idx="3">
+            <a:schemeClr val="accent1"/>
+          </a:fillRef>
+          <a:effectRef idx="0">
+            <a:schemeClr val="accent1"/>
+          </a:effectRef>
+          <a:fontRef idx="minor">
+            <a:schemeClr val="lt1"/>
+          </a:fontRef>
+        </p:style>
+        <p:txBody>
+          <a:bodyPr rtlCol="0" anchor="ctr" wrap="square" lIns="72000" tIns="18000" rIns="72000" bIns="18000"/>
+          <a:lstStyle/>
+          <a:p>
+            <a:pPr algn="ctr"/>
+          </a:p>
+        </p:txBody>
+      </p:sp>
+      <p:sp>
+        <p:nvSpPr>
+          <p:cNvPr id="32" name="Rectangle 31"/>
+          <p:cNvSpPr/>
+          <p:nvPr/>
+        </p:nvSpPr>
+        <p:spPr>
+          <a:xfrm>
+            <a:off x="1745999" y="3337343"/>
+            <a:ext cx="257400" cy="93312"/>
+          </a:xfrm>
+          <a:prstGeom prst="rect">
+            <a:avLst/>
+          </a:prstGeom>
+          <a:solidFill>
+            <a:srgbClr val="C9D2EC"/>
+          </a:solidFill>
+          <a:ln>
+            <a:noFill/>
+          </a:ln>
+          <a:effectLst/>
+        </p:spPr>
+        <p:style>
+          <a:lnRef idx="1">
+            <a:schemeClr val="accent1"/>
+          </a:lnRef>
+          <a:fillRef idx="3">
+            <a:schemeClr val="accent1"/>
+          </a:fillRef>
+          <a:effectRef idx="0">
+            <a:schemeClr val="accent1"/>
+          </a:effectRef>
+          <a:fontRef idx="minor">
+            <a:schemeClr val="lt1"/>
+          </a:fontRef>
+        </p:style>
+        <p:txBody>
+          <a:bodyPr rtlCol="0" anchor="ctr" wrap="square" lIns="72000" tIns="18000" rIns="72000" bIns="18000"/>
+          <a:lstStyle/>
+          <a:p>
+            <a:pPr algn="ctr"/>
+          </a:p>
+        </p:txBody>
+      </p:sp>
+      <p:cxnSp>
+        <p:nvCxnSpPr>
+          <p:cNvPr id="33" name="Connector 32"/>
+          <p:cNvCxnSpPr/>
+          <p:nvPr/>
+        </p:nvCxnSpPr>
+        <p:spPr>
+          <a:xfrm>
+            <a:off x="828000" y="3513600"/>
+            <a:ext cx="1404000" cy="0"/>
+          </a:xfrm>
+          <a:prstGeom prst="line">
+            <a:avLst/>
+          </a:prstGeom>
+          <a:ln w="6350">
+            <a:solidFill>
+              <a:srgbClr val="F2F2F2"/>
+            </a:solidFill>
+          </a:ln>
+        </p:spPr>
+        <p:style>
+          <a:lnRef idx="2">
+            <a:schemeClr val="accent1"/>
+          </a:lnRef>
+          <a:fillRef idx="0">
+            <a:schemeClr val="accent1"/>
+          </a:fillRef>
+          <a:effectRef idx="0">
+            <a:schemeClr val="accent1"/>
+          </a:effectRef>
+          <a:fontRef idx="minor">
+            <a:schemeClr val="tx1"/>
+          </a:fontRef>
+        </p:style>
+      </p:cxnSp>
+      <p:sp>
+        <p:nvSpPr>
+          <p:cNvPr id="34" name="TextBox 33"/>
+          <p:cNvSpPr txBox="1"/>
+          <p:nvPr/>
+        </p:nvSpPr>
+        <p:spPr>
+          <a:xfrm>
+            <a:off x="810000" y="3513600"/>
+            <a:ext cx="180000" cy="259200"/>
+          </a:xfrm>
+          <a:prstGeom prst="rect">
+            <a:avLst/>
+          </a:prstGeom>
+          <a:noFill/>
+        </p:spPr>
+        <p:txBody>
+          <a:bodyPr wrap="square" anchor="ctr" lIns="36000" rIns="36000" tIns="18000" bIns="18000">
+            <a:spAutoFit/>
+          </a:bodyPr>
+          <a:lstStyle/>
+          <a:p>
+            <a:pPr algn="ctr">
+              <a:lnSpc>
+                <a:spcPct val="110000"/>
+              </a:lnSpc>
+              <a:spcAft>
+                <a:spcPts val="0"/>
+              </a:spcAft>
+            </a:pPr>
+            <a:r>
+              <a:rPr sz="800" b="1">
+                <a:solidFill>
+                  <a:srgbClr val="7F7F7F"/>
+                </a:solidFill>
+                <a:latin typeface="メイリオ"/>
+                <a:ea typeface="メイリオ"/>
+                <a:cs typeface="メイリオ"/>
+              </a:rPr>
+              <a:t>4</a:t>
+            </a:r>
+          </a:p>
+        </p:txBody>
+      </p:sp>
+      <p:sp>
+        <p:nvSpPr>
+          <p:cNvPr id="35" name="Rounded Rectangle 34"/>
+          <p:cNvSpPr/>
+          <p:nvPr/>
+        </p:nvSpPr>
+        <p:spPr>
+          <a:xfrm>
+            <a:off x="990000" y="3591359"/>
+            <a:ext cx="287999" cy="103679"/>
+          </a:xfrm>
+          <a:prstGeom prst="roundRect">
+            <a:avLst>
+              <a:gd name="adj" fmla="val 50000"/>
+            </a:avLst>
+          </a:prstGeom>
+          <a:solidFill>
+            <a:srgbClr val="D9D9D9"/>
+          </a:solidFill>
+          <a:ln>
+            <a:noFill/>
+          </a:ln>
+          <a:effectLst/>
+        </p:spPr>
+        <p:style>
+          <a:lnRef idx="1">
+            <a:schemeClr val="accent1"/>
+          </a:lnRef>
+          <a:fillRef idx="3">
+            <a:schemeClr val="accent1"/>
+          </a:fillRef>
+          <a:effectRef idx="0">
+            <a:schemeClr val="accent1"/>
+          </a:effectRef>
+          <a:fontRef idx="minor">
+            <a:schemeClr val="lt1"/>
+          </a:fontRef>
+        </p:style>
+        <p:txBody>
+          <a:bodyPr rtlCol="0" anchor="ctr" wrap="square" lIns="72000" tIns="18000" rIns="72000" bIns="18000"/>
+          <a:lstStyle/>
+          <a:p>
+            <a:pPr algn="ctr"/>
+          </a:p>
+        </p:txBody>
+      </p:sp>
+      <p:sp>
+        <p:nvSpPr>
+          <p:cNvPr id="36" name="Rectangle 35"/>
+          <p:cNvSpPr/>
+          <p:nvPr/>
+        </p:nvSpPr>
+        <p:spPr>
+          <a:xfrm>
+            <a:off x="1745999" y="3596543"/>
+            <a:ext cx="187200" cy="93312"/>
+          </a:xfrm>
+          <a:prstGeom prst="rect">
+            <a:avLst/>
+          </a:prstGeom>
+          <a:solidFill>
+            <a:srgbClr val="C9D2EC"/>
+          </a:solidFill>
+          <a:ln>
+            <a:noFill/>
+          </a:ln>
+          <a:effectLst/>
+        </p:spPr>
+        <p:style>
+          <a:lnRef idx="1">
+            <a:schemeClr val="accent1"/>
+          </a:lnRef>
+          <a:fillRef idx="3">
+            <a:schemeClr val="accent1"/>
+          </a:fillRef>
+          <a:effectRef idx="0">
+            <a:schemeClr val="accent1"/>
+          </a:effectRef>
+          <a:fontRef idx="minor">
+            <a:schemeClr val="lt1"/>
+          </a:fontRef>
+        </p:style>
+        <p:txBody>
+          <a:bodyPr rtlCol="0" anchor="ctr" wrap="square" lIns="72000" tIns="18000" rIns="72000" bIns="18000"/>
+          <a:lstStyle/>
+          <a:p>
+            <a:pPr algn="ctr"/>
+          </a:p>
+        </p:txBody>
+      </p:sp>
+      <p:cxnSp>
+        <p:nvCxnSpPr>
+          <p:cNvPr id="37" name="Connector 36"/>
+          <p:cNvCxnSpPr/>
+          <p:nvPr/>
+        </p:nvCxnSpPr>
+        <p:spPr>
+          <a:xfrm>
+            <a:off x="828000" y="3772800"/>
+            <a:ext cx="1404000" cy="0"/>
+          </a:xfrm>
+          <a:prstGeom prst="line">
+            <a:avLst/>
+          </a:prstGeom>
+          <a:ln w="6350">
+            <a:solidFill>
+              <a:srgbClr val="F2F2F2"/>
+            </a:solidFill>
+          </a:ln>
+        </p:spPr>
+        <p:style>
+          <a:lnRef idx="2">
+            <a:schemeClr val="accent1"/>
+          </a:lnRef>
+          <a:fillRef idx="0">
+            <a:schemeClr val="accent1"/>
+          </a:fillRef>
+          <a:effectRef idx="0">
+            <a:schemeClr val="accent1"/>
+          </a:effectRef>
+          <a:fontRef idx="minor">
+            <a:schemeClr val="tx1"/>
+          </a:fontRef>
+        </p:style>
+      </p:cxnSp>
       <p:sp>
         <p:nvSpPr>
           <p:cNvPr id="38" name="TextBox 37"/>
+          <p:cNvSpPr txBox="1"/>
+          <p:nvPr/>
+        </p:nvSpPr>
+        <p:spPr>
+          <a:xfrm>
+            <a:off x="810000" y="3772800"/>
+            <a:ext cx="180000" cy="259200"/>
+          </a:xfrm>
+          <a:prstGeom prst="rect">
+            <a:avLst/>
+          </a:prstGeom>
+          <a:noFill/>
+        </p:spPr>
+        <p:txBody>
+          <a:bodyPr wrap="square" anchor="ctr" lIns="36000" rIns="36000" tIns="18000" bIns="18000">
+            <a:spAutoFit/>
+          </a:bodyPr>
+          <a:lstStyle/>
+          <a:p>
+            <a:pPr algn="ctr">
+              <a:lnSpc>
+                <a:spcPct val="110000"/>
+              </a:lnSpc>
+              <a:spcAft>
+                <a:spcPts val="0"/>
+              </a:spcAft>
+            </a:pPr>
+            <a:r>
+              <a:rPr sz="800" b="1">
+                <a:solidFill>
+                  <a:srgbClr val="7F7F7F"/>
+                </a:solidFill>
+                <a:latin typeface="メイリオ"/>
+                <a:ea typeface="メイリオ"/>
+                <a:cs typeface="メイリオ"/>
+              </a:rPr>
+              <a:t>5</a:t>
+            </a:r>
+          </a:p>
+        </p:txBody>
+      </p:sp>
+      <p:sp>
+        <p:nvSpPr>
+          <p:cNvPr id="39" name="Rounded Rectangle 38"/>
+          <p:cNvSpPr/>
+          <p:nvPr/>
+        </p:nvSpPr>
+        <p:spPr>
+          <a:xfrm>
+            <a:off x="990000" y="3850560"/>
+            <a:ext cx="395999" cy="103679"/>
+          </a:xfrm>
+          <a:prstGeom prst="roundRect">
+            <a:avLst>
+              <a:gd name="adj" fmla="val 50000"/>
+            </a:avLst>
+          </a:prstGeom>
+          <a:solidFill>
+            <a:srgbClr val="D9D9D9"/>
+          </a:solidFill>
+          <a:ln>
+            <a:noFill/>
+          </a:ln>
+          <a:effectLst/>
+        </p:spPr>
+        <p:style>
+          <a:lnRef idx="1">
+            <a:schemeClr val="accent1"/>
+          </a:lnRef>
+          <a:fillRef idx="3">
+            <a:schemeClr val="accent1"/>
+          </a:fillRef>
+          <a:effectRef idx="0">
+            <a:schemeClr val="accent1"/>
+          </a:effectRef>
+          <a:fontRef idx="minor">
+            <a:schemeClr val="lt1"/>
+          </a:fontRef>
+        </p:style>
+        <p:txBody>
+          <a:bodyPr rtlCol="0" anchor="ctr" wrap="square" lIns="72000" tIns="18000" rIns="72000" bIns="18000"/>
+          <a:lstStyle/>
+          <a:p>
+            <a:pPr algn="ctr"/>
+          </a:p>
+        </p:txBody>
+      </p:sp>
+      <p:sp>
+        <p:nvSpPr>
+          <p:cNvPr id="40" name="Rectangle 39"/>
+          <p:cNvSpPr/>
+          <p:nvPr/>
+        </p:nvSpPr>
+        <p:spPr>
+          <a:xfrm>
+            <a:off x="1745999" y="3855744"/>
+            <a:ext cx="140400" cy="93312"/>
+          </a:xfrm>
+          <a:prstGeom prst="rect">
+            <a:avLst/>
+          </a:prstGeom>
+          <a:solidFill>
+            <a:srgbClr val="C9D2EC"/>
+          </a:solidFill>
+          <a:ln>
+            <a:noFill/>
+          </a:ln>
+          <a:effectLst/>
+        </p:spPr>
+        <p:style>
+          <a:lnRef idx="1">
+            <a:schemeClr val="accent1"/>
+          </a:lnRef>
+          <a:fillRef idx="3">
+            <a:schemeClr val="accent1"/>
+          </a:fillRef>
+          <a:effectRef idx="0">
+            <a:schemeClr val="accent1"/>
+          </a:effectRef>
+          <a:fontRef idx="minor">
+            <a:schemeClr val="lt1"/>
+          </a:fontRef>
+        </p:style>
+        <p:txBody>
+          <a:bodyPr rtlCol="0" anchor="ctr" wrap="square" lIns="72000" tIns="18000" rIns="72000" bIns="18000"/>
+          <a:lstStyle/>
+          <a:p>
+            <a:pPr algn="ctr"/>
+          </a:p>
+        </p:txBody>
+      </p:sp>
+      <p:sp>
+        <p:nvSpPr>
+          <p:cNvPr id="41" name="Rectangle 40"/>
+          <p:cNvSpPr/>
+          <p:nvPr/>
+        </p:nvSpPr>
+        <p:spPr>
+          <a:xfrm>
+            <a:off x="2412000" y="2484000"/>
+            <a:ext cx="1475999" cy="251999"/>
+          </a:xfrm>
+          <a:prstGeom prst="rect">
+            <a:avLst/>
+          </a:prstGeom>
+          <a:solidFill>
+            <a:srgbClr val="1F285A"/>
+          </a:solidFill>
+          <a:ln>
+            <a:noFill/>
+          </a:ln>
+          <a:effectLst/>
+        </p:spPr>
+        <p:style>
+          <a:lnRef idx="1">
+            <a:schemeClr val="accent1"/>
+          </a:lnRef>
+          <a:fillRef idx="3">
+            <a:schemeClr val="accent1"/>
+          </a:fillRef>
+          <a:effectRef idx="0">
+            <a:schemeClr val="accent1"/>
+          </a:effectRef>
+          <a:fontRef idx="minor">
+            <a:schemeClr val="lt1"/>
+          </a:fontRef>
+        </p:style>
+        <p:txBody>
+          <a:bodyPr rtlCol="0" anchor="ctr" wrap="square" lIns="72000" tIns="18000" rIns="72000" bIns="18000"/>
+          <a:lstStyle/>
+          <a:p>
+            <a:pPr algn="ctr">
+              <a:lnSpc>
+                <a:spcPct val="110000"/>
+              </a:lnSpc>
+              <a:spcAft>
+                <a:spcPts val="0"/>
+              </a:spcAft>
+            </a:pPr>
+            <a:r>
+              <a:rPr sz="900" b="1">
+                <a:solidFill>
+                  <a:srgbClr val="FFFFFF"/>
+                </a:solidFill>
+                <a:latin typeface="メイリオ"/>
+                <a:ea typeface="メイリオ"/>
+                <a:cs typeface="メイリオ"/>
+              </a:rPr>
+              <a:t>検索後のキーワード</a:t>
+            </a:r>
+          </a:p>
+        </p:txBody>
+      </p:sp>
+      <p:sp>
+        <p:nvSpPr>
+          <p:cNvPr id="42" name="Rectangle 41"/>
+          <p:cNvSpPr/>
+          <p:nvPr/>
+        </p:nvSpPr>
+        <p:spPr>
+          <a:xfrm>
+            <a:off x="2412000" y="2736000"/>
+            <a:ext cx="1475999" cy="1295999"/>
+          </a:xfrm>
+          <a:prstGeom prst="rect">
+            <a:avLst/>
+          </a:prstGeom>
+          <a:solidFill>
+            <a:srgbClr val="FFFFFF"/>
+          </a:solidFill>
+          <a:ln w="9525">
+            <a:solidFill>
+              <a:srgbClr val="D9D9D9"/>
+            </a:solidFill>
+          </a:ln>
+          <a:effectLst/>
+        </p:spPr>
+        <p:style>
+          <a:lnRef idx="1">
+            <a:schemeClr val="accent1"/>
+          </a:lnRef>
+          <a:fillRef idx="3">
+            <a:schemeClr val="accent1"/>
+          </a:fillRef>
+          <a:effectRef idx="0">
+            <a:schemeClr val="accent1"/>
+          </a:effectRef>
+          <a:fontRef idx="minor">
+            <a:schemeClr val="lt1"/>
+          </a:fontRef>
+        </p:style>
+        <p:txBody>
+          <a:bodyPr rtlCol="0" anchor="ctr" wrap="square" lIns="72000" tIns="18000" rIns="72000" bIns="18000"/>
+          <a:lstStyle/>
+          <a:p>
+            <a:pPr algn="ctr"/>
+          </a:p>
+        </p:txBody>
+      </p:sp>
+      <p:sp>
+        <p:nvSpPr>
+          <p:cNvPr id="43" name="TextBox 42"/>
+          <p:cNvSpPr txBox="1"/>
+          <p:nvPr/>
+        </p:nvSpPr>
+        <p:spPr>
+          <a:xfrm>
+            <a:off x="2430000" y="2736000"/>
+            <a:ext cx="180000" cy="259200"/>
+          </a:xfrm>
+          <a:prstGeom prst="rect">
+            <a:avLst/>
+          </a:prstGeom>
+          <a:noFill/>
+        </p:spPr>
+        <p:txBody>
+          <a:bodyPr wrap="square" anchor="ctr" lIns="36000" rIns="36000" tIns="18000" bIns="18000">
+            <a:spAutoFit/>
+          </a:bodyPr>
+          <a:lstStyle/>
+          <a:p>
+            <a:pPr algn="ctr">
+              <a:lnSpc>
+                <a:spcPct val="110000"/>
+              </a:lnSpc>
+              <a:spcAft>
+                <a:spcPts val="0"/>
+              </a:spcAft>
+            </a:pPr>
+            <a:r>
+              <a:rPr sz="800" b="1">
+                <a:solidFill>
+                  <a:srgbClr val="7F7F7F"/>
+                </a:solidFill>
+                <a:latin typeface="メイリオ"/>
+                <a:ea typeface="メイリオ"/>
+                <a:cs typeface="メイリオ"/>
+              </a:rPr>
+              <a:t>1</a:t>
+            </a:r>
+          </a:p>
+        </p:txBody>
+      </p:sp>
+      <p:sp>
+        <p:nvSpPr>
+          <p:cNvPr id="44" name="Rounded Rectangle 43"/>
+          <p:cNvSpPr/>
+          <p:nvPr/>
+        </p:nvSpPr>
+        <p:spPr>
+          <a:xfrm>
+            <a:off x="2610000" y="2813760"/>
+            <a:ext cx="395999" cy="103679"/>
+          </a:xfrm>
+          <a:prstGeom prst="roundRect">
+            <a:avLst>
+              <a:gd name="adj" fmla="val 50000"/>
+            </a:avLst>
+          </a:prstGeom>
+          <a:solidFill>
+            <a:srgbClr val="D9D9D9"/>
+          </a:solidFill>
+          <a:ln>
+            <a:noFill/>
+          </a:ln>
+          <a:effectLst/>
+        </p:spPr>
+        <p:style>
+          <a:lnRef idx="1">
+            <a:schemeClr val="accent1"/>
+          </a:lnRef>
+          <a:fillRef idx="3">
+            <a:schemeClr val="accent1"/>
+          </a:fillRef>
+          <a:effectRef idx="0">
+            <a:schemeClr val="accent1"/>
+          </a:effectRef>
+          <a:fontRef idx="minor">
+            <a:schemeClr val="lt1"/>
+          </a:fontRef>
+        </p:style>
+        <p:txBody>
+          <a:bodyPr rtlCol="0" anchor="ctr" wrap="square" lIns="72000" tIns="18000" rIns="72000" bIns="18000"/>
+          <a:lstStyle/>
+          <a:p>
+            <a:pPr algn="ctr"/>
+          </a:p>
+        </p:txBody>
+      </p:sp>
+      <p:sp>
+        <p:nvSpPr>
+          <p:cNvPr id="45" name="Rectangle 44"/>
+          <p:cNvSpPr/>
+          <p:nvPr/>
+        </p:nvSpPr>
+        <p:spPr>
+          <a:xfrm>
+            <a:off x="3366000" y="2818944"/>
+            <a:ext cx="468000" cy="93312"/>
+          </a:xfrm>
+          <a:prstGeom prst="rect">
+            <a:avLst/>
+          </a:prstGeom>
+          <a:solidFill>
+            <a:srgbClr val="1F285A"/>
+          </a:solidFill>
+          <a:ln>
+            <a:noFill/>
+          </a:ln>
+          <a:effectLst/>
+        </p:spPr>
+        <p:style>
+          <a:lnRef idx="1">
+            <a:schemeClr val="accent1"/>
+          </a:lnRef>
+          <a:fillRef idx="3">
+            <a:schemeClr val="accent1"/>
+          </a:fillRef>
+          <a:effectRef idx="0">
+            <a:schemeClr val="accent1"/>
+          </a:effectRef>
+          <a:fontRef idx="minor">
+            <a:schemeClr val="lt1"/>
+          </a:fontRef>
+        </p:style>
+        <p:txBody>
+          <a:bodyPr rtlCol="0" anchor="ctr" wrap="square" lIns="72000" tIns="18000" rIns="72000" bIns="18000"/>
+          <a:lstStyle/>
+          <a:p>
+            <a:pPr algn="ctr"/>
+          </a:p>
+        </p:txBody>
+      </p:sp>
+      <p:cxnSp>
+        <p:nvCxnSpPr>
+          <p:cNvPr id="46" name="Connector 45"/>
+          <p:cNvCxnSpPr/>
+          <p:nvPr/>
+        </p:nvCxnSpPr>
+        <p:spPr>
+          <a:xfrm>
+            <a:off x="2448000" y="2995200"/>
+            <a:ext cx="1404000" cy="0"/>
+          </a:xfrm>
+          <a:prstGeom prst="line">
+            <a:avLst/>
+          </a:prstGeom>
+          <a:ln w="6350">
+            <a:solidFill>
+              <a:srgbClr val="F2F2F2"/>
+            </a:solidFill>
+          </a:ln>
+        </p:spPr>
+        <p:style>
+          <a:lnRef idx="2">
+            <a:schemeClr val="accent1"/>
+          </a:lnRef>
+          <a:fillRef idx="0">
+            <a:schemeClr val="accent1"/>
+          </a:fillRef>
+          <a:effectRef idx="0">
+            <a:schemeClr val="accent1"/>
+          </a:effectRef>
+          <a:fontRef idx="minor">
+            <a:schemeClr val="tx1"/>
+          </a:fontRef>
+        </p:style>
+      </p:cxnSp>
+      <p:sp>
+        <p:nvSpPr>
+          <p:cNvPr id="47" name="TextBox 46"/>
+          <p:cNvSpPr txBox="1"/>
+          <p:nvPr/>
+        </p:nvSpPr>
+        <p:spPr>
+          <a:xfrm>
+            <a:off x="2430000" y="2995200"/>
+            <a:ext cx="180000" cy="259200"/>
+          </a:xfrm>
+          <a:prstGeom prst="rect">
+            <a:avLst/>
+          </a:prstGeom>
+          <a:noFill/>
+        </p:spPr>
+        <p:txBody>
+          <a:bodyPr wrap="square" anchor="ctr" lIns="36000" rIns="36000" tIns="18000" bIns="18000">
+            <a:spAutoFit/>
+          </a:bodyPr>
+          <a:lstStyle/>
+          <a:p>
+            <a:pPr algn="ctr">
+              <a:lnSpc>
+                <a:spcPct val="110000"/>
+              </a:lnSpc>
+              <a:spcAft>
+                <a:spcPts val="0"/>
+              </a:spcAft>
+            </a:pPr>
+            <a:r>
+              <a:rPr sz="800" b="1">
+                <a:solidFill>
+                  <a:srgbClr val="7F7F7F"/>
+                </a:solidFill>
+                <a:latin typeface="メイリオ"/>
+                <a:ea typeface="メイリオ"/>
+                <a:cs typeface="メイリオ"/>
+              </a:rPr>
+              <a:t>2</a:t>
+            </a:r>
+          </a:p>
+        </p:txBody>
+      </p:sp>
+      <p:sp>
+        <p:nvSpPr>
+          <p:cNvPr id="48" name="Rounded Rectangle 47"/>
+          <p:cNvSpPr/>
+          <p:nvPr/>
+        </p:nvSpPr>
+        <p:spPr>
+          <a:xfrm>
+            <a:off x="2610000" y="3072960"/>
+            <a:ext cx="489599" cy="103679"/>
+          </a:xfrm>
+          <a:prstGeom prst="roundRect">
+            <a:avLst>
+              <a:gd name="adj" fmla="val 50000"/>
+            </a:avLst>
+          </a:prstGeom>
+          <a:solidFill>
+            <a:srgbClr val="D9D9D9"/>
+          </a:solidFill>
+          <a:ln>
+            <a:noFill/>
+          </a:ln>
+          <a:effectLst/>
+        </p:spPr>
+        <p:style>
+          <a:lnRef idx="1">
+            <a:schemeClr val="accent1"/>
+          </a:lnRef>
+          <a:fillRef idx="3">
+            <a:schemeClr val="accent1"/>
+          </a:fillRef>
+          <a:effectRef idx="0">
+            <a:schemeClr val="accent1"/>
+          </a:effectRef>
+          <a:fontRef idx="minor">
+            <a:schemeClr val="lt1"/>
+          </a:fontRef>
+        </p:style>
+        <p:txBody>
+          <a:bodyPr rtlCol="0" anchor="ctr" wrap="square" lIns="72000" tIns="18000" rIns="72000" bIns="18000"/>
+          <a:lstStyle/>
+          <a:p>
+            <a:pPr algn="ctr"/>
+          </a:p>
+        </p:txBody>
+      </p:sp>
+      <p:sp>
+        <p:nvSpPr>
+          <p:cNvPr id="49" name="Rectangle 48"/>
+          <p:cNvSpPr/>
+          <p:nvPr/>
+        </p:nvSpPr>
+        <p:spPr>
+          <a:xfrm>
+            <a:off x="3366000" y="3078144"/>
+            <a:ext cx="374400" cy="93312"/>
+          </a:xfrm>
+          <a:prstGeom prst="rect">
+            <a:avLst/>
+          </a:prstGeom>
+          <a:solidFill>
+            <a:srgbClr val="1F285A"/>
+          </a:solidFill>
+          <a:ln>
+            <a:noFill/>
+          </a:ln>
+          <a:effectLst/>
+        </p:spPr>
+        <p:style>
+          <a:lnRef idx="1">
+            <a:schemeClr val="accent1"/>
+          </a:lnRef>
+          <a:fillRef idx="3">
+            <a:schemeClr val="accent1"/>
+          </a:fillRef>
+          <a:effectRef idx="0">
+            <a:schemeClr val="accent1"/>
+          </a:effectRef>
+          <a:fontRef idx="minor">
+            <a:schemeClr val="lt1"/>
+          </a:fontRef>
+        </p:style>
+        <p:txBody>
+          <a:bodyPr rtlCol="0" anchor="ctr" wrap="square" lIns="72000" tIns="18000" rIns="72000" bIns="18000"/>
+          <a:lstStyle/>
+          <a:p>
+            <a:pPr algn="ctr"/>
+          </a:p>
+        </p:txBody>
+      </p:sp>
+      <p:cxnSp>
+        <p:nvCxnSpPr>
+          <p:cNvPr id="50" name="Connector 49"/>
+          <p:cNvCxnSpPr/>
+          <p:nvPr/>
+        </p:nvCxnSpPr>
+        <p:spPr>
+          <a:xfrm>
+            <a:off x="2448000" y="3254399"/>
+            <a:ext cx="1404000" cy="0"/>
+          </a:xfrm>
+          <a:prstGeom prst="line">
+            <a:avLst/>
+          </a:prstGeom>
+          <a:ln w="6350">
+            <a:solidFill>
+              <a:srgbClr val="F2F2F2"/>
+            </a:solidFill>
+          </a:ln>
+        </p:spPr>
+        <p:style>
+          <a:lnRef idx="2">
+            <a:schemeClr val="accent1"/>
+          </a:lnRef>
+          <a:fillRef idx="0">
+            <a:schemeClr val="accent1"/>
+          </a:fillRef>
+          <a:effectRef idx="0">
+            <a:schemeClr val="accent1"/>
+          </a:effectRef>
+          <a:fontRef idx="minor">
+            <a:schemeClr val="tx1"/>
+          </a:fontRef>
+        </p:style>
+      </p:cxnSp>
+      <p:sp>
+        <p:nvSpPr>
+          <p:cNvPr id="51" name="TextBox 50"/>
+          <p:cNvSpPr txBox="1"/>
+          <p:nvPr/>
+        </p:nvSpPr>
+        <p:spPr>
+          <a:xfrm>
+            <a:off x="2430000" y="3254399"/>
+            <a:ext cx="180000" cy="259200"/>
+          </a:xfrm>
+          <a:prstGeom prst="rect">
+            <a:avLst/>
+          </a:prstGeom>
+          <a:noFill/>
+        </p:spPr>
+        <p:txBody>
+          <a:bodyPr wrap="square" anchor="ctr" lIns="36000" rIns="36000" tIns="18000" bIns="18000">
+            <a:spAutoFit/>
+          </a:bodyPr>
+          <a:lstStyle/>
+          <a:p>
+            <a:pPr algn="ctr">
+              <a:lnSpc>
+                <a:spcPct val="110000"/>
+              </a:lnSpc>
+              <a:spcAft>
+                <a:spcPts val="0"/>
+              </a:spcAft>
+            </a:pPr>
+            <a:r>
+              <a:rPr sz="800" b="1">
+                <a:solidFill>
+                  <a:srgbClr val="7F7F7F"/>
+                </a:solidFill>
+                <a:latin typeface="メイリオ"/>
+                <a:ea typeface="メイリオ"/>
+                <a:cs typeface="メイリオ"/>
+              </a:rPr>
+              <a:t>3</a:t>
+            </a:r>
+          </a:p>
+        </p:txBody>
+      </p:sp>
+      <p:sp>
+        <p:nvSpPr>
+          <p:cNvPr id="52" name="Rounded Rectangle 51"/>
+          <p:cNvSpPr/>
+          <p:nvPr/>
+        </p:nvSpPr>
+        <p:spPr>
+          <a:xfrm>
+            <a:off x="2610000" y="3332159"/>
+            <a:ext cx="302399" cy="103679"/>
+          </a:xfrm>
+          <a:prstGeom prst="roundRect">
+            <a:avLst>
+              <a:gd name="adj" fmla="val 50000"/>
+            </a:avLst>
+          </a:prstGeom>
+          <a:solidFill>
+            <a:srgbClr val="D9D9D9"/>
+          </a:solidFill>
+          <a:ln>
+            <a:noFill/>
+          </a:ln>
+          <a:effectLst/>
+        </p:spPr>
+        <p:style>
+          <a:lnRef idx="1">
+            <a:schemeClr val="accent1"/>
+          </a:lnRef>
+          <a:fillRef idx="3">
+            <a:schemeClr val="accent1"/>
+          </a:fillRef>
+          <a:effectRef idx="0">
+            <a:schemeClr val="accent1"/>
+          </a:effectRef>
+          <a:fontRef idx="minor">
+            <a:schemeClr val="lt1"/>
+          </a:fontRef>
+        </p:style>
+        <p:txBody>
+          <a:bodyPr rtlCol="0" anchor="ctr" wrap="square" lIns="72000" tIns="18000" rIns="72000" bIns="18000"/>
+          <a:lstStyle/>
+          <a:p>
+            <a:pPr algn="ctr"/>
+          </a:p>
+        </p:txBody>
+      </p:sp>
+      <p:sp>
+        <p:nvSpPr>
+          <p:cNvPr id="53" name="Rectangle 52"/>
+          <p:cNvSpPr/>
+          <p:nvPr/>
+        </p:nvSpPr>
+        <p:spPr>
+          <a:xfrm>
+            <a:off x="3366000" y="3337343"/>
+            <a:ext cx="280800" cy="93312"/>
+          </a:xfrm>
+          <a:prstGeom prst="rect">
+            <a:avLst/>
+          </a:prstGeom>
+          <a:solidFill>
+            <a:srgbClr val="1F285A"/>
+          </a:solidFill>
+          <a:ln>
+            <a:noFill/>
+          </a:ln>
+          <a:effectLst/>
+        </p:spPr>
+        <p:style>
+          <a:lnRef idx="1">
+            <a:schemeClr val="accent1"/>
+          </a:lnRef>
+          <a:fillRef idx="3">
+            <a:schemeClr val="accent1"/>
+          </a:fillRef>
+          <a:effectRef idx="0">
+            <a:schemeClr val="accent1"/>
+          </a:effectRef>
+          <a:fontRef idx="minor">
+            <a:schemeClr val="lt1"/>
+          </a:fontRef>
+        </p:style>
+        <p:txBody>
+          <a:bodyPr rtlCol="0" anchor="ctr" wrap="square" lIns="72000" tIns="18000" rIns="72000" bIns="18000"/>
+          <a:lstStyle/>
+          <a:p>
+            <a:pPr algn="ctr"/>
+          </a:p>
+        </p:txBody>
+      </p:sp>
+      <p:cxnSp>
+        <p:nvCxnSpPr>
+          <p:cNvPr id="54" name="Connector 53"/>
+          <p:cNvCxnSpPr/>
+          <p:nvPr/>
+        </p:nvCxnSpPr>
+        <p:spPr>
+          <a:xfrm>
+            <a:off x="2448000" y="3513600"/>
+            <a:ext cx="1404000" cy="0"/>
+          </a:xfrm>
+          <a:prstGeom prst="line">
+            <a:avLst/>
+          </a:prstGeom>
+          <a:ln w="6350">
+            <a:solidFill>
+              <a:srgbClr val="F2F2F2"/>
+            </a:solidFill>
+          </a:ln>
+        </p:spPr>
+        <p:style>
+          <a:lnRef idx="2">
+            <a:schemeClr val="accent1"/>
+          </a:lnRef>
+          <a:fillRef idx="0">
+            <a:schemeClr val="accent1"/>
+          </a:fillRef>
+          <a:effectRef idx="0">
+            <a:schemeClr val="accent1"/>
+          </a:effectRef>
+          <a:fontRef idx="minor">
+            <a:schemeClr val="tx1"/>
+          </a:fontRef>
+        </p:style>
+      </p:cxnSp>
+      <p:sp>
+        <p:nvSpPr>
+          <p:cNvPr id="55" name="TextBox 54"/>
+          <p:cNvSpPr txBox="1"/>
+          <p:nvPr/>
+        </p:nvSpPr>
+        <p:spPr>
+          <a:xfrm>
+            <a:off x="2430000" y="3513600"/>
+            <a:ext cx="180000" cy="259200"/>
+          </a:xfrm>
+          <a:prstGeom prst="rect">
+            <a:avLst/>
+          </a:prstGeom>
+          <a:noFill/>
+        </p:spPr>
+        <p:txBody>
+          <a:bodyPr wrap="square" anchor="ctr" lIns="36000" rIns="36000" tIns="18000" bIns="18000">
+            <a:spAutoFit/>
+          </a:bodyPr>
+          <a:lstStyle/>
+          <a:p>
+            <a:pPr algn="ctr">
+              <a:lnSpc>
+                <a:spcPct val="110000"/>
+              </a:lnSpc>
+              <a:spcAft>
+                <a:spcPts val="0"/>
+              </a:spcAft>
+            </a:pPr>
+            <a:r>
+              <a:rPr sz="800" b="1">
+                <a:solidFill>
+                  <a:srgbClr val="7F7F7F"/>
+                </a:solidFill>
+                <a:latin typeface="メイリオ"/>
+                <a:ea typeface="メイリオ"/>
+                <a:cs typeface="メイリオ"/>
+              </a:rPr>
+              <a:t>4</a:t>
+            </a:r>
+          </a:p>
+        </p:txBody>
+      </p:sp>
+      <p:sp>
+        <p:nvSpPr>
+          <p:cNvPr id="56" name="Rounded Rectangle 55"/>
+          <p:cNvSpPr/>
+          <p:nvPr/>
+        </p:nvSpPr>
+        <p:spPr>
+          <a:xfrm>
+            <a:off x="2610000" y="3591359"/>
+            <a:ext cx="431999" cy="103679"/>
+          </a:xfrm>
+          <a:prstGeom prst="roundRect">
+            <a:avLst>
+              <a:gd name="adj" fmla="val 50000"/>
+            </a:avLst>
+          </a:prstGeom>
+          <a:solidFill>
+            <a:srgbClr val="D9D9D9"/>
+          </a:solidFill>
+          <a:ln>
+            <a:noFill/>
+          </a:ln>
+          <a:effectLst/>
+        </p:spPr>
+        <p:style>
+          <a:lnRef idx="1">
+            <a:schemeClr val="accent1"/>
+          </a:lnRef>
+          <a:fillRef idx="3">
+            <a:schemeClr val="accent1"/>
+          </a:fillRef>
+          <a:effectRef idx="0">
+            <a:schemeClr val="accent1"/>
+          </a:effectRef>
+          <a:fontRef idx="minor">
+            <a:schemeClr val="lt1"/>
+          </a:fontRef>
+        </p:style>
+        <p:txBody>
+          <a:bodyPr rtlCol="0" anchor="ctr" wrap="square" lIns="72000" tIns="18000" rIns="72000" bIns="18000"/>
+          <a:lstStyle/>
+          <a:p>
+            <a:pPr algn="ctr"/>
+          </a:p>
+        </p:txBody>
+      </p:sp>
+      <p:sp>
+        <p:nvSpPr>
+          <p:cNvPr id="57" name="Rectangle 56"/>
+          <p:cNvSpPr/>
+          <p:nvPr/>
+        </p:nvSpPr>
+        <p:spPr>
+          <a:xfrm>
+            <a:off x="3366000" y="3596543"/>
+            <a:ext cx="210600" cy="93312"/>
+          </a:xfrm>
+          <a:prstGeom prst="rect">
+            <a:avLst/>
+          </a:prstGeom>
+          <a:solidFill>
+            <a:srgbClr val="1F285A"/>
+          </a:solidFill>
+          <a:ln>
+            <a:noFill/>
+          </a:ln>
+          <a:effectLst/>
+        </p:spPr>
+        <p:style>
+          <a:lnRef idx="1">
+            <a:schemeClr val="accent1"/>
+          </a:lnRef>
+          <a:fillRef idx="3">
+            <a:schemeClr val="accent1"/>
+          </a:fillRef>
+          <a:effectRef idx="0">
+            <a:schemeClr val="accent1"/>
+          </a:effectRef>
+          <a:fontRef idx="minor">
+            <a:schemeClr val="lt1"/>
+          </a:fontRef>
+        </p:style>
+        <p:txBody>
+          <a:bodyPr rtlCol="0" anchor="ctr" wrap="square" lIns="72000" tIns="18000" rIns="72000" bIns="18000"/>
+          <a:lstStyle/>
+          <a:p>
+            <a:pPr algn="ctr"/>
+          </a:p>
+        </p:txBody>
+      </p:sp>
+      <p:cxnSp>
+        <p:nvCxnSpPr>
+          <p:cNvPr id="58" name="Connector 57"/>
+          <p:cNvCxnSpPr/>
+          <p:nvPr/>
+        </p:nvCxnSpPr>
+        <p:spPr>
+          <a:xfrm>
+            <a:off x="2448000" y="3772800"/>
+            <a:ext cx="1404000" cy="0"/>
+          </a:xfrm>
+          <a:prstGeom prst="line">
+            <a:avLst/>
+          </a:prstGeom>
+          <a:ln w="6350">
+            <a:solidFill>
+              <a:srgbClr val="F2F2F2"/>
+            </a:solidFill>
+          </a:ln>
+        </p:spPr>
+        <p:style>
+          <a:lnRef idx="2">
+            <a:schemeClr val="accent1"/>
+          </a:lnRef>
+          <a:fillRef idx="0">
+            <a:schemeClr val="accent1"/>
+          </a:fillRef>
+          <a:effectRef idx="0">
+            <a:schemeClr val="accent1"/>
+          </a:effectRef>
+          <a:fontRef idx="minor">
+            <a:schemeClr val="tx1"/>
+          </a:fontRef>
+        </p:style>
+      </p:cxnSp>
+      <p:sp>
+        <p:nvSpPr>
+          <p:cNvPr id="59" name="TextBox 58"/>
+          <p:cNvSpPr txBox="1"/>
+          <p:nvPr/>
+        </p:nvSpPr>
+        <p:spPr>
+          <a:xfrm>
+            <a:off x="2430000" y="3772800"/>
+            <a:ext cx="180000" cy="259200"/>
+          </a:xfrm>
+          <a:prstGeom prst="rect">
+            <a:avLst/>
+          </a:prstGeom>
+          <a:noFill/>
+        </p:spPr>
+        <p:txBody>
+          <a:bodyPr wrap="square" anchor="ctr" lIns="36000" rIns="36000" tIns="18000" bIns="18000">
+            <a:spAutoFit/>
+          </a:bodyPr>
+          <a:lstStyle/>
+          <a:p>
+            <a:pPr algn="ctr">
+              <a:lnSpc>
+                <a:spcPct val="110000"/>
+              </a:lnSpc>
+              <a:spcAft>
+                <a:spcPts val="0"/>
+              </a:spcAft>
+            </a:pPr>
+            <a:r>
+              <a:rPr sz="800" b="1">
+                <a:solidFill>
+                  <a:srgbClr val="7F7F7F"/>
+                </a:solidFill>
+                <a:latin typeface="メイリオ"/>
+                <a:ea typeface="メイリオ"/>
+                <a:cs typeface="メイリオ"/>
+              </a:rPr>
+              <a:t>5</a:t>
+            </a:r>
+          </a:p>
+        </p:txBody>
+      </p:sp>
+      <p:sp>
+        <p:nvSpPr>
+          <p:cNvPr id="60" name="Rounded Rectangle 59"/>
+          <p:cNvSpPr/>
+          <p:nvPr/>
+        </p:nvSpPr>
+        <p:spPr>
+          <a:xfrm>
+            <a:off x="2610000" y="3850560"/>
+            <a:ext cx="331199" cy="103679"/>
+          </a:xfrm>
+          <a:prstGeom prst="roundRect">
+            <a:avLst>
+              <a:gd name="adj" fmla="val 50000"/>
+            </a:avLst>
+          </a:prstGeom>
+          <a:solidFill>
+            <a:srgbClr val="D9D9D9"/>
+          </a:solidFill>
+          <a:ln>
+            <a:noFill/>
+          </a:ln>
+          <a:effectLst/>
+        </p:spPr>
+        <p:style>
+          <a:lnRef idx="1">
+            <a:schemeClr val="accent1"/>
+          </a:lnRef>
+          <a:fillRef idx="3">
+            <a:schemeClr val="accent1"/>
+          </a:fillRef>
+          <a:effectRef idx="0">
+            <a:schemeClr val="accent1"/>
+          </a:effectRef>
+          <a:fontRef idx="minor">
+            <a:schemeClr val="lt1"/>
+          </a:fontRef>
+        </p:style>
+        <p:txBody>
+          <a:bodyPr rtlCol="0" anchor="ctr" wrap="square" lIns="72000" tIns="18000" rIns="72000" bIns="18000"/>
+          <a:lstStyle/>
+          <a:p>
+            <a:pPr algn="ctr"/>
+          </a:p>
+        </p:txBody>
+      </p:sp>
+      <p:sp>
+        <p:nvSpPr>
+          <p:cNvPr id="61" name="Rectangle 60"/>
+          <p:cNvSpPr/>
+          <p:nvPr/>
+        </p:nvSpPr>
+        <p:spPr>
+          <a:xfrm>
+            <a:off x="3366000" y="3855744"/>
+            <a:ext cx="140400" cy="93312"/>
+          </a:xfrm>
+          <a:prstGeom prst="rect">
+            <a:avLst/>
+          </a:prstGeom>
+          <a:solidFill>
+            <a:srgbClr val="1F285A"/>
+          </a:solidFill>
+          <a:ln>
+            <a:noFill/>
+          </a:ln>
+          <a:effectLst/>
+        </p:spPr>
+        <p:style>
+          <a:lnRef idx="1">
+            <a:schemeClr val="accent1"/>
+          </a:lnRef>
+          <a:fillRef idx="3">
+            <a:schemeClr val="accent1"/>
+          </a:fillRef>
+          <a:effectRef idx="0">
+            <a:schemeClr val="accent1"/>
+          </a:effectRef>
+          <a:fontRef idx="minor">
+            <a:schemeClr val="lt1"/>
+          </a:fontRef>
+        </p:style>
+        <p:txBody>
+          <a:bodyPr rtlCol="0" anchor="ctr" wrap="square" lIns="72000" tIns="18000" rIns="72000" bIns="18000"/>
+          <a:lstStyle/>
+          <a:p>
+            <a:pPr algn="ctr"/>
+          </a:p>
+        </p:txBody>
+      </p:sp>
+      <p:sp>
+        <p:nvSpPr>
+          <p:cNvPr id="62" name="TextBox 61"/>
+          <p:cNvSpPr txBox="1"/>
+          <p:nvPr/>
+        </p:nvSpPr>
+        <p:spPr>
+          <a:xfrm>
+            <a:off x="792000" y="4050000"/>
+            <a:ext cx="3096000" cy="180000"/>
+          </a:xfrm>
+          <a:prstGeom prst="rect">
+            <a:avLst/>
+          </a:prstGeom>
+          <a:noFill/>
+        </p:spPr>
+        <p:txBody>
+          <a:bodyPr wrap="square" anchor="t" lIns="36000" rIns="36000" tIns="18000" bIns="18000">
+            <a:spAutoFit/>
+          </a:bodyPr>
+          <a:lstStyle/>
+          <a:p>
+            <a:pPr algn="ctr">
+              <a:lnSpc>
+                <a:spcPct val="110000"/>
+              </a:lnSpc>
+              <a:spcAft>
+                <a:spcPts val="0"/>
+              </a:spcAft>
+            </a:pPr>
+            <a:r>
+              <a:rPr sz="800" b="0">
+                <a:solidFill>
+                  <a:srgbClr val="7F7F7F"/>
+                </a:solidFill>
+                <a:latin typeface="メイリオ"/>
+                <a:ea typeface="メイリオ"/>
+                <a:cs typeface="メイリオ"/>
+              </a:rPr>
+              <a:t>※実際の前後検索データをもとに分析（キーワードは案件ごと）</a:t>
+            </a:r>
+          </a:p>
+        </p:txBody>
+      </p:sp>
+      <p:sp>
+        <p:nvSpPr>
+          <p:cNvPr id="63" name="TextBox 62"/>
           <p:cNvSpPr txBox="1"/>
           <p:nvPr/>
         </p:nvSpPr>
@@ -15031,7 +16136,7 @@
       </p:sp>
       <p:sp>
         <p:nvSpPr>
-          <p:cNvPr id="39" name="Rectangle 38"/>
+          <p:cNvPr id="64" name="Rectangle 63"/>
           <p:cNvSpPr/>
           <p:nvPr/>
         </p:nvSpPr>
@@ -15093,7 +16198,7 @@
       </p:sp>
       <p:sp>
         <p:nvSpPr>
-          <p:cNvPr id="40" name="Rectangle 39"/>
+          <p:cNvPr id="65" name="Rectangle 64"/>
           <p:cNvSpPr/>
           <p:nvPr/>
         </p:nvSpPr>
@@ -15155,7 +16260,7 @@
       </p:sp>
       <p:sp>
         <p:nvSpPr>
-          <p:cNvPr id="41" name="Rectangle 40"/>
+          <p:cNvPr id="66" name="Rectangle 65"/>
           <p:cNvSpPr/>
           <p:nvPr/>
         </p:nvSpPr>
@@ -15219,7 +16324,7 @@
       </p:sp>
       <p:cxnSp>
         <p:nvCxnSpPr>
-          <p:cNvPr id="42" name="Connector 41"/>
+          <p:cNvPr id="67" name="Connector 66"/>
           <p:cNvCxnSpPr/>
           <p:nvPr/>
         </p:nvCxnSpPr>
@@ -15255,7 +16360,7 @@
       </p:cxnSp>
       <p:sp>
         <p:nvSpPr>
-          <p:cNvPr id="43" name="Rounded Rectangle 42"/>
+          <p:cNvPr id="68" name="Rounded Rectangle 67"/>
           <p:cNvSpPr/>
           <p:nvPr/>
         </p:nvSpPr>
@@ -15319,7 +16424,7 @@
       </p:sp>
       <p:sp>
         <p:nvSpPr>
-          <p:cNvPr id="44" name="Rectangle 43"/>
+          <p:cNvPr id="69" name="Rectangle 68"/>
           <p:cNvSpPr/>
           <p:nvPr/>
         </p:nvSpPr>
@@ -15383,7 +16488,7 @@
       </p:sp>
       <p:cxnSp>
         <p:nvCxnSpPr>
-          <p:cNvPr id="45" name="Connector 44"/>
+          <p:cNvPr id="70" name="Connector 69"/>
           <p:cNvCxnSpPr/>
           <p:nvPr/>
         </p:nvCxnSpPr>
@@ -15419,7 +16524,7 @@
       </p:cxnSp>
       <p:sp>
         <p:nvSpPr>
-          <p:cNvPr id="46" name="Rounded Rectangle 45"/>
+          <p:cNvPr id="71" name="Rounded Rectangle 70"/>
           <p:cNvSpPr/>
           <p:nvPr/>
         </p:nvSpPr>
@@ -15483,7 +16588,7 @@
       </p:sp>
       <p:sp>
         <p:nvSpPr>
-          <p:cNvPr id="47" name="Rectangle 46"/>
+          <p:cNvPr id="72" name="Rectangle 71"/>
           <p:cNvSpPr/>
           <p:nvPr/>
         </p:nvSpPr>
@@ -15547,7 +16652,7 @@
       </p:sp>
       <p:cxnSp>
         <p:nvCxnSpPr>
-          <p:cNvPr id="48" name="Connector 47"/>
+          <p:cNvPr id="73" name="Connector 72"/>
           <p:cNvCxnSpPr/>
           <p:nvPr/>
         </p:nvCxnSpPr>
@@ -15583,7 +16688,7 @@
       </p:cxnSp>
       <p:sp>
         <p:nvSpPr>
-          <p:cNvPr id="49" name="Rounded Rectangle 48"/>
+          <p:cNvPr id="74" name="Rounded Rectangle 73"/>
           <p:cNvSpPr/>
           <p:nvPr/>
         </p:nvSpPr>
@@ -15647,7 +16752,7 @@
       </p:sp>
       <p:sp>
         <p:nvSpPr>
-          <p:cNvPr id="50" name="TextBox 49"/>
+          <p:cNvPr id="75" name="TextBox 74"/>
           <p:cNvSpPr txBox="1"/>
           <p:nvPr/>
         </p:nvSpPr>
@@ -15712,7 +16817,7 @@
       </p:sp>
       <p:cxnSp>
         <p:nvCxnSpPr>
-          <p:cNvPr id="51" name="Connector 50"/>
+          <p:cNvPr id="76" name="Connector 75"/>
           <p:cNvCxnSpPr/>
           <p:nvPr/>
         </p:nvCxnSpPr>
@@ -15747,7 +16852,7 @@
       </p:cxnSp>
       <p:sp>
         <p:nvSpPr>
-          <p:cNvPr id="52" name="Oval 51"/>
+          <p:cNvPr id="77" name="Oval 76"/>
           <p:cNvSpPr/>
           <p:nvPr/>
         </p:nvSpPr>
@@ -15793,7 +16898,7 @@
       </p:sp>
       <p:sp>
         <p:nvSpPr>
-          <p:cNvPr id="53" name="TextBox 52"/>
+          <p:cNvPr id="78" name="TextBox 77"/>
           <p:cNvSpPr txBox="1"/>
           <p:nvPr/>
         </p:nvSpPr>
@@ -15837,7 +16942,7 @@
       </p:sp>
       <p:sp>
         <p:nvSpPr>
-          <p:cNvPr id="54" name="TextBox 53"/>
+          <p:cNvPr id="79" name="TextBox 78"/>
           <p:cNvSpPr txBox="1"/>
           <p:nvPr/>
         </p:nvSpPr>
@@ -15881,7 +16986,7 @@
       </p:sp>
       <p:sp>
         <p:nvSpPr>
-          <p:cNvPr id="55" name="Oval 54"/>
+          <p:cNvPr id="80" name="Oval 79"/>
           <p:cNvSpPr/>
           <p:nvPr/>
         </p:nvSpPr>
@@ -15927,7 +17032,7 @@
       </p:sp>
       <p:sp>
         <p:nvSpPr>
-          <p:cNvPr id="56" name="TextBox 55"/>
+          <p:cNvPr id="81" name="TextBox 80"/>
           <p:cNvSpPr txBox="1"/>
           <p:nvPr/>
         </p:nvSpPr>
@@ -15971,7 +17076,7 @@
       </p:sp>
       <p:sp>
         <p:nvSpPr>
-          <p:cNvPr id="57" name="Rounded Rectangle 56"/>
+          <p:cNvPr id="82" name="Rounded Rectangle 81"/>
           <p:cNvSpPr/>
           <p:nvPr/>
         </p:nvSpPr>
@@ -16035,7 +17140,7 @@
       </p:sp>
       <p:sp>
         <p:nvSpPr>
-          <p:cNvPr id="58" name="Oval 57"/>
+          <p:cNvPr id="83" name="Oval 82"/>
           <p:cNvSpPr/>
           <p:nvPr/>
         </p:nvSpPr>
@@ -16081,7 +17186,7 @@
       </p:sp>
       <p:sp>
         <p:nvSpPr>
-          <p:cNvPr id="59" name="TextBox 58"/>
+          <p:cNvPr id="84" name="TextBox 83"/>
           <p:cNvSpPr txBox="1"/>
           <p:nvPr/>
         </p:nvSpPr>
@@ -16125,7 +17230,7 @@
       </p:sp>
       <p:sp>
         <p:nvSpPr>
-          <p:cNvPr id="60" name="Rounded Rectangle 59"/>
+          <p:cNvPr id="85" name="Rounded Rectangle 84"/>
           <p:cNvSpPr/>
           <p:nvPr/>
         </p:nvSpPr>
@@ -16189,7 +17294,7 @@
       </p:sp>
       <p:sp>
         <p:nvSpPr>
-          <p:cNvPr id="61" name="Oval 60"/>
+          <p:cNvPr id="86" name="Oval 85"/>
           <p:cNvSpPr/>
           <p:nvPr/>
         </p:nvSpPr>
@@ -16235,7 +17340,7 @@
       </p:sp>
       <p:sp>
         <p:nvSpPr>
-          <p:cNvPr id="62" name="TextBox 61"/>
+          <p:cNvPr id="87" name="TextBox 86"/>
           <p:cNvSpPr txBox="1"/>
           <p:nvPr/>
         </p:nvSpPr>
@@ -16279,7 +17384,7 @@
       </p:sp>
       <p:sp>
         <p:nvSpPr>
-          <p:cNvPr id="63" name="Rounded Rectangle 62"/>
+          <p:cNvPr id="88" name="Rounded Rectangle 87"/>
           <p:cNvSpPr/>
           <p:nvPr/>
         </p:nvSpPr>
@@ -16343,7 +17448,7 @@
       </p:sp>
       <p:sp>
         <p:nvSpPr>
-          <p:cNvPr id="64" name="TextBox 63"/>
+          <p:cNvPr id="89" name="TextBox 88"/>
           <p:cNvSpPr txBox="1"/>
           <p:nvPr/>
         </p:nvSpPr>
@@ -16387,7 +17492,7 @@
       </p:sp>
       <p:sp>
         <p:nvSpPr>
-          <p:cNvPr id="65" name="TextBox 64"/>
+          <p:cNvPr id="90" name="TextBox 89"/>
           <p:cNvSpPr txBox="1"/>
           <p:nvPr/>
         </p:nvSpPr>

--- a/20261007_サンクスLINE誘導のご提案_業界別ver3.6.pptx
+++ b/20261007_サンクスLINE誘導のご提案_業界別ver3.6.pptx
@@ -14168,44 +14168,131 @@
           </a:p>
         </p:txBody>
       </p:sp>
-      <p:sp>
-        <p:nvSpPr>
-          <p:cNvPr id="20" name="Rectangle 19"/>
-          <p:cNvSpPr/>
-          <p:nvPr/>
-        </p:nvSpPr>
-        <p:spPr>
-          <a:xfrm>
-            <a:off x="792000" y="2484000"/>
-            <a:ext cx="1475999" cy="251999"/>
+      <p:cxnSp>
+        <p:nvCxnSpPr>
+          <p:cNvPr id="20" name="Connector 19"/>
+          <p:cNvCxnSpPr/>
+          <p:nvPr/>
+        </p:nvCxnSpPr>
+        <p:spPr>
+          <a:xfrm>
+            <a:off x="1044000" y="4032000"/>
+            <a:ext cx="2808000" cy="0"/>
+          </a:xfrm>
+          <a:prstGeom prst="line">
+            <a:avLst/>
+          </a:prstGeom>
+          <a:ln w="9525">
+            <a:solidFill>
+              <a:srgbClr val="7F7F7F"/>
+            </a:solidFill>
+          </a:ln>
+        </p:spPr>
+        <p:style>
+          <a:lnRef idx="2">
+            <a:schemeClr val="accent1"/>
+          </a:lnRef>
+          <a:fillRef idx="0">
+            <a:schemeClr val="accent1"/>
+          </a:fillRef>
+          <a:effectRef idx="0">
+            <a:schemeClr val="accent1"/>
+          </a:effectRef>
+          <a:fontRef idx="minor">
+            <a:schemeClr val="tx1"/>
+          </a:fontRef>
+        </p:style>
+      </p:cxnSp>
+      <p:cxnSp>
+        <p:nvCxnSpPr>
+          <p:cNvPr id="21" name="Connector 20"/>
+          <p:cNvCxnSpPr/>
+          <p:nvPr/>
+        </p:nvCxnSpPr>
+        <p:spPr>
+          <a:xfrm>
+            <a:off x="1044000" y="2520000"/>
+            <a:ext cx="0" cy="1512000"/>
+          </a:xfrm>
+          <a:prstGeom prst="line">
+            <a:avLst/>
+          </a:prstGeom>
+          <a:ln w="9525">
+            <a:solidFill>
+              <a:srgbClr val="7F7F7F"/>
+            </a:solidFill>
+          </a:ln>
+        </p:spPr>
+        <p:style>
+          <a:lnRef idx="2">
+            <a:schemeClr val="accent1"/>
+          </a:lnRef>
+          <a:fillRef idx="0">
+            <a:schemeClr val="accent1"/>
+          </a:fillRef>
+          <a:effectRef idx="0">
+            <a:schemeClr val="accent1"/>
+          </a:effectRef>
+          <a:fontRef idx="minor">
+            <a:schemeClr val="tx1"/>
+          </a:fontRef>
+        </p:style>
+      </p:cxnSp>
+      <p:cxnSp>
+        <p:nvCxnSpPr>
+          <p:cNvPr id="22" name="Connector 21"/>
+          <p:cNvCxnSpPr/>
+          <p:nvPr/>
+        </p:nvCxnSpPr>
+        <p:spPr>
+          <a:xfrm>
+            <a:off x="2448000" y="2520000"/>
+            <a:ext cx="0" cy="1512000"/>
+          </a:xfrm>
+          <a:prstGeom prst="line">
+            <a:avLst/>
+          </a:prstGeom>
+          <a:ln w="9525">
+            <a:solidFill>
+              <a:srgbClr val="7F7F7F"/>
+            </a:solidFill>
+          </a:ln>
+        </p:spPr>
+        <p:style>
+          <a:lnRef idx="2">
+            <a:schemeClr val="accent1"/>
+          </a:lnRef>
+          <a:fillRef idx="0">
+            <a:schemeClr val="accent1"/>
+          </a:fillRef>
+          <a:effectRef idx="0">
+            <a:schemeClr val="accent1"/>
+          </a:effectRef>
+          <a:fontRef idx="minor">
+            <a:schemeClr val="tx1"/>
+          </a:fontRef>
+        </p:style>
+      </p:cxnSp>
+      <p:sp>
+        <p:nvSpPr>
+          <p:cNvPr id="23" name="TextBox 22"/>
+          <p:cNvSpPr txBox="1"/>
+          <p:nvPr/>
+        </p:nvSpPr>
+        <p:spPr>
+          <a:xfrm>
+            <a:off x="756000" y="2700000"/>
+            <a:ext cx="288000" cy="180000"/>
           </a:xfrm>
           <a:prstGeom prst="rect">
             <a:avLst/>
           </a:prstGeom>
-          <a:solidFill>
-            <a:srgbClr val="C9D2EC"/>
-          </a:solidFill>
-          <a:ln>
-            <a:noFill/>
-          </a:ln>
-          <a:effectLst/>
-        </p:spPr>
-        <p:style>
-          <a:lnRef idx="1">
-            <a:schemeClr val="accent1"/>
-          </a:lnRef>
-          <a:fillRef idx="3">
-            <a:schemeClr val="accent1"/>
-          </a:fillRef>
-          <a:effectRef idx="0">
-            <a:schemeClr val="accent1"/>
-          </a:effectRef>
-          <a:fontRef idx="minor">
-            <a:schemeClr val="lt1"/>
-          </a:fontRef>
-        </p:style>
-        <p:txBody>
-          <a:bodyPr rtlCol="0" anchor="ctr" wrap="square" lIns="72000" tIns="18000" rIns="72000" bIns="18000"/>
+          <a:noFill/>
+        </p:spPr>
+        <p:txBody>
+          <a:bodyPr wrap="square" anchor="t" lIns="36000" rIns="36000" tIns="18000" bIns="18000">
+            <a:spAutoFit/>
+          </a:bodyPr>
           <a:lstStyle/>
           <a:p>
             <a:pPr algn="ctr">
@@ -14217,83 +14304,37 @@
               </a:spcAft>
             </a:pPr>
             <a:r>
-              <a:rPr sz="900" b="1">
-                <a:solidFill>
-                  <a:srgbClr val="1F285A"/>
+              <a:rPr sz="700" b="0">
+                <a:solidFill>
+                  <a:srgbClr val="7F7F7F"/>
                 </a:solidFill>
                 <a:latin typeface="メイリオ"/>
                 <a:ea typeface="メイリオ"/>
                 <a:cs typeface="メイリオ"/>
               </a:rPr>
-              <a:t>検索前のキーワード</a:t>
-            </a:r>
-          </a:p>
-        </p:txBody>
-      </p:sp>
-      <p:sp>
-        <p:nvSpPr>
-          <p:cNvPr id="21" name="Rectangle 20"/>
-          <p:cNvSpPr/>
-          <p:nvPr/>
-        </p:nvSpPr>
-        <p:spPr>
-          <a:xfrm>
-            <a:off x="792000" y="2736000"/>
-            <a:ext cx="1475999" cy="1295999"/>
+              <a:t>UU</a:t>
+            </a:r>
+          </a:p>
+        </p:txBody>
+      </p:sp>
+      <p:sp>
+        <p:nvSpPr>
+          <p:cNvPr id="24" name="TextBox 23"/>
+          <p:cNvSpPr txBox="1"/>
+          <p:nvPr/>
+        </p:nvSpPr>
+        <p:spPr>
+          <a:xfrm>
+            <a:off x="648000" y="4039200"/>
+            <a:ext cx="792000" cy="144000"/>
           </a:xfrm>
           <a:prstGeom prst="rect">
             <a:avLst/>
           </a:prstGeom>
-          <a:solidFill>
-            <a:srgbClr val="FFFFFF"/>
-          </a:solidFill>
-          <a:ln w="9525">
-            <a:solidFill>
-              <a:srgbClr val="D9D9D9"/>
-            </a:solidFill>
-          </a:ln>
-          <a:effectLst/>
-        </p:spPr>
-        <p:style>
-          <a:lnRef idx="1">
-            <a:schemeClr val="accent1"/>
-          </a:lnRef>
-          <a:fillRef idx="3">
-            <a:schemeClr val="accent1"/>
-          </a:fillRef>
-          <a:effectRef idx="0">
-            <a:schemeClr val="accent1"/>
-          </a:effectRef>
-          <a:fontRef idx="minor">
-            <a:schemeClr val="lt1"/>
-          </a:fontRef>
-        </p:style>
-        <p:txBody>
-          <a:bodyPr rtlCol="0" anchor="ctr" wrap="square" lIns="72000" tIns="18000" rIns="72000" bIns="18000"/>
-          <a:lstStyle/>
-          <a:p>
-            <a:pPr algn="ctr"/>
-          </a:p>
-        </p:txBody>
-      </p:sp>
-      <p:sp>
-        <p:nvSpPr>
-          <p:cNvPr id="22" name="TextBox 21"/>
-          <p:cNvSpPr txBox="1"/>
-          <p:nvPr/>
-        </p:nvSpPr>
-        <p:spPr>
-          <a:xfrm>
-            <a:off x="810000" y="2736000"/>
-            <a:ext cx="180000" cy="259200"/>
-          </a:xfrm>
-          <a:prstGeom prst="rect">
-            <a:avLst/>
-          </a:prstGeom>
           <a:noFill/>
         </p:spPr>
         <p:txBody>
-          <a:bodyPr wrap="square" anchor="ctr" lIns="36000" rIns="36000" tIns="18000" bIns="18000">
+          <a:bodyPr wrap="none" anchor="t" lIns="36000" rIns="36000" tIns="18000" bIns="18000">
             <a:spAutoFit/>
           </a:bodyPr>
           <a:lstStyle/>
@@ -14307,7 +14348,7 @@
               </a:spcAft>
             </a:pPr>
             <a:r>
-              <a:rPr sz="800" b="1">
+              <a:rPr sz="650" b="0">
                 <a:solidFill>
                   <a:srgbClr val="7F7F7F"/>
                 </a:solidFill>
@@ -14315,154 +14356,29 @@
                 <a:ea typeface="メイリオ"/>
                 <a:cs typeface="メイリオ"/>
               </a:rPr>
-              <a:t>1</a:t>
-            </a:r>
-          </a:p>
-        </p:txBody>
-      </p:sp>
-      <p:sp>
-        <p:nvSpPr>
-          <p:cNvPr id="23" name="Rounded Rectangle 22"/>
-          <p:cNvSpPr/>
-          <p:nvPr/>
-        </p:nvSpPr>
-        <p:spPr>
-          <a:xfrm>
-            <a:off x="990000" y="2813760"/>
-            <a:ext cx="446399" cy="103679"/>
-          </a:xfrm>
-          <a:prstGeom prst="roundRect">
-            <a:avLst>
-              <a:gd name="adj" fmla="val 50000"/>
-            </a:avLst>
-          </a:prstGeom>
-          <a:solidFill>
-            <a:srgbClr val="D9D9D9"/>
-          </a:solidFill>
-          <a:ln>
-            <a:noFill/>
-          </a:ln>
-          <a:effectLst/>
-        </p:spPr>
-        <p:style>
-          <a:lnRef idx="1">
-            <a:schemeClr val="accent1"/>
-          </a:lnRef>
-          <a:fillRef idx="3">
-            <a:schemeClr val="accent1"/>
-          </a:fillRef>
-          <a:effectRef idx="0">
-            <a:schemeClr val="accent1"/>
-          </a:effectRef>
-          <a:fontRef idx="minor">
-            <a:schemeClr val="lt1"/>
-          </a:fontRef>
-        </p:style>
-        <p:txBody>
-          <a:bodyPr rtlCol="0" anchor="ctr" wrap="square" lIns="72000" tIns="18000" rIns="72000" bIns="18000"/>
-          <a:lstStyle/>
-          <a:p>
-            <a:pPr algn="ctr"/>
-          </a:p>
-        </p:txBody>
-      </p:sp>
-      <p:sp>
-        <p:nvSpPr>
-          <p:cNvPr id="24" name="Rectangle 23"/>
-          <p:cNvSpPr/>
-          <p:nvPr/>
-        </p:nvSpPr>
-        <p:spPr>
-          <a:xfrm>
-            <a:off x="1745999" y="2818944"/>
-            <a:ext cx="468000" cy="93312"/>
+              <a:t>-15日</a:t>
+            </a:r>
+          </a:p>
+        </p:txBody>
+      </p:sp>
+      <p:sp>
+        <p:nvSpPr>
+          <p:cNvPr id="25" name="TextBox 24"/>
+          <p:cNvSpPr txBox="1"/>
+          <p:nvPr/>
+        </p:nvSpPr>
+        <p:spPr>
+          <a:xfrm>
+            <a:off x="1125360" y="4039200"/>
+            <a:ext cx="792000" cy="144000"/>
           </a:xfrm>
           <a:prstGeom prst="rect">
             <a:avLst/>
           </a:prstGeom>
-          <a:solidFill>
-            <a:srgbClr val="C9D2EC"/>
-          </a:solidFill>
-          <a:ln>
-            <a:noFill/>
-          </a:ln>
-          <a:effectLst/>
-        </p:spPr>
-        <p:style>
-          <a:lnRef idx="1">
-            <a:schemeClr val="accent1"/>
-          </a:lnRef>
-          <a:fillRef idx="3">
-            <a:schemeClr val="accent1"/>
-          </a:fillRef>
-          <a:effectRef idx="0">
-            <a:schemeClr val="accent1"/>
-          </a:effectRef>
-          <a:fontRef idx="minor">
-            <a:schemeClr val="lt1"/>
-          </a:fontRef>
-        </p:style>
-        <p:txBody>
-          <a:bodyPr rtlCol="0" anchor="ctr" wrap="square" lIns="72000" tIns="18000" rIns="72000" bIns="18000"/>
-          <a:lstStyle/>
-          <a:p>
-            <a:pPr algn="ctr"/>
-          </a:p>
-        </p:txBody>
-      </p:sp>
-      <p:cxnSp>
-        <p:nvCxnSpPr>
-          <p:cNvPr id="25" name="Connector 24"/>
-          <p:cNvCxnSpPr/>
-          <p:nvPr/>
-        </p:nvCxnSpPr>
-        <p:spPr>
-          <a:xfrm>
-            <a:off x="828000" y="2995200"/>
-            <a:ext cx="1404000" cy="0"/>
-          </a:xfrm>
-          <a:prstGeom prst="line">
-            <a:avLst/>
-          </a:prstGeom>
-          <a:ln w="6350">
-            <a:solidFill>
-              <a:srgbClr val="F2F2F2"/>
-            </a:solidFill>
-          </a:ln>
-        </p:spPr>
-        <p:style>
-          <a:lnRef idx="2">
-            <a:schemeClr val="accent1"/>
-          </a:lnRef>
-          <a:fillRef idx="0">
-            <a:schemeClr val="accent1"/>
-          </a:fillRef>
-          <a:effectRef idx="0">
-            <a:schemeClr val="accent1"/>
-          </a:effectRef>
-          <a:fontRef idx="minor">
-            <a:schemeClr val="tx1"/>
-          </a:fontRef>
-        </p:style>
-      </p:cxnSp>
-      <p:sp>
-        <p:nvSpPr>
-          <p:cNvPr id="26" name="TextBox 25"/>
-          <p:cNvSpPr txBox="1"/>
-          <p:nvPr/>
-        </p:nvSpPr>
-        <p:spPr>
-          <a:xfrm>
-            <a:off x="810000" y="2995200"/>
-            <a:ext cx="180000" cy="259200"/>
-          </a:xfrm>
-          <a:prstGeom prst="rect">
-            <a:avLst/>
-          </a:prstGeom>
           <a:noFill/>
         </p:spPr>
         <p:txBody>
-          <a:bodyPr wrap="square" anchor="ctr" lIns="36000" rIns="36000" tIns="18000" bIns="18000">
+          <a:bodyPr wrap="none" anchor="t" lIns="36000" rIns="36000" tIns="18000" bIns="18000">
             <a:spAutoFit/>
           </a:bodyPr>
           <a:lstStyle/>
@@ -14476,7 +14392,7 @@
               </a:spcAft>
             </a:pPr>
             <a:r>
-              <a:rPr sz="800" b="1">
+              <a:rPr sz="650" b="0">
                 <a:solidFill>
                   <a:srgbClr val="7F7F7F"/>
                 </a:solidFill>
@@ -14484,154 +14400,29 @@
                 <a:ea typeface="メイリオ"/>
                 <a:cs typeface="メイリオ"/>
               </a:rPr>
-              <a:t>2</a:t>
-            </a:r>
-          </a:p>
-        </p:txBody>
-      </p:sp>
-      <p:sp>
-        <p:nvSpPr>
-          <p:cNvPr id="27" name="Rounded Rectangle 26"/>
-          <p:cNvSpPr/>
-          <p:nvPr/>
-        </p:nvSpPr>
-        <p:spPr>
-          <a:xfrm>
-            <a:off x="990000" y="3072960"/>
-            <a:ext cx="345599" cy="103679"/>
-          </a:xfrm>
-          <a:prstGeom prst="roundRect">
-            <a:avLst>
-              <a:gd name="adj" fmla="val 50000"/>
-            </a:avLst>
-          </a:prstGeom>
-          <a:solidFill>
-            <a:srgbClr val="D9D9D9"/>
-          </a:solidFill>
-          <a:ln>
-            <a:noFill/>
-          </a:ln>
-          <a:effectLst/>
-        </p:spPr>
-        <p:style>
-          <a:lnRef idx="1">
-            <a:schemeClr val="accent1"/>
-          </a:lnRef>
-          <a:fillRef idx="3">
-            <a:schemeClr val="accent1"/>
-          </a:fillRef>
-          <a:effectRef idx="0">
-            <a:schemeClr val="accent1"/>
-          </a:effectRef>
-          <a:fontRef idx="minor">
-            <a:schemeClr val="lt1"/>
-          </a:fontRef>
-        </p:style>
-        <p:txBody>
-          <a:bodyPr rtlCol="0" anchor="ctr" wrap="square" lIns="72000" tIns="18000" rIns="72000" bIns="18000"/>
-          <a:lstStyle/>
-          <a:p>
-            <a:pPr algn="ctr"/>
-          </a:p>
-        </p:txBody>
-      </p:sp>
-      <p:sp>
-        <p:nvSpPr>
-          <p:cNvPr id="28" name="Rectangle 27"/>
-          <p:cNvSpPr/>
-          <p:nvPr/>
-        </p:nvSpPr>
-        <p:spPr>
-          <a:xfrm>
-            <a:off x="1745999" y="3078144"/>
-            <a:ext cx="351000" cy="93312"/>
+              <a:t>-7日</a:t>
+            </a:r>
+          </a:p>
+        </p:txBody>
+      </p:sp>
+      <p:sp>
+        <p:nvSpPr>
+          <p:cNvPr id="26" name="TextBox 25"/>
+          <p:cNvSpPr txBox="1"/>
+          <p:nvPr/>
+        </p:nvSpPr>
+        <p:spPr>
+          <a:xfrm>
+            <a:off x="1574640" y="4039200"/>
+            <a:ext cx="792000" cy="144000"/>
           </a:xfrm>
           <a:prstGeom prst="rect">
             <a:avLst/>
           </a:prstGeom>
-          <a:solidFill>
-            <a:srgbClr val="C9D2EC"/>
-          </a:solidFill>
-          <a:ln>
-            <a:noFill/>
-          </a:ln>
-          <a:effectLst/>
-        </p:spPr>
-        <p:style>
-          <a:lnRef idx="1">
-            <a:schemeClr val="accent1"/>
-          </a:lnRef>
-          <a:fillRef idx="3">
-            <a:schemeClr val="accent1"/>
-          </a:fillRef>
-          <a:effectRef idx="0">
-            <a:schemeClr val="accent1"/>
-          </a:effectRef>
-          <a:fontRef idx="minor">
-            <a:schemeClr val="lt1"/>
-          </a:fontRef>
-        </p:style>
-        <p:txBody>
-          <a:bodyPr rtlCol="0" anchor="ctr" wrap="square" lIns="72000" tIns="18000" rIns="72000" bIns="18000"/>
-          <a:lstStyle/>
-          <a:p>
-            <a:pPr algn="ctr"/>
-          </a:p>
-        </p:txBody>
-      </p:sp>
-      <p:cxnSp>
-        <p:nvCxnSpPr>
-          <p:cNvPr id="29" name="Connector 28"/>
-          <p:cNvCxnSpPr/>
-          <p:nvPr/>
-        </p:nvCxnSpPr>
-        <p:spPr>
-          <a:xfrm>
-            <a:off x="828000" y="3254399"/>
-            <a:ext cx="1404000" cy="0"/>
-          </a:xfrm>
-          <a:prstGeom prst="line">
-            <a:avLst/>
-          </a:prstGeom>
-          <a:ln w="6350">
-            <a:solidFill>
-              <a:srgbClr val="F2F2F2"/>
-            </a:solidFill>
-          </a:ln>
-        </p:spPr>
-        <p:style>
-          <a:lnRef idx="2">
-            <a:schemeClr val="accent1"/>
-          </a:lnRef>
-          <a:fillRef idx="0">
-            <a:schemeClr val="accent1"/>
-          </a:fillRef>
-          <a:effectRef idx="0">
-            <a:schemeClr val="accent1"/>
-          </a:effectRef>
-          <a:fontRef idx="minor">
-            <a:schemeClr val="tx1"/>
-          </a:fontRef>
-        </p:style>
-      </p:cxnSp>
-      <p:sp>
-        <p:nvSpPr>
-          <p:cNvPr id="30" name="TextBox 29"/>
-          <p:cNvSpPr txBox="1"/>
-          <p:nvPr/>
-        </p:nvSpPr>
-        <p:spPr>
-          <a:xfrm>
-            <a:off x="810000" y="3254399"/>
-            <a:ext cx="180000" cy="259200"/>
-          </a:xfrm>
-          <a:prstGeom prst="rect">
-            <a:avLst/>
-          </a:prstGeom>
           <a:noFill/>
         </p:spPr>
         <p:txBody>
-          <a:bodyPr wrap="square" anchor="ctr" lIns="36000" rIns="36000" tIns="18000" bIns="18000">
+          <a:bodyPr wrap="none" anchor="t" lIns="36000" rIns="36000" tIns="18000" bIns="18000">
             <a:spAutoFit/>
           </a:bodyPr>
           <a:lstStyle/>
@@ -14645,7 +14436,7 @@
               </a:spcAft>
             </a:pPr>
             <a:r>
-              <a:rPr sz="800" b="1">
+              <a:rPr sz="650" b="0">
                 <a:solidFill>
                   <a:srgbClr val="7F7F7F"/>
                 </a:solidFill>
@@ -14653,154 +14444,29 @@
                 <a:ea typeface="メイリオ"/>
                 <a:cs typeface="メイリオ"/>
               </a:rPr>
-              <a:t>3</a:t>
-            </a:r>
-          </a:p>
-        </p:txBody>
-      </p:sp>
-      <p:sp>
-        <p:nvSpPr>
-          <p:cNvPr id="31" name="Rounded Rectangle 30"/>
-          <p:cNvSpPr/>
-          <p:nvPr/>
-        </p:nvSpPr>
-        <p:spPr>
-          <a:xfrm>
-            <a:off x="990000" y="3332159"/>
-            <a:ext cx="503999" cy="103679"/>
-          </a:xfrm>
-          <a:prstGeom prst="roundRect">
-            <a:avLst>
-              <a:gd name="adj" fmla="val 50000"/>
-            </a:avLst>
-          </a:prstGeom>
-          <a:solidFill>
-            <a:srgbClr val="D9D9D9"/>
-          </a:solidFill>
-          <a:ln>
-            <a:noFill/>
-          </a:ln>
-          <a:effectLst/>
-        </p:spPr>
-        <p:style>
-          <a:lnRef idx="1">
-            <a:schemeClr val="accent1"/>
-          </a:lnRef>
-          <a:fillRef idx="3">
-            <a:schemeClr val="accent1"/>
-          </a:fillRef>
-          <a:effectRef idx="0">
-            <a:schemeClr val="accent1"/>
-          </a:effectRef>
-          <a:fontRef idx="minor">
-            <a:schemeClr val="lt1"/>
-          </a:fontRef>
-        </p:style>
-        <p:txBody>
-          <a:bodyPr rtlCol="0" anchor="ctr" wrap="square" lIns="72000" tIns="18000" rIns="72000" bIns="18000"/>
-          <a:lstStyle/>
-          <a:p>
-            <a:pPr algn="ctr"/>
-          </a:p>
-        </p:txBody>
-      </p:sp>
-      <p:sp>
-        <p:nvSpPr>
-          <p:cNvPr id="32" name="Rectangle 31"/>
-          <p:cNvSpPr/>
-          <p:nvPr/>
-        </p:nvSpPr>
-        <p:spPr>
-          <a:xfrm>
-            <a:off x="1745999" y="3337343"/>
-            <a:ext cx="257400" cy="93312"/>
+              <a:t>-3日</a:t>
+            </a:r>
+          </a:p>
+        </p:txBody>
+      </p:sp>
+      <p:sp>
+        <p:nvSpPr>
+          <p:cNvPr id="27" name="TextBox 26"/>
+          <p:cNvSpPr txBox="1"/>
+          <p:nvPr/>
+        </p:nvSpPr>
+        <p:spPr>
+          <a:xfrm>
+            <a:off x="2052000" y="4039200"/>
+            <a:ext cx="792000" cy="144000"/>
           </a:xfrm>
           <a:prstGeom prst="rect">
             <a:avLst/>
           </a:prstGeom>
-          <a:solidFill>
-            <a:srgbClr val="C9D2EC"/>
-          </a:solidFill>
-          <a:ln>
-            <a:noFill/>
-          </a:ln>
-          <a:effectLst/>
-        </p:spPr>
-        <p:style>
-          <a:lnRef idx="1">
-            <a:schemeClr val="accent1"/>
-          </a:lnRef>
-          <a:fillRef idx="3">
-            <a:schemeClr val="accent1"/>
-          </a:fillRef>
-          <a:effectRef idx="0">
-            <a:schemeClr val="accent1"/>
-          </a:effectRef>
-          <a:fontRef idx="minor">
-            <a:schemeClr val="lt1"/>
-          </a:fontRef>
-        </p:style>
-        <p:txBody>
-          <a:bodyPr rtlCol="0" anchor="ctr" wrap="square" lIns="72000" tIns="18000" rIns="72000" bIns="18000"/>
-          <a:lstStyle/>
-          <a:p>
-            <a:pPr algn="ctr"/>
-          </a:p>
-        </p:txBody>
-      </p:sp>
-      <p:cxnSp>
-        <p:nvCxnSpPr>
-          <p:cNvPr id="33" name="Connector 32"/>
-          <p:cNvCxnSpPr/>
-          <p:nvPr/>
-        </p:nvCxnSpPr>
-        <p:spPr>
-          <a:xfrm>
-            <a:off x="828000" y="3513600"/>
-            <a:ext cx="1404000" cy="0"/>
-          </a:xfrm>
-          <a:prstGeom prst="line">
-            <a:avLst/>
-          </a:prstGeom>
-          <a:ln w="6350">
-            <a:solidFill>
-              <a:srgbClr val="F2F2F2"/>
-            </a:solidFill>
-          </a:ln>
-        </p:spPr>
-        <p:style>
-          <a:lnRef idx="2">
-            <a:schemeClr val="accent1"/>
-          </a:lnRef>
-          <a:fillRef idx="0">
-            <a:schemeClr val="accent1"/>
-          </a:fillRef>
-          <a:effectRef idx="0">
-            <a:schemeClr val="accent1"/>
-          </a:effectRef>
-          <a:fontRef idx="minor">
-            <a:schemeClr val="tx1"/>
-          </a:fontRef>
-        </p:style>
-      </p:cxnSp>
-      <p:sp>
-        <p:nvSpPr>
-          <p:cNvPr id="34" name="TextBox 33"/>
-          <p:cNvSpPr txBox="1"/>
-          <p:nvPr/>
-        </p:nvSpPr>
-        <p:spPr>
-          <a:xfrm>
-            <a:off x="810000" y="3513600"/>
-            <a:ext cx="180000" cy="259200"/>
-          </a:xfrm>
-          <a:prstGeom prst="rect">
-            <a:avLst/>
-          </a:prstGeom>
           <a:noFill/>
         </p:spPr>
         <p:txBody>
-          <a:bodyPr wrap="square" anchor="ctr" lIns="36000" rIns="36000" tIns="18000" bIns="18000">
+          <a:bodyPr wrap="none" anchor="t" lIns="36000" rIns="36000" tIns="18000" bIns="18000">
             <a:spAutoFit/>
           </a:bodyPr>
           <a:lstStyle/>
@@ -14814,7 +14480,7 @@
               </a:spcAft>
             </a:pPr>
             <a:r>
-              <a:rPr sz="800" b="1">
+              <a:rPr sz="650" b="0">
                 <a:solidFill>
                   <a:srgbClr val="7F7F7F"/>
                 </a:solidFill>
@@ -14822,154 +14488,29 @@
                 <a:ea typeface="メイリオ"/>
                 <a:cs typeface="メイリオ"/>
               </a:rPr>
-              <a:t>4</a:t>
-            </a:r>
-          </a:p>
-        </p:txBody>
-      </p:sp>
-      <p:sp>
-        <p:nvSpPr>
-          <p:cNvPr id="35" name="Rounded Rectangle 34"/>
-          <p:cNvSpPr/>
-          <p:nvPr/>
-        </p:nvSpPr>
-        <p:spPr>
-          <a:xfrm>
-            <a:off x="990000" y="3591359"/>
-            <a:ext cx="287999" cy="103679"/>
-          </a:xfrm>
-          <a:prstGeom prst="roundRect">
-            <a:avLst>
-              <a:gd name="adj" fmla="val 50000"/>
-            </a:avLst>
-          </a:prstGeom>
-          <a:solidFill>
-            <a:srgbClr val="D9D9D9"/>
-          </a:solidFill>
-          <a:ln>
-            <a:noFill/>
-          </a:ln>
-          <a:effectLst/>
-        </p:spPr>
-        <p:style>
-          <a:lnRef idx="1">
-            <a:schemeClr val="accent1"/>
-          </a:lnRef>
-          <a:fillRef idx="3">
-            <a:schemeClr val="accent1"/>
-          </a:fillRef>
-          <a:effectRef idx="0">
-            <a:schemeClr val="accent1"/>
-          </a:effectRef>
-          <a:fontRef idx="minor">
-            <a:schemeClr val="lt1"/>
-          </a:fontRef>
-        </p:style>
-        <p:txBody>
-          <a:bodyPr rtlCol="0" anchor="ctr" wrap="square" lIns="72000" tIns="18000" rIns="72000" bIns="18000"/>
-          <a:lstStyle/>
-          <a:p>
-            <a:pPr algn="ctr"/>
-          </a:p>
-        </p:txBody>
-      </p:sp>
-      <p:sp>
-        <p:nvSpPr>
-          <p:cNvPr id="36" name="Rectangle 35"/>
-          <p:cNvSpPr/>
-          <p:nvPr/>
-        </p:nvSpPr>
-        <p:spPr>
-          <a:xfrm>
-            <a:off x="1745999" y="3596543"/>
-            <a:ext cx="187200" cy="93312"/>
+              <a:t>0日(検索起点)</a:t>
+            </a:r>
+          </a:p>
+        </p:txBody>
+      </p:sp>
+      <p:sp>
+        <p:nvSpPr>
+          <p:cNvPr id="28" name="TextBox 27"/>
+          <p:cNvSpPr txBox="1"/>
+          <p:nvPr/>
+        </p:nvSpPr>
+        <p:spPr>
+          <a:xfrm>
+            <a:off x="2529360" y="4039200"/>
+            <a:ext cx="792000" cy="144000"/>
           </a:xfrm>
           <a:prstGeom prst="rect">
             <a:avLst/>
           </a:prstGeom>
-          <a:solidFill>
-            <a:srgbClr val="C9D2EC"/>
-          </a:solidFill>
-          <a:ln>
-            <a:noFill/>
-          </a:ln>
-          <a:effectLst/>
-        </p:spPr>
-        <p:style>
-          <a:lnRef idx="1">
-            <a:schemeClr val="accent1"/>
-          </a:lnRef>
-          <a:fillRef idx="3">
-            <a:schemeClr val="accent1"/>
-          </a:fillRef>
-          <a:effectRef idx="0">
-            <a:schemeClr val="accent1"/>
-          </a:effectRef>
-          <a:fontRef idx="minor">
-            <a:schemeClr val="lt1"/>
-          </a:fontRef>
-        </p:style>
-        <p:txBody>
-          <a:bodyPr rtlCol="0" anchor="ctr" wrap="square" lIns="72000" tIns="18000" rIns="72000" bIns="18000"/>
-          <a:lstStyle/>
-          <a:p>
-            <a:pPr algn="ctr"/>
-          </a:p>
-        </p:txBody>
-      </p:sp>
-      <p:cxnSp>
-        <p:nvCxnSpPr>
-          <p:cNvPr id="37" name="Connector 36"/>
-          <p:cNvCxnSpPr/>
-          <p:nvPr/>
-        </p:nvCxnSpPr>
-        <p:spPr>
-          <a:xfrm>
-            <a:off x="828000" y="3772800"/>
-            <a:ext cx="1404000" cy="0"/>
-          </a:xfrm>
-          <a:prstGeom prst="line">
-            <a:avLst/>
-          </a:prstGeom>
-          <a:ln w="6350">
-            <a:solidFill>
-              <a:srgbClr val="F2F2F2"/>
-            </a:solidFill>
-          </a:ln>
-        </p:spPr>
-        <p:style>
-          <a:lnRef idx="2">
-            <a:schemeClr val="accent1"/>
-          </a:lnRef>
-          <a:fillRef idx="0">
-            <a:schemeClr val="accent1"/>
-          </a:fillRef>
-          <a:effectRef idx="0">
-            <a:schemeClr val="accent1"/>
-          </a:effectRef>
-          <a:fontRef idx="minor">
-            <a:schemeClr val="tx1"/>
-          </a:fontRef>
-        </p:style>
-      </p:cxnSp>
-      <p:sp>
-        <p:nvSpPr>
-          <p:cNvPr id="38" name="TextBox 37"/>
-          <p:cNvSpPr txBox="1"/>
-          <p:nvPr/>
-        </p:nvSpPr>
-        <p:spPr>
-          <a:xfrm>
-            <a:off x="810000" y="3772800"/>
-            <a:ext cx="180000" cy="259200"/>
-          </a:xfrm>
-          <a:prstGeom prst="rect">
-            <a:avLst/>
-          </a:prstGeom>
           <a:noFill/>
         </p:spPr>
         <p:txBody>
-          <a:bodyPr wrap="square" anchor="ctr" lIns="36000" rIns="36000" tIns="18000" bIns="18000">
+          <a:bodyPr wrap="none" anchor="t" lIns="36000" rIns="36000" tIns="18000" bIns="18000">
             <a:spAutoFit/>
           </a:bodyPr>
           <a:lstStyle/>
@@ -14983,7 +14524,7 @@
               </a:spcAft>
             </a:pPr>
             <a:r>
-              <a:rPr sz="800" b="1">
+              <a:rPr sz="650" b="0">
                 <a:solidFill>
                   <a:srgbClr val="7F7F7F"/>
                 </a:solidFill>
@@ -14991,139 +14532,31 @@
                 <a:ea typeface="メイリオ"/>
                 <a:cs typeface="メイリオ"/>
               </a:rPr>
-              <a:t>5</a:t>
-            </a:r>
-          </a:p>
-        </p:txBody>
-      </p:sp>
-      <p:sp>
-        <p:nvSpPr>
-          <p:cNvPr id="39" name="Rounded Rectangle 38"/>
-          <p:cNvSpPr/>
-          <p:nvPr/>
-        </p:nvSpPr>
-        <p:spPr>
-          <a:xfrm>
-            <a:off x="990000" y="3850560"/>
-            <a:ext cx="395999" cy="103679"/>
-          </a:xfrm>
-          <a:prstGeom prst="roundRect">
-            <a:avLst>
-              <a:gd name="adj" fmla="val 50000"/>
-            </a:avLst>
-          </a:prstGeom>
-          <a:solidFill>
-            <a:srgbClr val="D9D9D9"/>
-          </a:solidFill>
-          <a:ln>
-            <a:noFill/>
-          </a:ln>
-          <a:effectLst/>
-        </p:spPr>
-        <p:style>
-          <a:lnRef idx="1">
-            <a:schemeClr val="accent1"/>
-          </a:lnRef>
-          <a:fillRef idx="3">
-            <a:schemeClr val="accent1"/>
-          </a:fillRef>
-          <a:effectRef idx="0">
-            <a:schemeClr val="accent1"/>
-          </a:effectRef>
-          <a:fontRef idx="minor">
-            <a:schemeClr val="lt1"/>
-          </a:fontRef>
-        </p:style>
-        <p:txBody>
-          <a:bodyPr rtlCol="0" anchor="ctr" wrap="square" lIns="72000" tIns="18000" rIns="72000" bIns="18000"/>
-          <a:lstStyle/>
-          <a:p>
-            <a:pPr algn="ctr"/>
-          </a:p>
-        </p:txBody>
-      </p:sp>
-      <p:sp>
-        <p:nvSpPr>
-          <p:cNvPr id="40" name="Rectangle 39"/>
-          <p:cNvSpPr/>
-          <p:nvPr/>
-        </p:nvSpPr>
-        <p:spPr>
-          <a:xfrm>
-            <a:off x="1745999" y="3855744"/>
-            <a:ext cx="140400" cy="93312"/>
+              <a:t>3日</a:t>
+            </a:r>
+          </a:p>
+        </p:txBody>
+      </p:sp>
+      <p:sp>
+        <p:nvSpPr>
+          <p:cNvPr id="29" name="TextBox 28"/>
+          <p:cNvSpPr txBox="1"/>
+          <p:nvPr/>
+        </p:nvSpPr>
+        <p:spPr>
+          <a:xfrm>
+            <a:off x="2978640" y="4039200"/>
+            <a:ext cx="792000" cy="144000"/>
           </a:xfrm>
           <a:prstGeom prst="rect">
             <a:avLst/>
           </a:prstGeom>
-          <a:solidFill>
-            <a:srgbClr val="C9D2EC"/>
-          </a:solidFill>
-          <a:ln>
-            <a:noFill/>
-          </a:ln>
-          <a:effectLst/>
-        </p:spPr>
-        <p:style>
-          <a:lnRef idx="1">
-            <a:schemeClr val="accent1"/>
-          </a:lnRef>
-          <a:fillRef idx="3">
-            <a:schemeClr val="accent1"/>
-          </a:fillRef>
-          <a:effectRef idx="0">
-            <a:schemeClr val="accent1"/>
-          </a:effectRef>
-          <a:fontRef idx="minor">
-            <a:schemeClr val="lt1"/>
-          </a:fontRef>
-        </p:style>
-        <p:txBody>
-          <a:bodyPr rtlCol="0" anchor="ctr" wrap="square" lIns="72000" tIns="18000" rIns="72000" bIns="18000"/>
-          <a:lstStyle/>
-          <a:p>
-            <a:pPr algn="ctr"/>
-          </a:p>
-        </p:txBody>
-      </p:sp>
-      <p:sp>
-        <p:nvSpPr>
-          <p:cNvPr id="41" name="Rectangle 40"/>
-          <p:cNvSpPr/>
-          <p:nvPr/>
-        </p:nvSpPr>
-        <p:spPr>
-          <a:xfrm>
-            <a:off x="2412000" y="2484000"/>
-            <a:ext cx="1475999" cy="251999"/>
-          </a:xfrm>
-          <a:prstGeom prst="rect">
-            <a:avLst/>
-          </a:prstGeom>
-          <a:solidFill>
-            <a:srgbClr val="1F285A"/>
-          </a:solidFill>
-          <a:ln>
-            <a:noFill/>
-          </a:ln>
-          <a:effectLst/>
-        </p:spPr>
-        <p:style>
-          <a:lnRef idx="1">
-            <a:schemeClr val="accent1"/>
-          </a:lnRef>
-          <a:fillRef idx="3">
-            <a:schemeClr val="accent1"/>
-          </a:fillRef>
-          <a:effectRef idx="0">
-            <a:schemeClr val="accent1"/>
-          </a:effectRef>
-          <a:fontRef idx="minor">
-            <a:schemeClr val="lt1"/>
-          </a:fontRef>
-        </p:style>
-        <p:txBody>
-          <a:bodyPr rtlCol="0" anchor="ctr" wrap="square" lIns="72000" tIns="18000" rIns="72000" bIns="18000"/>
+          <a:noFill/>
+        </p:spPr>
+        <p:txBody>
+          <a:bodyPr wrap="none" anchor="t" lIns="36000" rIns="36000" tIns="18000" bIns="18000">
+            <a:spAutoFit/>
+          </a:bodyPr>
           <a:lstStyle/>
           <a:p>
             <a:pPr algn="ctr">
@@ -15135,83 +14568,37 @@
               </a:spcAft>
             </a:pPr>
             <a:r>
-              <a:rPr sz="900" b="1">
-                <a:solidFill>
-                  <a:srgbClr val="FFFFFF"/>
+              <a:rPr sz="650" b="0">
+                <a:solidFill>
+                  <a:srgbClr val="7F7F7F"/>
                 </a:solidFill>
                 <a:latin typeface="メイリオ"/>
                 <a:ea typeface="メイリオ"/>
                 <a:cs typeface="メイリオ"/>
               </a:rPr>
-              <a:t>検索後のキーワード</a:t>
-            </a:r>
-          </a:p>
-        </p:txBody>
-      </p:sp>
-      <p:sp>
-        <p:nvSpPr>
-          <p:cNvPr id="42" name="Rectangle 41"/>
-          <p:cNvSpPr/>
-          <p:nvPr/>
-        </p:nvSpPr>
-        <p:spPr>
-          <a:xfrm>
-            <a:off x="2412000" y="2736000"/>
-            <a:ext cx="1475999" cy="1295999"/>
+              <a:t>7日</a:t>
+            </a:r>
+          </a:p>
+        </p:txBody>
+      </p:sp>
+      <p:sp>
+        <p:nvSpPr>
+          <p:cNvPr id="30" name="TextBox 29"/>
+          <p:cNvSpPr txBox="1"/>
+          <p:nvPr/>
+        </p:nvSpPr>
+        <p:spPr>
+          <a:xfrm>
+            <a:off x="3456000" y="4039200"/>
+            <a:ext cx="792000" cy="144000"/>
           </a:xfrm>
           <a:prstGeom prst="rect">
             <a:avLst/>
           </a:prstGeom>
-          <a:solidFill>
-            <a:srgbClr val="FFFFFF"/>
-          </a:solidFill>
-          <a:ln w="9525">
-            <a:solidFill>
-              <a:srgbClr val="D9D9D9"/>
-            </a:solidFill>
-          </a:ln>
-          <a:effectLst/>
-        </p:spPr>
-        <p:style>
-          <a:lnRef idx="1">
-            <a:schemeClr val="accent1"/>
-          </a:lnRef>
-          <a:fillRef idx="3">
-            <a:schemeClr val="accent1"/>
-          </a:fillRef>
-          <a:effectRef idx="0">
-            <a:schemeClr val="accent1"/>
-          </a:effectRef>
-          <a:fontRef idx="minor">
-            <a:schemeClr val="lt1"/>
-          </a:fontRef>
-        </p:style>
-        <p:txBody>
-          <a:bodyPr rtlCol="0" anchor="ctr" wrap="square" lIns="72000" tIns="18000" rIns="72000" bIns="18000"/>
-          <a:lstStyle/>
-          <a:p>
-            <a:pPr algn="ctr"/>
-          </a:p>
-        </p:txBody>
-      </p:sp>
-      <p:sp>
-        <p:nvSpPr>
-          <p:cNvPr id="43" name="TextBox 42"/>
-          <p:cNvSpPr txBox="1"/>
-          <p:nvPr/>
-        </p:nvSpPr>
-        <p:spPr>
-          <a:xfrm>
-            <a:off x="2430000" y="2736000"/>
-            <a:ext cx="180000" cy="259200"/>
-          </a:xfrm>
-          <a:prstGeom prst="rect">
-            <a:avLst/>
-          </a:prstGeom>
           <a:noFill/>
         </p:spPr>
         <p:txBody>
-          <a:bodyPr wrap="square" anchor="ctr" lIns="36000" rIns="36000" tIns="18000" bIns="18000">
+          <a:bodyPr wrap="none" anchor="t" lIns="36000" rIns="36000" tIns="18000" bIns="18000">
             <a:spAutoFit/>
           </a:bodyPr>
           <a:lstStyle/>
@@ -15225,7 +14612,7 @@
               </a:spcAft>
             </a:pPr>
             <a:r>
-              <a:rPr sz="800" b="1">
+              <a:rPr sz="650" b="0">
                 <a:solidFill>
                   <a:srgbClr val="7F7F7F"/>
                 </a:solidFill>
@@ -15233,21 +14620,65 @@
                 <a:ea typeface="メイリオ"/>
                 <a:cs typeface="メイリオ"/>
               </a:rPr>
-              <a:t>1</a:t>
-            </a:r>
-          </a:p>
-        </p:txBody>
-      </p:sp>
-      <p:sp>
-        <p:nvSpPr>
-          <p:cNvPr id="44" name="Rounded Rectangle 43"/>
+              <a:t>15日</a:t>
+            </a:r>
+          </a:p>
+        </p:txBody>
+      </p:sp>
+      <p:sp>
+        <p:nvSpPr>
+          <p:cNvPr id="31" name="Oval 30"/>
           <p:cNvSpPr/>
           <p:nvPr/>
         </p:nvSpPr>
         <p:spPr>
           <a:xfrm>
-            <a:off x="2610000" y="2813760"/>
-            <a:ext cx="395999" cy="103679"/>
+            <a:off x="2682707" y="2605492"/>
+            <a:ext cx="50400" cy="50400"/>
+          </a:xfrm>
+          <a:prstGeom prst="ellipse">
+            <a:avLst/>
+          </a:prstGeom>
+          <a:solidFill>
+            <a:srgbClr val="2EC4B6"/>
+          </a:solidFill>
+          <a:ln>
+            <a:noFill/>
+          </a:ln>
+          <a:effectLst/>
+        </p:spPr>
+        <p:style>
+          <a:lnRef idx="1">
+            <a:schemeClr val="accent1"/>
+          </a:lnRef>
+          <a:fillRef idx="3">
+            <a:schemeClr val="accent1"/>
+          </a:fillRef>
+          <a:effectRef idx="0">
+            <a:schemeClr val="accent1"/>
+          </a:effectRef>
+          <a:fontRef idx="minor">
+            <a:schemeClr val="lt1"/>
+          </a:fontRef>
+        </p:style>
+        <p:txBody>
+          <a:bodyPr rtlCol="0" anchor="ctr" wrap="square" lIns="72000" tIns="18000" rIns="72000" bIns="18000"/>
+          <a:lstStyle/>
+          <a:p>
+            <a:pPr algn="ctr"/>
+          </a:p>
+        </p:txBody>
+      </p:sp>
+      <p:sp>
+        <p:nvSpPr>
+          <p:cNvPr id="32" name="Rounded Rectangle 31"/>
+          <p:cNvSpPr/>
+          <p:nvPr/>
+        </p:nvSpPr>
+        <p:spPr>
+          <a:xfrm>
+            <a:off x="2751107" y="2605492"/>
+            <a:ext cx="268882" cy="50400"/>
           </a:xfrm>
           <a:prstGeom prst="roundRect">
             <a:avLst>
@@ -15255,7 +14686,7 @@
             </a:avLst>
           </a:prstGeom>
           <a:solidFill>
-            <a:srgbClr val="D9D9D9"/>
+            <a:srgbClr val="C9CED9"/>
           </a:solidFill>
           <a:ln>
             <a:noFill/>
@@ -15286,20 +14717,20 @@
       </p:sp>
       <p:sp>
         <p:nvSpPr>
-          <p:cNvPr id="45" name="Rectangle 44"/>
+          <p:cNvPr id="33" name="Oval 32"/>
           <p:cNvSpPr/>
           <p:nvPr/>
         </p:nvSpPr>
         <p:spPr>
           <a:xfrm>
-            <a:off x="3366000" y="2818944"/>
-            <a:ext cx="468000" cy="93312"/>
-          </a:xfrm>
-          <a:prstGeom prst="rect">
-            <a:avLst/>
-          </a:prstGeom>
-          <a:solidFill>
-            <a:srgbClr val="1F285A"/>
+            <a:off x="2434840" y="2661428"/>
+            <a:ext cx="50400" cy="50400"/>
+          </a:xfrm>
+          <a:prstGeom prst="ellipse">
+            <a:avLst/>
+          </a:prstGeom>
+          <a:solidFill>
+            <a:srgbClr val="2EC4B6"/>
           </a:solidFill>
           <a:ln>
             <a:noFill/>
@@ -15328,51 +14759,3790 @@
           </a:p>
         </p:txBody>
       </p:sp>
-      <p:cxnSp>
-        <p:nvCxnSpPr>
-          <p:cNvPr id="46" name="Connector 45"/>
-          <p:cNvCxnSpPr/>
-          <p:nvPr/>
-        </p:nvCxnSpPr>
-        <p:spPr>
-          <a:xfrm>
-            <a:off x="2448000" y="2995200"/>
-            <a:ext cx="1404000" cy="0"/>
-          </a:xfrm>
-          <a:prstGeom prst="line">
-            <a:avLst/>
-          </a:prstGeom>
-          <a:ln w="6350">
-            <a:solidFill>
-              <a:srgbClr val="F2F2F2"/>
-            </a:solidFill>
-          </a:ln>
-        </p:spPr>
-        <p:style>
-          <a:lnRef idx="2">
-            <a:schemeClr val="accent1"/>
-          </a:lnRef>
-          <a:fillRef idx="0">
-            <a:schemeClr val="accent1"/>
-          </a:fillRef>
-          <a:effectRef idx="0">
-            <a:schemeClr val="accent1"/>
-          </a:effectRef>
-          <a:fontRef idx="minor">
-            <a:schemeClr val="tx1"/>
-          </a:fontRef>
-        </p:style>
-      </p:cxnSp>
-      <p:sp>
-        <p:nvSpPr>
-          <p:cNvPr id="47" name="TextBox 46"/>
+      <p:sp>
+        <p:nvSpPr>
+          <p:cNvPr id="34" name="Oval 33"/>
+          <p:cNvSpPr/>
+          <p:nvPr/>
+        </p:nvSpPr>
+        <p:spPr>
+          <a:xfrm>
+            <a:off x="2880853" y="2909307"/>
+            <a:ext cx="50400" cy="50400"/>
+          </a:xfrm>
+          <a:prstGeom prst="ellipse">
+            <a:avLst/>
+          </a:prstGeom>
+          <a:solidFill>
+            <a:srgbClr val="2EC4B6"/>
+          </a:solidFill>
+          <a:ln>
+            <a:noFill/>
+          </a:ln>
+          <a:effectLst/>
+        </p:spPr>
+        <p:style>
+          <a:lnRef idx="1">
+            <a:schemeClr val="accent1"/>
+          </a:lnRef>
+          <a:fillRef idx="3">
+            <a:schemeClr val="accent1"/>
+          </a:fillRef>
+          <a:effectRef idx="0">
+            <a:schemeClr val="accent1"/>
+          </a:effectRef>
+          <a:fontRef idx="minor">
+            <a:schemeClr val="lt1"/>
+          </a:fontRef>
+        </p:style>
+        <p:txBody>
+          <a:bodyPr rtlCol="0" anchor="ctr" wrap="square" lIns="72000" tIns="18000" rIns="72000" bIns="18000"/>
+          <a:lstStyle/>
+          <a:p>
+            <a:pPr algn="ctr"/>
+          </a:p>
+        </p:txBody>
+      </p:sp>
+      <p:sp>
+        <p:nvSpPr>
+          <p:cNvPr id="35" name="Oval 34"/>
+          <p:cNvSpPr/>
+          <p:nvPr/>
+        </p:nvSpPr>
+        <p:spPr>
+          <a:xfrm>
+            <a:off x="2476387" y="2931800"/>
+            <a:ext cx="50400" cy="50400"/>
+          </a:xfrm>
+          <a:prstGeom prst="ellipse">
+            <a:avLst/>
+          </a:prstGeom>
+          <a:solidFill>
+            <a:srgbClr val="2EC4B6"/>
+          </a:solidFill>
+          <a:ln>
+            <a:noFill/>
+          </a:ln>
+          <a:effectLst/>
+        </p:spPr>
+        <p:style>
+          <a:lnRef idx="1">
+            <a:schemeClr val="accent1"/>
+          </a:lnRef>
+          <a:fillRef idx="3">
+            <a:schemeClr val="accent1"/>
+          </a:fillRef>
+          <a:effectRef idx="0">
+            <a:schemeClr val="accent1"/>
+          </a:effectRef>
+          <a:fontRef idx="minor">
+            <a:schemeClr val="lt1"/>
+          </a:fontRef>
+        </p:style>
+        <p:txBody>
+          <a:bodyPr rtlCol="0" anchor="ctr" wrap="square" lIns="72000" tIns="18000" rIns="72000" bIns="18000"/>
+          <a:lstStyle/>
+          <a:p>
+            <a:pPr algn="ctr"/>
+          </a:p>
+        </p:txBody>
+      </p:sp>
+      <p:sp>
+        <p:nvSpPr>
+          <p:cNvPr id="36" name="Oval 35"/>
+          <p:cNvSpPr/>
+          <p:nvPr/>
+        </p:nvSpPr>
+        <p:spPr>
+          <a:xfrm>
+            <a:off x="1933307" y="2932673"/>
+            <a:ext cx="50400" cy="50400"/>
+          </a:xfrm>
+          <a:prstGeom prst="ellipse">
+            <a:avLst/>
+          </a:prstGeom>
+          <a:solidFill>
+            <a:srgbClr val="2EC4B6"/>
+          </a:solidFill>
+          <a:ln>
+            <a:noFill/>
+          </a:ln>
+          <a:effectLst/>
+        </p:spPr>
+        <p:style>
+          <a:lnRef idx="1">
+            <a:schemeClr val="accent1"/>
+          </a:lnRef>
+          <a:fillRef idx="3">
+            <a:schemeClr val="accent1"/>
+          </a:fillRef>
+          <a:effectRef idx="0">
+            <a:schemeClr val="accent1"/>
+          </a:effectRef>
+          <a:fontRef idx="minor">
+            <a:schemeClr val="lt1"/>
+          </a:fontRef>
+        </p:style>
+        <p:txBody>
+          <a:bodyPr rtlCol="0" anchor="ctr" wrap="square" lIns="72000" tIns="18000" rIns="72000" bIns="18000"/>
+          <a:lstStyle/>
+          <a:p>
+            <a:pPr algn="ctr"/>
+          </a:p>
+        </p:txBody>
+      </p:sp>
+      <p:sp>
+        <p:nvSpPr>
+          <p:cNvPr id="37" name="Rounded Rectangle 36"/>
+          <p:cNvSpPr/>
+          <p:nvPr/>
+        </p:nvSpPr>
+        <p:spPr>
+          <a:xfrm>
+            <a:off x="2001707" y="2932673"/>
+            <a:ext cx="183490" cy="50400"/>
+          </a:xfrm>
+          <a:prstGeom prst="roundRect">
+            <a:avLst>
+              <a:gd name="adj" fmla="val 50000"/>
+            </a:avLst>
+          </a:prstGeom>
+          <a:solidFill>
+            <a:srgbClr val="C9CED9"/>
+          </a:solidFill>
+          <a:ln>
+            <a:noFill/>
+          </a:ln>
+          <a:effectLst/>
+        </p:spPr>
+        <p:style>
+          <a:lnRef idx="1">
+            <a:schemeClr val="accent1"/>
+          </a:lnRef>
+          <a:fillRef idx="3">
+            <a:schemeClr val="accent1"/>
+          </a:fillRef>
+          <a:effectRef idx="0">
+            <a:schemeClr val="accent1"/>
+          </a:effectRef>
+          <a:fontRef idx="minor">
+            <a:schemeClr val="lt1"/>
+          </a:fontRef>
+        </p:style>
+        <p:txBody>
+          <a:bodyPr rtlCol="0" anchor="ctr" wrap="square" lIns="72000" tIns="18000" rIns="72000" bIns="18000"/>
+          <a:lstStyle/>
+          <a:p>
+            <a:pPr algn="ctr"/>
+          </a:p>
+        </p:txBody>
+      </p:sp>
+      <p:sp>
+        <p:nvSpPr>
+          <p:cNvPr id="38" name="Oval 37"/>
+          <p:cNvSpPr/>
+          <p:nvPr/>
+        </p:nvSpPr>
+        <p:spPr>
+          <a:xfrm>
+            <a:off x="2743319" y="2934274"/>
+            <a:ext cx="50400" cy="50400"/>
+          </a:xfrm>
+          <a:prstGeom prst="ellipse">
+            <a:avLst/>
+          </a:prstGeom>
+          <a:solidFill>
+            <a:srgbClr val="2EC4B6"/>
+          </a:solidFill>
+          <a:ln>
+            <a:noFill/>
+          </a:ln>
+          <a:effectLst/>
+        </p:spPr>
+        <p:style>
+          <a:lnRef idx="1">
+            <a:schemeClr val="accent1"/>
+          </a:lnRef>
+          <a:fillRef idx="3">
+            <a:schemeClr val="accent1"/>
+          </a:fillRef>
+          <a:effectRef idx="0">
+            <a:schemeClr val="accent1"/>
+          </a:effectRef>
+          <a:fontRef idx="minor">
+            <a:schemeClr val="lt1"/>
+          </a:fontRef>
+        </p:style>
+        <p:txBody>
+          <a:bodyPr rtlCol="0" anchor="ctr" wrap="square" lIns="72000" tIns="18000" rIns="72000" bIns="18000"/>
+          <a:lstStyle/>
+          <a:p>
+            <a:pPr algn="ctr"/>
+          </a:p>
+        </p:txBody>
+      </p:sp>
+      <p:sp>
+        <p:nvSpPr>
+          <p:cNvPr id="39" name="Oval 38"/>
+          <p:cNvSpPr/>
+          <p:nvPr/>
+        </p:nvSpPr>
+        <p:spPr>
+          <a:xfrm>
+            <a:off x="2138100" y="2961056"/>
+            <a:ext cx="50400" cy="50400"/>
+          </a:xfrm>
+          <a:prstGeom prst="ellipse">
+            <a:avLst/>
+          </a:prstGeom>
+          <a:solidFill>
+            <a:srgbClr val="2EC4B6"/>
+          </a:solidFill>
+          <a:ln>
+            <a:noFill/>
+          </a:ln>
+          <a:effectLst/>
+        </p:spPr>
+        <p:style>
+          <a:lnRef idx="1">
+            <a:schemeClr val="accent1"/>
+          </a:lnRef>
+          <a:fillRef idx="3">
+            <a:schemeClr val="accent1"/>
+          </a:fillRef>
+          <a:effectRef idx="0">
+            <a:schemeClr val="accent1"/>
+          </a:effectRef>
+          <a:fontRef idx="minor">
+            <a:schemeClr val="lt1"/>
+          </a:fontRef>
+        </p:style>
+        <p:txBody>
+          <a:bodyPr rtlCol="0" anchor="ctr" wrap="square" lIns="72000" tIns="18000" rIns="72000" bIns="18000"/>
+          <a:lstStyle/>
+          <a:p>
+            <a:pPr algn="ctr"/>
+          </a:p>
+        </p:txBody>
+      </p:sp>
+      <p:sp>
+        <p:nvSpPr>
+          <p:cNvPr id="40" name="Oval 39"/>
+          <p:cNvSpPr/>
+          <p:nvPr/>
+        </p:nvSpPr>
+        <p:spPr>
+          <a:xfrm>
+            <a:off x="2560030" y="2974933"/>
+            <a:ext cx="50400" cy="50400"/>
+          </a:xfrm>
+          <a:prstGeom prst="ellipse">
+            <a:avLst/>
+          </a:prstGeom>
+          <a:solidFill>
+            <a:srgbClr val="2EC4B6"/>
+          </a:solidFill>
+          <a:ln>
+            <a:noFill/>
+          </a:ln>
+          <a:effectLst/>
+        </p:spPr>
+        <p:style>
+          <a:lnRef idx="1">
+            <a:schemeClr val="accent1"/>
+          </a:lnRef>
+          <a:fillRef idx="3">
+            <a:schemeClr val="accent1"/>
+          </a:fillRef>
+          <a:effectRef idx="0">
+            <a:schemeClr val="accent1"/>
+          </a:effectRef>
+          <a:fontRef idx="minor">
+            <a:schemeClr val="lt1"/>
+          </a:fontRef>
+        </p:style>
+        <p:txBody>
+          <a:bodyPr rtlCol="0" anchor="ctr" wrap="square" lIns="72000" tIns="18000" rIns="72000" bIns="18000"/>
+          <a:lstStyle/>
+          <a:p>
+            <a:pPr algn="ctr"/>
+          </a:p>
+        </p:txBody>
+      </p:sp>
+      <p:sp>
+        <p:nvSpPr>
+          <p:cNvPr id="41" name="Oval 40"/>
+          <p:cNvSpPr/>
+          <p:nvPr/>
+        </p:nvSpPr>
+        <p:spPr>
+          <a:xfrm>
+            <a:off x="2772774" y="2998660"/>
+            <a:ext cx="50400" cy="50400"/>
+          </a:xfrm>
+          <a:prstGeom prst="ellipse">
+            <a:avLst/>
+          </a:prstGeom>
+          <a:solidFill>
+            <a:srgbClr val="2EC4B6"/>
+          </a:solidFill>
+          <a:ln>
+            <a:noFill/>
+          </a:ln>
+          <a:effectLst/>
+        </p:spPr>
+        <p:style>
+          <a:lnRef idx="1">
+            <a:schemeClr val="accent1"/>
+          </a:lnRef>
+          <a:fillRef idx="3">
+            <a:schemeClr val="accent1"/>
+          </a:fillRef>
+          <a:effectRef idx="0">
+            <a:schemeClr val="accent1"/>
+          </a:effectRef>
+          <a:fontRef idx="minor">
+            <a:schemeClr val="lt1"/>
+          </a:fontRef>
+        </p:style>
+        <p:txBody>
+          <a:bodyPr rtlCol="0" anchor="ctr" wrap="square" lIns="72000" tIns="18000" rIns="72000" bIns="18000"/>
+          <a:lstStyle/>
+          <a:p>
+            <a:pPr algn="ctr"/>
+          </a:p>
+        </p:txBody>
+      </p:sp>
+      <p:sp>
+        <p:nvSpPr>
+          <p:cNvPr id="42" name="Rounded Rectangle 41"/>
+          <p:cNvSpPr/>
+          <p:nvPr/>
+        </p:nvSpPr>
+        <p:spPr>
+          <a:xfrm>
+            <a:off x="2841174" y="2998660"/>
+            <a:ext cx="186381" cy="50400"/>
+          </a:xfrm>
+          <a:prstGeom prst="roundRect">
+            <a:avLst>
+              <a:gd name="adj" fmla="val 50000"/>
+            </a:avLst>
+          </a:prstGeom>
+          <a:solidFill>
+            <a:srgbClr val="C9CED9"/>
+          </a:solidFill>
+          <a:ln>
+            <a:noFill/>
+          </a:ln>
+          <a:effectLst/>
+        </p:spPr>
+        <p:style>
+          <a:lnRef idx="1">
+            <a:schemeClr val="accent1"/>
+          </a:lnRef>
+          <a:fillRef idx="3">
+            <a:schemeClr val="accent1"/>
+          </a:fillRef>
+          <a:effectRef idx="0">
+            <a:schemeClr val="accent1"/>
+          </a:effectRef>
+          <a:fontRef idx="minor">
+            <a:schemeClr val="lt1"/>
+          </a:fontRef>
+        </p:style>
+        <p:txBody>
+          <a:bodyPr rtlCol="0" anchor="ctr" wrap="square" lIns="72000" tIns="18000" rIns="72000" bIns="18000"/>
+          <a:lstStyle/>
+          <a:p>
+            <a:pPr algn="ctr"/>
+          </a:p>
+        </p:txBody>
+      </p:sp>
+      <p:sp>
+        <p:nvSpPr>
+          <p:cNvPr id="43" name="Oval 42"/>
+          <p:cNvSpPr/>
+          <p:nvPr/>
+        </p:nvSpPr>
+        <p:spPr>
+          <a:xfrm>
+            <a:off x="1535977" y="3070457"/>
+            <a:ext cx="50400" cy="50400"/>
+          </a:xfrm>
+          <a:prstGeom prst="ellipse">
+            <a:avLst/>
+          </a:prstGeom>
+          <a:solidFill>
+            <a:srgbClr val="2EC4B6"/>
+          </a:solidFill>
+          <a:ln>
+            <a:noFill/>
+          </a:ln>
+          <a:effectLst/>
+        </p:spPr>
+        <p:style>
+          <a:lnRef idx="1">
+            <a:schemeClr val="accent1"/>
+          </a:lnRef>
+          <a:fillRef idx="3">
+            <a:schemeClr val="accent1"/>
+          </a:fillRef>
+          <a:effectRef idx="0">
+            <a:schemeClr val="accent1"/>
+          </a:effectRef>
+          <a:fontRef idx="minor">
+            <a:schemeClr val="lt1"/>
+          </a:fontRef>
+        </p:style>
+        <p:txBody>
+          <a:bodyPr rtlCol="0" anchor="ctr" wrap="square" lIns="72000" tIns="18000" rIns="72000" bIns="18000"/>
+          <a:lstStyle/>
+          <a:p>
+            <a:pPr algn="ctr"/>
+          </a:p>
+        </p:txBody>
+      </p:sp>
+      <p:sp>
+        <p:nvSpPr>
+          <p:cNvPr id="44" name="Oval 43"/>
+          <p:cNvSpPr/>
+          <p:nvPr/>
+        </p:nvSpPr>
+        <p:spPr>
+          <a:xfrm>
+            <a:off x="2707740" y="3077912"/>
+            <a:ext cx="50400" cy="50400"/>
+          </a:xfrm>
+          <a:prstGeom prst="ellipse">
+            <a:avLst/>
+          </a:prstGeom>
+          <a:solidFill>
+            <a:srgbClr val="2EC4B6"/>
+          </a:solidFill>
+          <a:ln>
+            <a:noFill/>
+          </a:ln>
+          <a:effectLst/>
+        </p:spPr>
+        <p:style>
+          <a:lnRef idx="1">
+            <a:schemeClr val="accent1"/>
+          </a:lnRef>
+          <a:fillRef idx="3">
+            <a:schemeClr val="accent1"/>
+          </a:fillRef>
+          <a:effectRef idx="0">
+            <a:schemeClr val="accent1"/>
+          </a:effectRef>
+          <a:fontRef idx="minor">
+            <a:schemeClr val="lt1"/>
+          </a:fontRef>
+        </p:style>
+        <p:txBody>
+          <a:bodyPr rtlCol="0" anchor="ctr" wrap="square" lIns="72000" tIns="18000" rIns="72000" bIns="18000"/>
+          <a:lstStyle/>
+          <a:p>
+            <a:pPr algn="ctr"/>
+          </a:p>
+        </p:txBody>
+      </p:sp>
+      <p:sp>
+        <p:nvSpPr>
+          <p:cNvPr id="45" name="Oval 44"/>
+          <p:cNvSpPr/>
+          <p:nvPr/>
+        </p:nvSpPr>
+        <p:spPr>
+          <a:xfrm>
+            <a:off x="3331068" y="3160924"/>
+            <a:ext cx="50400" cy="50400"/>
+          </a:xfrm>
+          <a:prstGeom prst="ellipse">
+            <a:avLst/>
+          </a:prstGeom>
+          <a:solidFill>
+            <a:srgbClr val="2EC4B6"/>
+          </a:solidFill>
+          <a:ln>
+            <a:noFill/>
+          </a:ln>
+          <a:effectLst/>
+        </p:spPr>
+        <p:style>
+          <a:lnRef idx="1">
+            <a:schemeClr val="accent1"/>
+          </a:lnRef>
+          <a:fillRef idx="3">
+            <a:schemeClr val="accent1"/>
+          </a:fillRef>
+          <a:effectRef idx="0">
+            <a:schemeClr val="accent1"/>
+          </a:effectRef>
+          <a:fontRef idx="minor">
+            <a:schemeClr val="lt1"/>
+          </a:fontRef>
+        </p:style>
+        <p:txBody>
+          <a:bodyPr rtlCol="0" anchor="ctr" wrap="square" lIns="72000" tIns="18000" rIns="72000" bIns="18000"/>
+          <a:lstStyle/>
+          <a:p>
+            <a:pPr algn="ctr"/>
+          </a:p>
+        </p:txBody>
+      </p:sp>
+      <p:sp>
+        <p:nvSpPr>
+          <p:cNvPr id="46" name="Oval 45"/>
+          <p:cNvSpPr/>
+          <p:nvPr/>
+        </p:nvSpPr>
+        <p:spPr>
+          <a:xfrm>
+            <a:off x="2175619" y="3269407"/>
+            <a:ext cx="50400" cy="50400"/>
+          </a:xfrm>
+          <a:prstGeom prst="ellipse">
+            <a:avLst/>
+          </a:prstGeom>
+          <a:solidFill>
+            <a:srgbClr val="2EC4B6"/>
+          </a:solidFill>
+          <a:ln>
+            <a:noFill/>
+          </a:ln>
+          <a:effectLst/>
+        </p:spPr>
+        <p:style>
+          <a:lnRef idx="1">
+            <a:schemeClr val="accent1"/>
+          </a:lnRef>
+          <a:fillRef idx="3">
+            <a:schemeClr val="accent1"/>
+          </a:fillRef>
+          <a:effectRef idx="0">
+            <a:schemeClr val="accent1"/>
+          </a:effectRef>
+          <a:fontRef idx="minor">
+            <a:schemeClr val="lt1"/>
+          </a:fontRef>
+        </p:style>
+        <p:txBody>
+          <a:bodyPr rtlCol="0" anchor="ctr" wrap="square" lIns="72000" tIns="18000" rIns="72000" bIns="18000"/>
+          <a:lstStyle/>
+          <a:p>
+            <a:pPr algn="ctr"/>
+          </a:p>
+        </p:txBody>
+      </p:sp>
+      <p:sp>
+        <p:nvSpPr>
+          <p:cNvPr id="47" name="Rounded Rectangle 46"/>
+          <p:cNvSpPr/>
+          <p:nvPr/>
+        </p:nvSpPr>
+        <p:spPr>
+          <a:xfrm>
+            <a:off x="2244019" y="3269407"/>
+            <a:ext cx="121913" cy="50400"/>
+          </a:xfrm>
+          <a:prstGeom prst="roundRect">
+            <a:avLst>
+              <a:gd name="adj" fmla="val 50000"/>
+            </a:avLst>
+          </a:prstGeom>
+          <a:solidFill>
+            <a:srgbClr val="C9CED9"/>
+          </a:solidFill>
+          <a:ln>
+            <a:noFill/>
+          </a:ln>
+          <a:effectLst/>
+        </p:spPr>
+        <p:style>
+          <a:lnRef idx="1">
+            <a:schemeClr val="accent1"/>
+          </a:lnRef>
+          <a:fillRef idx="3">
+            <a:schemeClr val="accent1"/>
+          </a:fillRef>
+          <a:effectRef idx="0">
+            <a:schemeClr val="accent1"/>
+          </a:effectRef>
+          <a:fontRef idx="minor">
+            <a:schemeClr val="lt1"/>
+          </a:fontRef>
+        </p:style>
+        <p:txBody>
+          <a:bodyPr rtlCol="0" anchor="ctr" wrap="square" lIns="72000" tIns="18000" rIns="72000" bIns="18000"/>
+          <a:lstStyle/>
+          <a:p>
+            <a:pPr algn="ctr"/>
+          </a:p>
+        </p:txBody>
+      </p:sp>
+      <p:sp>
+        <p:nvSpPr>
+          <p:cNvPr id="48" name="Oval 47"/>
+          <p:cNvSpPr/>
+          <p:nvPr/>
+        </p:nvSpPr>
+        <p:spPr>
+          <a:xfrm>
+            <a:off x="2176979" y="3330602"/>
+            <a:ext cx="50400" cy="50400"/>
+          </a:xfrm>
+          <a:prstGeom prst="ellipse">
+            <a:avLst/>
+          </a:prstGeom>
+          <a:solidFill>
+            <a:srgbClr val="2EC4B6"/>
+          </a:solidFill>
+          <a:ln>
+            <a:noFill/>
+          </a:ln>
+          <a:effectLst/>
+        </p:spPr>
+        <p:style>
+          <a:lnRef idx="1">
+            <a:schemeClr val="accent1"/>
+          </a:lnRef>
+          <a:fillRef idx="3">
+            <a:schemeClr val="accent1"/>
+          </a:fillRef>
+          <a:effectRef idx="0">
+            <a:schemeClr val="accent1"/>
+          </a:effectRef>
+          <a:fontRef idx="minor">
+            <a:schemeClr val="lt1"/>
+          </a:fontRef>
+        </p:style>
+        <p:txBody>
+          <a:bodyPr rtlCol="0" anchor="ctr" wrap="square" lIns="72000" tIns="18000" rIns="72000" bIns="18000"/>
+          <a:lstStyle/>
+          <a:p>
+            <a:pPr algn="ctr"/>
+          </a:p>
+        </p:txBody>
+      </p:sp>
+      <p:sp>
+        <p:nvSpPr>
+          <p:cNvPr id="49" name="Oval 48"/>
+          <p:cNvSpPr/>
+          <p:nvPr/>
+        </p:nvSpPr>
+        <p:spPr>
+          <a:xfrm>
+            <a:off x="2483339" y="3366435"/>
+            <a:ext cx="50400" cy="50400"/>
+          </a:xfrm>
+          <a:prstGeom prst="ellipse">
+            <a:avLst/>
+          </a:prstGeom>
+          <a:solidFill>
+            <a:srgbClr val="2EC4B6"/>
+          </a:solidFill>
+          <a:ln>
+            <a:noFill/>
+          </a:ln>
+          <a:effectLst/>
+        </p:spPr>
+        <p:style>
+          <a:lnRef idx="1">
+            <a:schemeClr val="accent1"/>
+          </a:lnRef>
+          <a:fillRef idx="3">
+            <a:schemeClr val="accent1"/>
+          </a:fillRef>
+          <a:effectRef idx="0">
+            <a:schemeClr val="accent1"/>
+          </a:effectRef>
+          <a:fontRef idx="minor">
+            <a:schemeClr val="lt1"/>
+          </a:fontRef>
+        </p:style>
+        <p:txBody>
+          <a:bodyPr rtlCol="0" anchor="ctr" wrap="square" lIns="72000" tIns="18000" rIns="72000" bIns="18000"/>
+          <a:lstStyle/>
+          <a:p>
+            <a:pPr algn="ctr"/>
+          </a:p>
+        </p:txBody>
+      </p:sp>
+      <p:sp>
+        <p:nvSpPr>
+          <p:cNvPr id="50" name="Oval 49"/>
+          <p:cNvSpPr/>
+          <p:nvPr/>
+        </p:nvSpPr>
+        <p:spPr>
+          <a:xfrm>
+            <a:off x="1919303" y="3374368"/>
+            <a:ext cx="50400" cy="50400"/>
+          </a:xfrm>
+          <a:prstGeom prst="ellipse">
+            <a:avLst/>
+          </a:prstGeom>
+          <a:solidFill>
+            <a:srgbClr val="2EC4B6"/>
+          </a:solidFill>
+          <a:ln>
+            <a:noFill/>
+          </a:ln>
+          <a:effectLst/>
+        </p:spPr>
+        <p:style>
+          <a:lnRef idx="1">
+            <a:schemeClr val="accent1"/>
+          </a:lnRef>
+          <a:fillRef idx="3">
+            <a:schemeClr val="accent1"/>
+          </a:fillRef>
+          <a:effectRef idx="0">
+            <a:schemeClr val="accent1"/>
+          </a:effectRef>
+          <a:fontRef idx="minor">
+            <a:schemeClr val="lt1"/>
+          </a:fontRef>
+        </p:style>
+        <p:txBody>
+          <a:bodyPr rtlCol="0" anchor="ctr" wrap="square" lIns="72000" tIns="18000" rIns="72000" bIns="18000"/>
+          <a:lstStyle/>
+          <a:p>
+            <a:pPr algn="ctr"/>
+          </a:p>
+        </p:txBody>
+      </p:sp>
+      <p:sp>
+        <p:nvSpPr>
+          <p:cNvPr id="51" name="Oval 50"/>
+          <p:cNvSpPr/>
+          <p:nvPr/>
+        </p:nvSpPr>
+        <p:spPr>
+          <a:xfrm>
+            <a:off x="2092012" y="3388477"/>
+            <a:ext cx="50400" cy="50400"/>
+          </a:xfrm>
+          <a:prstGeom prst="ellipse">
+            <a:avLst/>
+          </a:prstGeom>
+          <a:solidFill>
+            <a:srgbClr val="2EC4B6"/>
+          </a:solidFill>
+          <a:ln>
+            <a:noFill/>
+          </a:ln>
+          <a:effectLst/>
+        </p:spPr>
+        <p:style>
+          <a:lnRef idx="1">
+            <a:schemeClr val="accent1"/>
+          </a:lnRef>
+          <a:fillRef idx="3">
+            <a:schemeClr val="accent1"/>
+          </a:fillRef>
+          <a:effectRef idx="0">
+            <a:schemeClr val="accent1"/>
+          </a:effectRef>
+          <a:fontRef idx="minor">
+            <a:schemeClr val="lt1"/>
+          </a:fontRef>
+        </p:style>
+        <p:txBody>
+          <a:bodyPr rtlCol="0" anchor="ctr" wrap="square" lIns="72000" tIns="18000" rIns="72000" bIns="18000"/>
+          <a:lstStyle/>
+          <a:p>
+            <a:pPr algn="ctr"/>
+          </a:p>
+        </p:txBody>
+      </p:sp>
+      <p:sp>
+        <p:nvSpPr>
+          <p:cNvPr id="52" name="Rounded Rectangle 51"/>
+          <p:cNvSpPr/>
+          <p:nvPr/>
+        </p:nvSpPr>
+        <p:spPr>
+          <a:xfrm>
+            <a:off x="2160412" y="3388477"/>
+            <a:ext cx="124554" cy="50400"/>
+          </a:xfrm>
+          <a:prstGeom prst="roundRect">
+            <a:avLst>
+              <a:gd name="adj" fmla="val 50000"/>
+            </a:avLst>
+          </a:prstGeom>
+          <a:solidFill>
+            <a:srgbClr val="C9CED9"/>
+          </a:solidFill>
+          <a:ln>
+            <a:noFill/>
+          </a:ln>
+          <a:effectLst/>
+        </p:spPr>
+        <p:style>
+          <a:lnRef idx="1">
+            <a:schemeClr val="accent1"/>
+          </a:lnRef>
+          <a:fillRef idx="3">
+            <a:schemeClr val="accent1"/>
+          </a:fillRef>
+          <a:effectRef idx="0">
+            <a:schemeClr val="accent1"/>
+          </a:effectRef>
+          <a:fontRef idx="minor">
+            <a:schemeClr val="lt1"/>
+          </a:fontRef>
+        </p:style>
+        <p:txBody>
+          <a:bodyPr rtlCol="0" anchor="ctr" wrap="square" lIns="72000" tIns="18000" rIns="72000" bIns="18000"/>
+          <a:lstStyle/>
+          <a:p>
+            <a:pPr algn="ctr"/>
+          </a:p>
+        </p:txBody>
+      </p:sp>
+      <p:sp>
+        <p:nvSpPr>
+          <p:cNvPr id="53" name="Oval 52"/>
+          <p:cNvSpPr/>
+          <p:nvPr/>
+        </p:nvSpPr>
+        <p:spPr>
+          <a:xfrm>
+            <a:off x="2165080" y="3389288"/>
+            <a:ext cx="50400" cy="50400"/>
+          </a:xfrm>
+          <a:prstGeom prst="ellipse">
+            <a:avLst/>
+          </a:prstGeom>
+          <a:solidFill>
+            <a:srgbClr val="2EC4B6"/>
+          </a:solidFill>
+          <a:ln>
+            <a:noFill/>
+          </a:ln>
+          <a:effectLst/>
+        </p:spPr>
+        <p:style>
+          <a:lnRef idx="1">
+            <a:schemeClr val="accent1"/>
+          </a:lnRef>
+          <a:fillRef idx="3">
+            <a:schemeClr val="accent1"/>
+          </a:fillRef>
+          <a:effectRef idx="0">
+            <a:schemeClr val="accent1"/>
+          </a:effectRef>
+          <a:fontRef idx="minor">
+            <a:schemeClr val="lt1"/>
+          </a:fontRef>
+        </p:style>
+        <p:txBody>
+          <a:bodyPr rtlCol="0" anchor="ctr" wrap="square" lIns="72000" tIns="18000" rIns="72000" bIns="18000"/>
+          <a:lstStyle/>
+          <a:p>
+            <a:pPr algn="ctr"/>
+          </a:p>
+        </p:txBody>
+      </p:sp>
+      <p:sp>
+        <p:nvSpPr>
+          <p:cNvPr id="54" name="Oval 53"/>
+          <p:cNvSpPr/>
+          <p:nvPr/>
+        </p:nvSpPr>
+        <p:spPr>
+          <a:xfrm>
+            <a:off x="1509956" y="3396799"/>
+            <a:ext cx="50400" cy="50400"/>
+          </a:xfrm>
+          <a:prstGeom prst="ellipse">
+            <a:avLst/>
+          </a:prstGeom>
+          <a:solidFill>
+            <a:srgbClr val="2EC4B6"/>
+          </a:solidFill>
+          <a:ln>
+            <a:noFill/>
+          </a:ln>
+          <a:effectLst/>
+        </p:spPr>
+        <p:style>
+          <a:lnRef idx="1">
+            <a:schemeClr val="accent1"/>
+          </a:lnRef>
+          <a:fillRef idx="3">
+            <a:schemeClr val="accent1"/>
+          </a:fillRef>
+          <a:effectRef idx="0">
+            <a:schemeClr val="accent1"/>
+          </a:effectRef>
+          <a:fontRef idx="minor">
+            <a:schemeClr val="lt1"/>
+          </a:fontRef>
+        </p:style>
+        <p:txBody>
+          <a:bodyPr rtlCol="0" anchor="ctr" wrap="square" lIns="72000" tIns="18000" rIns="72000" bIns="18000"/>
+          <a:lstStyle/>
+          <a:p>
+            <a:pPr algn="ctr"/>
+          </a:p>
+        </p:txBody>
+      </p:sp>
+      <p:sp>
+        <p:nvSpPr>
+          <p:cNvPr id="55" name="Oval 54"/>
+          <p:cNvSpPr/>
+          <p:nvPr/>
+        </p:nvSpPr>
+        <p:spPr>
+          <a:xfrm>
+            <a:off x="2307838" y="3420853"/>
+            <a:ext cx="50400" cy="50400"/>
+          </a:xfrm>
+          <a:prstGeom prst="ellipse">
+            <a:avLst/>
+          </a:prstGeom>
+          <a:solidFill>
+            <a:srgbClr val="2EC4B6"/>
+          </a:solidFill>
+          <a:ln>
+            <a:noFill/>
+          </a:ln>
+          <a:effectLst/>
+        </p:spPr>
+        <p:style>
+          <a:lnRef idx="1">
+            <a:schemeClr val="accent1"/>
+          </a:lnRef>
+          <a:fillRef idx="3">
+            <a:schemeClr val="accent1"/>
+          </a:fillRef>
+          <a:effectRef idx="0">
+            <a:schemeClr val="accent1"/>
+          </a:effectRef>
+          <a:fontRef idx="minor">
+            <a:schemeClr val="lt1"/>
+          </a:fontRef>
+        </p:style>
+        <p:txBody>
+          <a:bodyPr rtlCol="0" anchor="ctr" wrap="square" lIns="72000" tIns="18000" rIns="72000" bIns="18000"/>
+          <a:lstStyle/>
+          <a:p>
+            <a:pPr algn="ctr"/>
+          </a:p>
+        </p:txBody>
+      </p:sp>
+      <p:sp>
+        <p:nvSpPr>
+          <p:cNvPr id="56" name="Oval 55"/>
+          <p:cNvSpPr/>
+          <p:nvPr/>
+        </p:nvSpPr>
+        <p:spPr>
+          <a:xfrm>
+            <a:off x="3071268" y="3427671"/>
+            <a:ext cx="50400" cy="50400"/>
+          </a:xfrm>
+          <a:prstGeom prst="ellipse">
+            <a:avLst/>
+          </a:prstGeom>
+          <a:solidFill>
+            <a:srgbClr val="2EC4B6"/>
+          </a:solidFill>
+          <a:ln>
+            <a:noFill/>
+          </a:ln>
+          <a:effectLst/>
+        </p:spPr>
+        <p:style>
+          <a:lnRef idx="1">
+            <a:schemeClr val="accent1"/>
+          </a:lnRef>
+          <a:fillRef idx="3">
+            <a:schemeClr val="accent1"/>
+          </a:fillRef>
+          <a:effectRef idx="0">
+            <a:schemeClr val="accent1"/>
+          </a:effectRef>
+          <a:fontRef idx="minor">
+            <a:schemeClr val="lt1"/>
+          </a:fontRef>
+        </p:style>
+        <p:txBody>
+          <a:bodyPr rtlCol="0" anchor="ctr" wrap="square" lIns="72000" tIns="18000" rIns="72000" bIns="18000"/>
+          <a:lstStyle/>
+          <a:p>
+            <a:pPr algn="ctr"/>
+          </a:p>
+        </p:txBody>
+      </p:sp>
+      <p:sp>
+        <p:nvSpPr>
+          <p:cNvPr id="57" name="Rounded Rectangle 56"/>
+          <p:cNvSpPr/>
+          <p:nvPr/>
+        </p:nvSpPr>
+        <p:spPr>
+          <a:xfrm>
+            <a:off x="3139668" y="3427671"/>
+            <a:ext cx="163507" cy="50400"/>
+          </a:xfrm>
+          <a:prstGeom prst="roundRect">
+            <a:avLst>
+              <a:gd name="adj" fmla="val 50000"/>
+            </a:avLst>
+          </a:prstGeom>
+          <a:solidFill>
+            <a:srgbClr val="C9CED9"/>
+          </a:solidFill>
+          <a:ln>
+            <a:noFill/>
+          </a:ln>
+          <a:effectLst/>
+        </p:spPr>
+        <p:style>
+          <a:lnRef idx="1">
+            <a:schemeClr val="accent1"/>
+          </a:lnRef>
+          <a:fillRef idx="3">
+            <a:schemeClr val="accent1"/>
+          </a:fillRef>
+          <a:effectRef idx="0">
+            <a:schemeClr val="accent1"/>
+          </a:effectRef>
+          <a:fontRef idx="minor">
+            <a:schemeClr val="lt1"/>
+          </a:fontRef>
+        </p:style>
+        <p:txBody>
+          <a:bodyPr rtlCol="0" anchor="ctr" wrap="square" lIns="72000" tIns="18000" rIns="72000" bIns="18000"/>
+          <a:lstStyle/>
+          <a:p>
+            <a:pPr algn="ctr"/>
+          </a:p>
+        </p:txBody>
+      </p:sp>
+      <p:sp>
+        <p:nvSpPr>
+          <p:cNvPr id="58" name="Oval 57"/>
+          <p:cNvSpPr/>
+          <p:nvPr/>
+        </p:nvSpPr>
+        <p:spPr>
+          <a:xfrm>
+            <a:off x="2225255" y="3478960"/>
+            <a:ext cx="50400" cy="50400"/>
+          </a:xfrm>
+          <a:prstGeom prst="ellipse">
+            <a:avLst/>
+          </a:prstGeom>
+          <a:solidFill>
+            <a:srgbClr val="2EC4B6"/>
+          </a:solidFill>
+          <a:ln>
+            <a:noFill/>
+          </a:ln>
+          <a:effectLst/>
+        </p:spPr>
+        <p:style>
+          <a:lnRef idx="1">
+            <a:schemeClr val="accent1"/>
+          </a:lnRef>
+          <a:fillRef idx="3">
+            <a:schemeClr val="accent1"/>
+          </a:fillRef>
+          <a:effectRef idx="0">
+            <a:schemeClr val="accent1"/>
+          </a:effectRef>
+          <a:fontRef idx="minor">
+            <a:schemeClr val="lt1"/>
+          </a:fontRef>
+        </p:style>
+        <p:txBody>
+          <a:bodyPr rtlCol="0" anchor="ctr" wrap="square" lIns="72000" tIns="18000" rIns="72000" bIns="18000"/>
+          <a:lstStyle/>
+          <a:p>
+            <a:pPr algn="ctr"/>
+          </a:p>
+        </p:txBody>
+      </p:sp>
+      <p:sp>
+        <p:nvSpPr>
+          <p:cNvPr id="59" name="Oval 58"/>
+          <p:cNvSpPr/>
+          <p:nvPr/>
+        </p:nvSpPr>
+        <p:spPr>
+          <a:xfrm>
+            <a:off x="2476890" y="3525689"/>
+            <a:ext cx="50400" cy="50400"/>
+          </a:xfrm>
+          <a:prstGeom prst="ellipse">
+            <a:avLst/>
+          </a:prstGeom>
+          <a:solidFill>
+            <a:srgbClr val="2EC4B6"/>
+          </a:solidFill>
+          <a:ln>
+            <a:noFill/>
+          </a:ln>
+          <a:effectLst/>
+        </p:spPr>
+        <p:style>
+          <a:lnRef idx="1">
+            <a:schemeClr val="accent1"/>
+          </a:lnRef>
+          <a:fillRef idx="3">
+            <a:schemeClr val="accent1"/>
+          </a:fillRef>
+          <a:effectRef idx="0">
+            <a:schemeClr val="accent1"/>
+          </a:effectRef>
+          <a:fontRef idx="minor">
+            <a:schemeClr val="lt1"/>
+          </a:fontRef>
+        </p:style>
+        <p:txBody>
+          <a:bodyPr rtlCol="0" anchor="ctr" wrap="square" lIns="72000" tIns="18000" rIns="72000" bIns="18000"/>
+          <a:lstStyle/>
+          <a:p>
+            <a:pPr algn="ctr"/>
+          </a:p>
+        </p:txBody>
+      </p:sp>
+      <p:sp>
+        <p:nvSpPr>
+          <p:cNvPr id="60" name="Oval 59"/>
+          <p:cNvSpPr/>
+          <p:nvPr/>
+        </p:nvSpPr>
+        <p:spPr>
+          <a:xfrm>
+            <a:off x="2072315" y="3531349"/>
+            <a:ext cx="50400" cy="50400"/>
+          </a:xfrm>
+          <a:prstGeom prst="ellipse">
+            <a:avLst/>
+          </a:prstGeom>
+          <a:solidFill>
+            <a:srgbClr val="2EC4B6"/>
+          </a:solidFill>
+          <a:ln>
+            <a:noFill/>
+          </a:ln>
+          <a:effectLst/>
+        </p:spPr>
+        <p:style>
+          <a:lnRef idx="1">
+            <a:schemeClr val="accent1"/>
+          </a:lnRef>
+          <a:fillRef idx="3">
+            <a:schemeClr val="accent1"/>
+          </a:fillRef>
+          <a:effectRef idx="0">
+            <a:schemeClr val="accent1"/>
+          </a:effectRef>
+          <a:fontRef idx="minor">
+            <a:schemeClr val="lt1"/>
+          </a:fontRef>
+        </p:style>
+        <p:txBody>
+          <a:bodyPr rtlCol="0" anchor="ctr" wrap="square" lIns="72000" tIns="18000" rIns="72000" bIns="18000"/>
+          <a:lstStyle/>
+          <a:p>
+            <a:pPr algn="ctr"/>
+          </a:p>
+        </p:txBody>
+      </p:sp>
+      <p:sp>
+        <p:nvSpPr>
+          <p:cNvPr id="61" name="Oval 60"/>
+          <p:cNvSpPr/>
+          <p:nvPr/>
+        </p:nvSpPr>
+        <p:spPr>
+          <a:xfrm>
+            <a:off x="2219410" y="3540270"/>
+            <a:ext cx="50400" cy="50400"/>
+          </a:xfrm>
+          <a:prstGeom prst="ellipse">
+            <a:avLst/>
+          </a:prstGeom>
+          <a:solidFill>
+            <a:srgbClr val="2EC4B6"/>
+          </a:solidFill>
+          <a:ln>
+            <a:noFill/>
+          </a:ln>
+          <a:effectLst/>
+        </p:spPr>
+        <p:style>
+          <a:lnRef idx="1">
+            <a:schemeClr val="accent1"/>
+          </a:lnRef>
+          <a:fillRef idx="3">
+            <a:schemeClr val="accent1"/>
+          </a:fillRef>
+          <a:effectRef idx="0">
+            <a:schemeClr val="accent1"/>
+          </a:effectRef>
+          <a:fontRef idx="minor">
+            <a:schemeClr val="lt1"/>
+          </a:fontRef>
+        </p:style>
+        <p:txBody>
+          <a:bodyPr rtlCol="0" anchor="ctr" wrap="square" lIns="72000" tIns="18000" rIns="72000" bIns="18000"/>
+          <a:lstStyle/>
+          <a:p>
+            <a:pPr algn="ctr"/>
+          </a:p>
+        </p:txBody>
+      </p:sp>
+      <p:sp>
+        <p:nvSpPr>
+          <p:cNvPr id="62" name="Rounded Rectangle 61"/>
+          <p:cNvSpPr/>
+          <p:nvPr/>
+        </p:nvSpPr>
+        <p:spPr>
+          <a:xfrm>
+            <a:off x="2287810" y="3540270"/>
+            <a:ext cx="150890" cy="50400"/>
+          </a:xfrm>
+          <a:prstGeom prst="roundRect">
+            <a:avLst>
+              <a:gd name="adj" fmla="val 50000"/>
+            </a:avLst>
+          </a:prstGeom>
+          <a:solidFill>
+            <a:srgbClr val="C9CED9"/>
+          </a:solidFill>
+          <a:ln>
+            <a:noFill/>
+          </a:ln>
+          <a:effectLst/>
+        </p:spPr>
+        <p:style>
+          <a:lnRef idx="1">
+            <a:schemeClr val="accent1"/>
+          </a:lnRef>
+          <a:fillRef idx="3">
+            <a:schemeClr val="accent1"/>
+          </a:fillRef>
+          <a:effectRef idx="0">
+            <a:schemeClr val="accent1"/>
+          </a:effectRef>
+          <a:fontRef idx="minor">
+            <a:schemeClr val="lt1"/>
+          </a:fontRef>
+        </p:style>
+        <p:txBody>
+          <a:bodyPr rtlCol="0" anchor="ctr" wrap="square" lIns="72000" tIns="18000" rIns="72000" bIns="18000"/>
+          <a:lstStyle/>
+          <a:p>
+            <a:pPr algn="ctr"/>
+          </a:p>
+        </p:txBody>
+      </p:sp>
+      <p:sp>
+        <p:nvSpPr>
+          <p:cNvPr id="63" name="Oval 62"/>
+          <p:cNvSpPr/>
+          <p:nvPr/>
+        </p:nvSpPr>
+        <p:spPr>
+          <a:xfrm>
+            <a:off x="1662903" y="3544627"/>
+            <a:ext cx="50400" cy="50400"/>
+          </a:xfrm>
+          <a:prstGeom prst="ellipse">
+            <a:avLst/>
+          </a:prstGeom>
+          <a:solidFill>
+            <a:srgbClr val="2EC4B6"/>
+          </a:solidFill>
+          <a:ln>
+            <a:noFill/>
+          </a:ln>
+          <a:effectLst/>
+        </p:spPr>
+        <p:style>
+          <a:lnRef idx="1">
+            <a:schemeClr val="accent1"/>
+          </a:lnRef>
+          <a:fillRef idx="3">
+            <a:schemeClr val="accent1"/>
+          </a:fillRef>
+          <a:effectRef idx="0">
+            <a:schemeClr val="accent1"/>
+          </a:effectRef>
+          <a:fontRef idx="minor">
+            <a:schemeClr val="lt1"/>
+          </a:fontRef>
+        </p:style>
+        <p:txBody>
+          <a:bodyPr rtlCol="0" anchor="ctr" wrap="square" lIns="72000" tIns="18000" rIns="72000" bIns="18000"/>
+          <a:lstStyle/>
+          <a:p>
+            <a:pPr algn="ctr"/>
+          </a:p>
+        </p:txBody>
+      </p:sp>
+      <p:sp>
+        <p:nvSpPr>
+          <p:cNvPr id="64" name="Oval 63"/>
+          <p:cNvSpPr/>
+          <p:nvPr/>
+        </p:nvSpPr>
+        <p:spPr>
+          <a:xfrm>
+            <a:off x="2108230" y="3588920"/>
+            <a:ext cx="50400" cy="50400"/>
+          </a:xfrm>
+          <a:prstGeom prst="ellipse">
+            <a:avLst/>
+          </a:prstGeom>
+          <a:solidFill>
+            <a:srgbClr val="2EC4B6"/>
+          </a:solidFill>
+          <a:ln>
+            <a:noFill/>
+          </a:ln>
+          <a:effectLst/>
+        </p:spPr>
+        <p:style>
+          <a:lnRef idx="1">
+            <a:schemeClr val="accent1"/>
+          </a:lnRef>
+          <a:fillRef idx="3">
+            <a:schemeClr val="accent1"/>
+          </a:fillRef>
+          <a:effectRef idx="0">
+            <a:schemeClr val="accent1"/>
+          </a:effectRef>
+          <a:fontRef idx="minor">
+            <a:schemeClr val="lt1"/>
+          </a:fontRef>
+        </p:style>
+        <p:txBody>
+          <a:bodyPr rtlCol="0" anchor="ctr" wrap="square" lIns="72000" tIns="18000" rIns="72000" bIns="18000"/>
+          <a:lstStyle/>
+          <a:p>
+            <a:pPr algn="ctr"/>
+          </a:p>
+        </p:txBody>
+      </p:sp>
+      <p:sp>
+        <p:nvSpPr>
+          <p:cNvPr id="65" name="Oval 64"/>
+          <p:cNvSpPr/>
+          <p:nvPr/>
+        </p:nvSpPr>
+        <p:spPr>
+          <a:xfrm>
+            <a:off x="2326967" y="3645243"/>
+            <a:ext cx="50400" cy="50400"/>
+          </a:xfrm>
+          <a:prstGeom prst="ellipse">
+            <a:avLst/>
+          </a:prstGeom>
+          <a:solidFill>
+            <a:srgbClr val="2EC4B6"/>
+          </a:solidFill>
+          <a:ln>
+            <a:noFill/>
+          </a:ln>
+          <a:effectLst/>
+        </p:spPr>
+        <p:style>
+          <a:lnRef idx="1">
+            <a:schemeClr val="accent1"/>
+          </a:lnRef>
+          <a:fillRef idx="3">
+            <a:schemeClr val="accent1"/>
+          </a:fillRef>
+          <a:effectRef idx="0">
+            <a:schemeClr val="accent1"/>
+          </a:effectRef>
+          <a:fontRef idx="minor">
+            <a:schemeClr val="lt1"/>
+          </a:fontRef>
+        </p:style>
+        <p:txBody>
+          <a:bodyPr rtlCol="0" anchor="ctr" wrap="square" lIns="72000" tIns="18000" rIns="72000" bIns="18000"/>
+          <a:lstStyle/>
+          <a:p>
+            <a:pPr algn="ctr"/>
+          </a:p>
+        </p:txBody>
+      </p:sp>
+      <p:sp>
+        <p:nvSpPr>
+          <p:cNvPr id="66" name="Oval 65"/>
+          <p:cNvSpPr/>
+          <p:nvPr/>
+        </p:nvSpPr>
+        <p:spPr>
+          <a:xfrm>
+            <a:off x="2434371" y="3669338"/>
+            <a:ext cx="50400" cy="50400"/>
+          </a:xfrm>
+          <a:prstGeom prst="ellipse">
+            <a:avLst/>
+          </a:prstGeom>
+          <a:solidFill>
+            <a:srgbClr val="2EC4B6"/>
+          </a:solidFill>
+          <a:ln>
+            <a:noFill/>
+          </a:ln>
+          <a:effectLst/>
+        </p:spPr>
+        <p:style>
+          <a:lnRef idx="1">
+            <a:schemeClr val="accent1"/>
+          </a:lnRef>
+          <a:fillRef idx="3">
+            <a:schemeClr val="accent1"/>
+          </a:fillRef>
+          <a:effectRef idx="0">
+            <a:schemeClr val="accent1"/>
+          </a:effectRef>
+          <a:fontRef idx="minor">
+            <a:schemeClr val="lt1"/>
+          </a:fontRef>
+        </p:style>
+        <p:txBody>
+          <a:bodyPr rtlCol="0" anchor="ctr" wrap="square" lIns="72000" tIns="18000" rIns="72000" bIns="18000"/>
+          <a:lstStyle/>
+          <a:p>
+            <a:pPr algn="ctr"/>
+          </a:p>
+        </p:txBody>
+      </p:sp>
+      <p:sp>
+        <p:nvSpPr>
+          <p:cNvPr id="67" name="Rounded Rectangle 66"/>
+          <p:cNvSpPr/>
+          <p:nvPr/>
+        </p:nvSpPr>
+        <p:spPr>
+          <a:xfrm>
+            <a:off x="2502771" y="3669338"/>
+            <a:ext cx="242274" cy="50400"/>
+          </a:xfrm>
+          <a:prstGeom prst="roundRect">
+            <a:avLst>
+              <a:gd name="adj" fmla="val 50000"/>
+            </a:avLst>
+          </a:prstGeom>
+          <a:solidFill>
+            <a:srgbClr val="C9CED9"/>
+          </a:solidFill>
+          <a:ln>
+            <a:noFill/>
+          </a:ln>
+          <a:effectLst/>
+        </p:spPr>
+        <p:style>
+          <a:lnRef idx="1">
+            <a:schemeClr val="accent1"/>
+          </a:lnRef>
+          <a:fillRef idx="3">
+            <a:schemeClr val="accent1"/>
+          </a:fillRef>
+          <a:effectRef idx="0">
+            <a:schemeClr val="accent1"/>
+          </a:effectRef>
+          <a:fontRef idx="minor">
+            <a:schemeClr val="lt1"/>
+          </a:fontRef>
+        </p:style>
+        <p:txBody>
+          <a:bodyPr rtlCol="0" anchor="ctr" wrap="square" lIns="72000" tIns="18000" rIns="72000" bIns="18000"/>
+          <a:lstStyle/>
+          <a:p>
+            <a:pPr algn="ctr"/>
+          </a:p>
+        </p:txBody>
+      </p:sp>
+      <p:sp>
+        <p:nvSpPr>
+          <p:cNvPr id="68" name="Oval 67"/>
+          <p:cNvSpPr/>
+          <p:nvPr/>
+        </p:nvSpPr>
+        <p:spPr>
+          <a:xfrm>
+            <a:off x="3001848" y="3687952"/>
+            <a:ext cx="50400" cy="50400"/>
+          </a:xfrm>
+          <a:prstGeom prst="ellipse">
+            <a:avLst/>
+          </a:prstGeom>
+          <a:solidFill>
+            <a:srgbClr val="2EC4B6"/>
+          </a:solidFill>
+          <a:ln>
+            <a:noFill/>
+          </a:ln>
+          <a:effectLst/>
+        </p:spPr>
+        <p:style>
+          <a:lnRef idx="1">
+            <a:schemeClr val="accent1"/>
+          </a:lnRef>
+          <a:fillRef idx="3">
+            <a:schemeClr val="accent1"/>
+          </a:fillRef>
+          <a:effectRef idx="0">
+            <a:schemeClr val="accent1"/>
+          </a:effectRef>
+          <a:fontRef idx="minor">
+            <a:schemeClr val="lt1"/>
+          </a:fontRef>
+        </p:style>
+        <p:txBody>
+          <a:bodyPr rtlCol="0" anchor="ctr" wrap="square" lIns="72000" tIns="18000" rIns="72000" bIns="18000"/>
+          <a:lstStyle/>
+          <a:p>
+            <a:pPr algn="ctr"/>
+          </a:p>
+        </p:txBody>
+      </p:sp>
+      <p:sp>
+        <p:nvSpPr>
+          <p:cNvPr id="69" name="Oval 68"/>
+          <p:cNvSpPr/>
+          <p:nvPr/>
+        </p:nvSpPr>
+        <p:spPr>
+          <a:xfrm>
+            <a:off x="1854556" y="3709445"/>
+            <a:ext cx="50400" cy="50400"/>
+          </a:xfrm>
+          <a:prstGeom prst="ellipse">
+            <a:avLst/>
+          </a:prstGeom>
+          <a:solidFill>
+            <a:srgbClr val="2EC4B6"/>
+          </a:solidFill>
+          <a:ln>
+            <a:noFill/>
+          </a:ln>
+          <a:effectLst/>
+        </p:spPr>
+        <p:style>
+          <a:lnRef idx="1">
+            <a:schemeClr val="accent1"/>
+          </a:lnRef>
+          <a:fillRef idx="3">
+            <a:schemeClr val="accent1"/>
+          </a:fillRef>
+          <a:effectRef idx="0">
+            <a:schemeClr val="accent1"/>
+          </a:effectRef>
+          <a:fontRef idx="minor">
+            <a:schemeClr val="lt1"/>
+          </a:fontRef>
+        </p:style>
+        <p:txBody>
+          <a:bodyPr rtlCol="0" anchor="ctr" wrap="square" lIns="72000" tIns="18000" rIns="72000" bIns="18000"/>
+          <a:lstStyle/>
+          <a:p>
+            <a:pPr algn="ctr"/>
+          </a:p>
+        </p:txBody>
+      </p:sp>
+      <p:sp>
+        <p:nvSpPr>
+          <p:cNvPr id="70" name="Oval 69"/>
+          <p:cNvSpPr/>
+          <p:nvPr/>
+        </p:nvSpPr>
+        <p:spPr>
+          <a:xfrm>
+            <a:off x="2594248" y="3712976"/>
+            <a:ext cx="50400" cy="50400"/>
+          </a:xfrm>
+          <a:prstGeom prst="ellipse">
+            <a:avLst/>
+          </a:prstGeom>
+          <a:solidFill>
+            <a:srgbClr val="2EC4B6"/>
+          </a:solidFill>
+          <a:ln>
+            <a:noFill/>
+          </a:ln>
+          <a:effectLst/>
+        </p:spPr>
+        <p:style>
+          <a:lnRef idx="1">
+            <a:schemeClr val="accent1"/>
+          </a:lnRef>
+          <a:fillRef idx="3">
+            <a:schemeClr val="accent1"/>
+          </a:fillRef>
+          <a:effectRef idx="0">
+            <a:schemeClr val="accent1"/>
+          </a:effectRef>
+          <a:fontRef idx="minor">
+            <a:schemeClr val="lt1"/>
+          </a:fontRef>
+        </p:style>
+        <p:txBody>
+          <a:bodyPr rtlCol="0" anchor="ctr" wrap="square" lIns="72000" tIns="18000" rIns="72000" bIns="18000"/>
+          <a:lstStyle/>
+          <a:p>
+            <a:pPr algn="ctr"/>
+          </a:p>
+        </p:txBody>
+      </p:sp>
+      <p:sp>
+        <p:nvSpPr>
+          <p:cNvPr id="71" name="Oval 70"/>
+          <p:cNvSpPr/>
+          <p:nvPr/>
+        </p:nvSpPr>
+        <p:spPr>
+          <a:xfrm>
+            <a:off x="2998657" y="3717605"/>
+            <a:ext cx="50400" cy="50400"/>
+          </a:xfrm>
+          <a:prstGeom prst="ellipse">
+            <a:avLst/>
+          </a:prstGeom>
+          <a:solidFill>
+            <a:srgbClr val="2EC4B6"/>
+          </a:solidFill>
+          <a:ln>
+            <a:noFill/>
+          </a:ln>
+          <a:effectLst/>
+        </p:spPr>
+        <p:style>
+          <a:lnRef idx="1">
+            <a:schemeClr val="accent1"/>
+          </a:lnRef>
+          <a:fillRef idx="3">
+            <a:schemeClr val="accent1"/>
+          </a:fillRef>
+          <a:effectRef idx="0">
+            <a:schemeClr val="accent1"/>
+          </a:effectRef>
+          <a:fontRef idx="minor">
+            <a:schemeClr val="lt1"/>
+          </a:fontRef>
+        </p:style>
+        <p:txBody>
+          <a:bodyPr rtlCol="0" anchor="ctr" wrap="square" lIns="72000" tIns="18000" rIns="72000" bIns="18000"/>
+          <a:lstStyle/>
+          <a:p>
+            <a:pPr algn="ctr"/>
+          </a:p>
+        </p:txBody>
+      </p:sp>
+      <p:sp>
+        <p:nvSpPr>
+          <p:cNvPr id="72" name="Rounded Rectangle 71"/>
+          <p:cNvSpPr/>
+          <p:nvPr/>
+        </p:nvSpPr>
+        <p:spPr>
+          <a:xfrm>
+            <a:off x="3067057" y="3717605"/>
+            <a:ext cx="134153" cy="50400"/>
+          </a:xfrm>
+          <a:prstGeom prst="roundRect">
+            <a:avLst>
+              <a:gd name="adj" fmla="val 50000"/>
+            </a:avLst>
+          </a:prstGeom>
+          <a:solidFill>
+            <a:srgbClr val="C9CED9"/>
+          </a:solidFill>
+          <a:ln>
+            <a:noFill/>
+          </a:ln>
+          <a:effectLst/>
+        </p:spPr>
+        <p:style>
+          <a:lnRef idx="1">
+            <a:schemeClr val="accent1"/>
+          </a:lnRef>
+          <a:fillRef idx="3">
+            <a:schemeClr val="accent1"/>
+          </a:fillRef>
+          <a:effectRef idx="0">
+            <a:schemeClr val="accent1"/>
+          </a:effectRef>
+          <a:fontRef idx="minor">
+            <a:schemeClr val="lt1"/>
+          </a:fontRef>
+        </p:style>
+        <p:txBody>
+          <a:bodyPr rtlCol="0" anchor="ctr" wrap="square" lIns="72000" tIns="18000" rIns="72000" bIns="18000"/>
+          <a:lstStyle/>
+          <a:p>
+            <a:pPr algn="ctr"/>
+          </a:p>
+        </p:txBody>
+      </p:sp>
+      <p:sp>
+        <p:nvSpPr>
+          <p:cNvPr id="73" name="Oval 72"/>
+          <p:cNvSpPr/>
+          <p:nvPr/>
+        </p:nvSpPr>
+        <p:spPr>
+          <a:xfrm>
+            <a:off x="3645338" y="3751911"/>
+            <a:ext cx="50400" cy="50400"/>
+          </a:xfrm>
+          <a:prstGeom prst="ellipse">
+            <a:avLst/>
+          </a:prstGeom>
+          <a:solidFill>
+            <a:srgbClr val="2EC4B6"/>
+          </a:solidFill>
+          <a:ln>
+            <a:noFill/>
+          </a:ln>
+          <a:effectLst/>
+        </p:spPr>
+        <p:style>
+          <a:lnRef idx="1">
+            <a:schemeClr val="accent1"/>
+          </a:lnRef>
+          <a:fillRef idx="3">
+            <a:schemeClr val="accent1"/>
+          </a:fillRef>
+          <a:effectRef idx="0">
+            <a:schemeClr val="accent1"/>
+          </a:effectRef>
+          <a:fontRef idx="minor">
+            <a:schemeClr val="lt1"/>
+          </a:fontRef>
+        </p:style>
+        <p:txBody>
+          <a:bodyPr rtlCol="0" anchor="ctr" wrap="square" lIns="72000" tIns="18000" rIns="72000" bIns="18000"/>
+          <a:lstStyle/>
+          <a:p>
+            <a:pPr algn="ctr"/>
+          </a:p>
+        </p:txBody>
+      </p:sp>
+      <p:sp>
+        <p:nvSpPr>
+          <p:cNvPr id="74" name="Oval 73"/>
+          <p:cNvSpPr/>
+          <p:nvPr/>
+        </p:nvSpPr>
+        <p:spPr>
+          <a:xfrm>
+            <a:off x="2555673" y="3771592"/>
+            <a:ext cx="50400" cy="50400"/>
+          </a:xfrm>
+          <a:prstGeom prst="ellipse">
+            <a:avLst/>
+          </a:prstGeom>
+          <a:solidFill>
+            <a:srgbClr val="2EC4B6"/>
+          </a:solidFill>
+          <a:ln>
+            <a:noFill/>
+          </a:ln>
+          <a:effectLst/>
+        </p:spPr>
+        <p:style>
+          <a:lnRef idx="1">
+            <a:schemeClr val="accent1"/>
+          </a:lnRef>
+          <a:fillRef idx="3">
+            <a:schemeClr val="accent1"/>
+          </a:fillRef>
+          <a:effectRef idx="0">
+            <a:schemeClr val="accent1"/>
+          </a:effectRef>
+          <a:fontRef idx="minor">
+            <a:schemeClr val="lt1"/>
+          </a:fontRef>
+        </p:style>
+        <p:txBody>
+          <a:bodyPr rtlCol="0" anchor="ctr" wrap="square" lIns="72000" tIns="18000" rIns="72000" bIns="18000"/>
+          <a:lstStyle/>
+          <a:p>
+            <a:pPr algn="ctr"/>
+          </a:p>
+        </p:txBody>
+      </p:sp>
+      <p:sp>
+        <p:nvSpPr>
+          <p:cNvPr id="75" name="Oval 74"/>
+          <p:cNvSpPr/>
+          <p:nvPr/>
+        </p:nvSpPr>
+        <p:spPr>
+          <a:xfrm>
+            <a:off x="1639305" y="3773881"/>
+            <a:ext cx="50400" cy="50400"/>
+          </a:xfrm>
+          <a:prstGeom prst="ellipse">
+            <a:avLst/>
+          </a:prstGeom>
+          <a:solidFill>
+            <a:srgbClr val="2EC4B6"/>
+          </a:solidFill>
+          <a:ln>
+            <a:noFill/>
+          </a:ln>
+          <a:effectLst/>
+        </p:spPr>
+        <p:style>
+          <a:lnRef idx="1">
+            <a:schemeClr val="accent1"/>
+          </a:lnRef>
+          <a:fillRef idx="3">
+            <a:schemeClr val="accent1"/>
+          </a:fillRef>
+          <a:effectRef idx="0">
+            <a:schemeClr val="accent1"/>
+          </a:effectRef>
+          <a:fontRef idx="minor">
+            <a:schemeClr val="lt1"/>
+          </a:fontRef>
+        </p:style>
+        <p:txBody>
+          <a:bodyPr rtlCol="0" anchor="ctr" wrap="square" lIns="72000" tIns="18000" rIns="72000" bIns="18000"/>
+          <a:lstStyle/>
+          <a:p>
+            <a:pPr algn="ctr"/>
+          </a:p>
+        </p:txBody>
+      </p:sp>
+      <p:sp>
+        <p:nvSpPr>
+          <p:cNvPr id="76" name="Oval 75"/>
+          <p:cNvSpPr/>
+          <p:nvPr/>
+        </p:nvSpPr>
+        <p:spPr>
+          <a:xfrm>
+            <a:off x="2583371" y="3784508"/>
+            <a:ext cx="50400" cy="50400"/>
+          </a:xfrm>
+          <a:prstGeom prst="ellipse">
+            <a:avLst/>
+          </a:prstGeom>
+          <a:solidFill>
+            <a:srgbClr val="2EC4B6"/>
+          </a:solidFill>
+          <a:ln>
+            <a:noFill/>
+          </a:ln>
+          <a:effectLst/>
+        </p:spPr>
+        <p:style>
+          <a:lnRef idx="1">
+            <a:schemeClr val="accent1"/>
+          </a:lnRef>
+          <a:fillRef idx="3">
+            <a:schemeClr val="accent1"/>
+          </a:fillRef>
+          <a:effectRef idx="0">
+            <a:schemeClr val="accent1"/>
+          </a:effectRef>
+          <a:fontRef idx="minor">
+            <a:schemeClr val="lt1"/>
+          </a:fontRef>
+        </p:style>
+        <p:txBody>
+          <a:bodyPr rtlCol="0" anchor="ctr" wrap="square" lIns="72000" tIns="18000" rIns="72000" bIns="18000"/>
+          <a:lstStyle/>
+          <a:p>
+            <a:pPr algn="ctr"/>
+          </a:p>
+        </p:txBody>
+      </p:sp>
+      <p:sp>
+        <p:nvSpPr>
+          <p:cNvPr id="77" name="Rounded Rectangle 76"/>
+          <p:cNvSpPr/>
+          <p:nvPr/>
+        </p:nvSpPr>
+        <p:spPr>
+          <a:xfrm>
+            <a:off x="2651771" y="3784508"/>
+            <a:ext cx="111741" cy="50400"/>
+          </a:xfrm>
+          <a:prstGeom prst="roundRect">
+            <a:avLst>
+              <a:gd name="adj" fmla="val 50000"/>
+            </a:avLst>
+          </a:prstGeom>
+          <a:solidFill>
+            <a:srgbClr val="C9CED9"/>
+          </a:solidFill>
+          <a:ln>
+            <a:noFill/>
+          </a:ln>
+          <a:effectLst/>
+        </p:spPr>
+        <p:style>
+          <a:lnRef idx="1">
+            <a:schemeClr val="accent1"/>
+          </a:lnRef>
+          <a:fillRef idx="3">
+            <a:schemeClr val="accent1"/>
+          </a:fillRef>
+          <a:effectRef idx="0">
+            <a:schemeClr val="accent1"/>
+          </a:effectRef>
+          <a:fontRef idx="minor">
+            <a:schemeClr val="lt1"/>
+          </a:fontRef>
+        </p:style>
+        <p:txBody>
+          <a:bodyPr rtlCol="0" anchor="ctr" wrap="square" lIns="72000" tIns="18000" rIns="72000" bIns="18000"/>
+          <a:lstStyle/>
+          <a:p>
+            <a:pPr algn="ctr"/>
+          </a:p>
+        </p:txBody>
+      </p:sp>
+      <p:sp>
+        <p:nvSpPr>
+          <p:cNvPr id="78" name="Oval 77"/>
+          <p:cNvSpPr/>
+          <p:nvPr/>
+        </p:nvSpPr>
+        <p:spPr>
+          <a:xfrm>
+            <a:off x="1863983" y="3797095"/>
+            <a:ext cx="50400" cy="50400"/>
+          </a:xfrm>
+          <a:prstGeom prst="ellipse">
+            <a:avLst/>
+          </a:prstGeom>
+          <a:solidFill>
+            <a:srgbClr val="2EC4B6"/>
+          </a:solidFill>
+          <a:ln>
+            <a:noFill/>
+          </a:ln>
+          <a:effectLst/>
+        </p:spPr>
+        <p:style>
+          <a:lnRef idx="1">
+            <a:schemeClr val="accent1"/>
+          </a:lnRef>
+          <a:fillRef idx="3">
+            <a:schemeClr val="accent1"/>
+          </a:fillRef>
+          <a:effectRef idx="0">
+            <a:schemeClr val="accent1"/>
+          </a:effectRef>
+          <a:fontRef idx="minor">
+            <a:schemeClr val="lt1"/>
+          </a:fontRef>
+        </p:style>
+        <p:txBody>
+          <a:bodyPr rtlCol="0" anchor="ctr" wrap="square" lIns="72000" tIns="18000" rIns="72000" bIns="18000"/>
+          <a:lstStyle/>
+          <a:p>
+            <a:pPr algn="ctr"/>
+          </a:p>
+        </p:txBody>
+      </p:sp>
+      <p:sp>
+        <p:nvSpPr>
+          <p:cNvPr id="79" name="Oval 78"/>
+          <p:cNvSpPr/>
+          <p:nvPr/>
+        </p:nvSpPr>
+        <p:spPr>
+          <a:xfrm>
+            <a:off x="2890808" y="3799972"/>
+            <a:ext cx="50400" cy="50400"/>
+          </a:xfrm>
+          <a:prstGeom prst="ellipse">
+            <a:avLst/>
+          </a:prstGeom>
+          <a:solidFill>
+            <a:srgbClr val="2EC4B6"/>
+          </a:solidFill>
+          <a:ln>
+            <a:noFill/>
+          </a:ln>
+          <a:effectLst/>
+        </p:spPr>
+        <p:style>
+          <a:lnRef idx="1">
+            <a:schemeClr val="accent1"/>
+          </a:lnRef>
+          <a:fillRef idx="3">
+            <a:schemeClr val="accent1"/>
+          </a:fillRef>
+          <a:effectRef idx="0">
+            <a:schemeClr val="accent1"/>
+          </a:effectRef>
+          <a:fontRef idx="minor">
+            <a:schemeClr val="lt1"/>
+          </a:fontRef>
+        </p:style>
+        <p:txBody>
+          <a:bodyPr rtlCol="0" anchor="ctr" wrap="square" lIns="72000" tIns="18000" rIns="72000" bIns="18000"/>
+          <a:lstStyle/>
+          <a:p>
+            <a:pPr algn="ctr"/>
+          </a:p>
+        </p:txBody>
+      </p:sp>
+      <p:sp>
+        <p:nvSpPr>
+          <p:cNvPr id="80" name="Oval 79"/>
+          <p:cNvSpPr/>
+          <p:nvPr/>
+        </p:nvSpPr>
+        <p:spPr>
+          <a:xfrm>
+            <a:off x="2543617" y="3805064"/>
+            <a:ext cx="50400" cy="50400"/>
+          </a:xfrm>
+          <a:prstGeom prst="ellipse">
+            <a:avLst/>
+          </a:prstGeom>
+          <a:solidFill>
+            <a:srgbClr val="2EC4B6"/>
+          </a:solidFill>
+          <a:ln>
+            <a:noFill/>
+          </a:ln>
+          <a:effectLst/>
+        </p:spPr>
+        <p:style>
+          <a:lnRef idx="1">
+            <a:schemeClr val="accent1"/>
+          </a:lnRef>
+          <a:fillRef idx="3">
+            <a:schemeClr val="accent1"/>
+          </a:fillRef>
+          <a:effectRef idx="0">
+            <a:schemeClr val="accent1"/>
+          </a:effectRef>
+          <a:fontRef idx="minor">
+            <a:schemeClr val="lt1"/>
+          </a:fontRef>
+        </p:style>
+        <p:txBody>
+          <a:bodyPr rtlCol="0" anchor="ctr" wrap="square" lIns="72000" tIns="18000" rIns="72000" bIns="18000"/>
+          <a:lstStyle/>
+          <a:p>
+            <a:pPr algn="ctr"/>
+          </a:p>
+        </p:txBody>
+      </p:sp>
+      <p:sp>
+        <p:nvSpPr>
+          <p:cNvPr id="81" name="Oval 80"/>
+          <p:cNvSpPr/>
+          <p:nvPr/>
+        </p:nvSpPr>
+        <p:spPr>
+          <a:xfrm>
+            <a:off x="2340122" y="3809355"/>
+            <a:ext cx="50400" cy="50400"/>
+          </a:xfrm>
+          <a:prstGeom prst="ellipse">
+            <a:avLst/>
+          </a:prstGeom>
+          <a:solidFill>
+            <a:srgbClr val="2EC4B6"/>
+          </a:solidFill>
+          <a:ln>
+            <a:noFill/>
+          </a:ln>
+          <a:effectLst/>
+        </p:spPr>
+        <p:style>
+          <a:lnRef idx="1">
+            <a:schemeClr val="accent1"/>
+          </a:lnRef>
+          <a:fillRef idx="3">
+            <a:schemeClr val="accent1"/>
+          </a:fillRef>
+          <a:effectRef idx="0">
+            <a:schemeClr val="accent1"/>
+          </a:effectRef>
+          <a:fontRef idx="minor">
+            <a:schemeClr val="lt1"/>
+          </a:fontRef>
+        </p:style>
+        <p:txBody>
+          <a:bodyPr rtlCol="0" anchor="ctr" wrap="square" lIns="72000" tIns="18000" rIns="72000" bIns="18000"/>
+          <a:lstStyle/>
+          <a:p>
+            <a:pPr algn="ctr"/>
+          </a:p>
+        </p:txBody>
+      </p:sp>
+      <p:sp>
+        <p:nvSpPr>
+          <p:cNvPr id="82" name="Rounded Rectangle 81"/>
+          <p:cNvSpPr/>
+          <p:nvPr/>
+        </p:nvSpPr>
+        <p:spPr>
+          <a:xfrm>
+            <a:off x="2408522" y="3809355"/>
+            <a:ext cx="262059" cy="50400"/>
+          </a:xfrm>
+          <a:prstGeom prst="roundRect">
+            <a:avLst>
+              <a:gd name="adj" fmla="val 50000"/>
+            </a:avLst>
+          </a:prstGeom>
+          <a:solidFill>
+            <a:srgbClr val="C9CED9"/>
+          </a:solidFill>
+          <a:ln>
+            <a:noFill/>
+          </a:ln>
+          <a:effectLst/>
+        </p:spPr>
+        <p:style>
+          <a:lnRef idx="1">
+            <a:schemeClr val="accent1"/>
+          </a:lnRef>
+          <a:fillRef idx="3">
+            <a:schemeClr val="accent1"/>
+          </a:fillRef>
+          <a:effectRef idx="0">
+            <a:schemeClr val="accent1"/>
+          </a:effectRef>
+          <a:fontRef idx="minor">
+            <a:schemeClr val="lt1"/>
+          </a:fontRef>
+        </p:style>
+        <p:txBody>
+          <a:bodyPr rtlCol="0" anchor="ctr" wrap="square" lIns="72000" tIns="18000" rIns="72000" bIns="18000"/>
+          <a:lstStyle/>
+          <a:p>
+            <a:pPr algn="ctr"/>
+          </a:p>
+        </p:txBody>
+      </p:sp>
+      <p:sp>
+        <p:nvSpPr>
+          <p:cNvPr id="83" name="Oval 82"/>
+          <p:cNvSpPr/>
+          <p:nvPr/>
+        </p:nvSpPr>
+        <p:spPr>
+          <a:xfrm>
+            <a:off x="2402172" y="3818818"/>
+            <a:ext cx="50400" cy="50400"/>
+          </a:xfrm>
+          <a:prstGeom prst="ellipse">
+            <a:avLst/>
+          </a:prstGeom>
+          <a:solidFill>
+            <a:srgbClr val="2EC4B6"/>
+          </a:solidFill>
+          <a:ln>
+            <a:noFill/>
+          </a:ln>
+          <a:effectLst/>
+        </p:spPr>
+        <p:style>
+          <a:lnRef idx="1">
+            <a:schemeClr val="accent1"/>
+          </a:lnRef>
+          <a:fillRef idx="3">
+            <a:schemeClr val="accent1"/>
+          </a:fillRef>
+          <a:effectRef idx="0">
+            <a:schemeClr val="accent1"/>
+          </a:effectRef>
+          <a:fontRef idx="minor">
+            <a:schemeClr val="lt1"/>
+          </a:fontRef>
+        </p:style>
+        <p:txBody>
+          <a:bodyPr rtlCol="0" anchor="ctr" wrap="square" lIns="72000" tIns="18000" rIns="72000" bIns="18000"/>
+          <a:lstStyle/>
+          <a:p>
+            <a:pPr algn="ctr"/>
+          </a:p>
+        </p:txBody>
+      </p:sp>
+      <p:sp>
+        <p:nvSpPr>
+          <p:cNvPr id="84" name="Oval 83"/>
+          <p:cNvSpPr/>
+          <p:nvPr/>
+        </p:nvSpPr>
+        <p:spPr>
+          <a:xfrm>
+            <a:off x="1839109" y="3846002"/>
+            <a:ext cx="50400" cy="50400"/>
+          </a:xfrm>
+          <a:prstGeom prst="ellipse">
+            <a:avLst/>
+          </a:prstGeom>
+          <a:solidFill>
+            <a:srgbClr val="2EC4B6"/>
+          </a:solidFill>
+          <a:ln>
+            <a:noFill/>
+          </a:ln>
+          <a:effectLst/>
+        </p:spPr>
+        <p:style>
+          <a:lnRef idx="1">
+            <a:schemeClr val="accent1"/>
+          </a:lnRef>
+          <a:fillRef idx="3">
+            <a:schemeClr val="accent1"/>
+          </a:fillRef>
+          <a:effectRef idx="0">
+            <a:schemeClr val="accent1"/>
+          </a:effectRef>
+          <a:fontRef idx="minor">
+            <a:schemeClr val="lt1"/>
+          </a:fontRef>
+        </p:style>
+        <p:txBody>
+          <a:bodyPr rtlCol="0" anchor="ctr" wrap="square" lIns="72000" tIns="18000" rIns="72000" bIns="18000"/>
+          <a:lstStyle/>
+          <a:p>
+            <a:pPr algn="ctr"/>
+          </a:p>
+        </p:txBody>
+      </p:sp>
+      <p:sp>
+        <p:nvSpPr>
+          <p:cNvPr id="85" name="Oval 84"/>
+          <p:cNvSpPr/>
+          <p:nvPr/>
+        </p:nvSpPr>
+        <p:spPr>
+          <a:xfrm>
+            <a:off x="2937522" y="3880511"/>
+            <a:ext cx="50400" cy="50400"/>
+          </a:xfrm>
+          <a:prstGeom prst="ellipse">
+            <a:avLst/>
+          </a:prstGeom>
+          <a:solidFill>
+            <a:srgbClr val="2EC4B6"/>
+          </a:solidFill>
+          <a:ln>
+            <a:noFill/>
+          </a:ln>
+          <a:effectLst/>
+        </p:spPr>
+        <p:style>
+          <a:lnRef idx="1">
+            <a:schemeClr val="accent1"/>
+          </a:lnRef>
+          <a:fillRef idx="3">
+            <a:schemeClr val="accent1"/>
+          </a:fillRef>
+          <a:effectRef idx="0">
+            <a:schemeClr val="accent1"/>
+          </a:effectRef>
+          <a:fontRef idx="minor">
+            <a:schemeClr val="lt1"/>
+          </a:fontRef>
+        </p:style>
+        <p:txBody>
+          <a:bodyPr rtlCol="0" anchor="ctr" wrap="square" lIns="72000" tIns="18000" rIns="72000" bIns="18000"/>
+          <a:lstStyle/>
+          <a:p>
+            <a:pPr algn="ctr"/>
+          </a:p>
+        </p:txBody>
+      </p:sp>
+      <p:sp>
+        <p:nvSpPr>
+          <p:cNvPr id="86" name="Oval 85"/>
+          <p:cNvSpPr/>
+          <p:nvPr/>
+        </p:nvSpPr>
+        <p:spPr>
+          <a:xfrm>
+            <a:off x="1982577" y="3886708"/>
+            <a:ext cx="50400" cy="50400"/>
+          </a:xfrm>
+          <a:prstGeom prst="ellipse">
+            <a:avLst/>
+          </a:prstGeom>
+          <a:solidFill>
+            <a:srgbClr val="2EC4B6"/>
+          </a:solidFill>
+          <a:ln>
+            <a:noFill/>
+          </a:ln>
+          <a:effectLst/>
+        </p:spPr>
+        <p:style>
+          <a:lnRef idx="1">
+            <a:schemeClr val="accent1"/>
+          </a:lnRef>
+          <a:fillRef idx="3">
+            <a:schemeClr val="accent1"/>
+          </a:fillRef>
+          <a:effectRef idx="0">
+            <a:schemeClr val="accent1"/>
+          </a:effectRef>
+          <a:fontRef idx="minor">
+            <a:schemeClr val="lt1"/>
+          </a:fontRef>
+        </p:style>
+        <p:txBody>
+          <a:bodyPr rtlCol="0" anchor="ctr" wrap="square" lIns="72000" tIns="18000" rIns="72000" bIns="18000"/>
+          <a:lstStyle/>
+          <a:p>
+            <a:pPr algn="ctr"/>
+          </a:p>
+        </p:txBody>
+      </p:sp>
+      <p:sp>
+        <p:nvSpPr>
+          <p:cNvPr id="87" name="Rounded Rectangle 86"/>
+          <p:cNvSpPr/>
+          <p:nvPr/>
+        </p:nvSpPr>
+        <p:spPr>
+          <a:xfrm>
+            <a:off x="2050977" y="3886708"/>
+            <a:ext cx="193577" cy="50400"/>
+          </a:xfrm>
+          <a:prstGeom prst="roundRect">
+            <a:avLst>
+              <a:gd name="adj" fmla="val 50000"/>
+            </a:avLst>
+          </a:prstGeom>
+          <a:solidFill>
+            <a:srgbClr val="C9CED9"/>
+          </a:solidFill>
+          <a:ln>
+            <a:noFill/>
+          </a:ln>
+          <a:effectLst/>
+        </p:spPr>
+        <p:style>
+          <a:lnRef idx="1">
+            <a:schemeClr val="accent1"/>
+          </a:lnRef>
+          <a:fillRef idx="3">
+            <a:schemeClr val="accent1"/>
+          </a:fillRef>
+          <a:effectRef idx="0">
+            <a:schemeClr val="accent1"/>
+          </a:effectRef>
+          <a:fontRef idx="minor">
+            <a:schemeClr val="lt1"/>
+          </a:fontRef>
+        </p:style>
+        <p:txBody>
+          <a:bodyPr rtlCol="0" anchor="ctr" wrap="square" lIns="72000" tIns="18000" rIns="72000" bIns="18000"/>
+          <a:lstStyle/>
+          <a:p>
+            <a:pPr algn="ctr"/>
+          </a:p>
+        </p:txBody>
+      </p:sp>
+      <p:sp>
+        <p:nvSpPr>
+          <p:cNvPr id="88" name="Oval 87"/>
+          <p:cNvSpPr/>
+          <p:nvPr/>
+        </p:nvSpPr>
+        <p:spPr>
+          <a:xfrm>
+            <a:off x="2700917" y="3889355"/>
+            <a:ext cx="50400" cy="50400"/>
+          </a:xfrm>
+          <a:prstGeom prst="ellipse">
+            <a:avLst/>
+          </a:prstGeom>
+          <a:solidFill>
+            <a:srgbClr val="2EC4B6"/>
+          </a:solidFill>
+          <a:ln>
+            <a:noFill/>
+          </a:ln>
+          <a:effectLst/>
+        </p:spPr>
+        <p:style>
+          <a:lnRef idx="1">
+            <a:schemeClr val="accent1"/>
+          </a:lnRef>
+          <a:fillRef idx="3">
+            <a:schemeClr val="accent1"/>
+          </a:fillRef>
+          <a:effectRef idx="0">
+            <a:schemeClr val="accent1"/>
+          </a:effectRef>
+          <a:fontRef idx="minor">
+            <a:schemeClr val="lt1"/>
+          </a:fontRef>
+        </p:style>
+        <p:txBody>
+          <a:bodyPr rtlCol="0" anchor="ctr" wrap="square" lIns="72000" tIns="18000" rIns="72000" bIns="18000"/>
+          <a:lstStyle/>
+          <a:p>
+            <a:pPr algn="ctr"/>
+          </a:p>
+        </p:txBody>
+      </p:sp>
+      <p:sp>
+        <p:nvSpPr>
+          <p:cNvPr id="89" name="Oval 88"/>
+          <p:cNvSpPr/>
+          <p:nvPr/>
+        </p:nvSpPr>
+        <p:spPr>
+          <a:xfrm>
+            <a:off x="3183143" y="3891321"/>
+            <a:ext cx="50400" cy="50400"/>
+          </a:xfrm>
+          <a:prstGeom prst="ellipse">
+            <a:avLst/>
+          </a:prstGeom>
+          <a:solidFill>
+            <a:srgbClr val="2EC4B6"/>
+          </a:solidFill>
+          <a:ln>
+            <a:noFill/>
+          </a:ln>
+          <a:effectLst/>
+        </p:spPr>
+        <p:style>
+          <a:lnRef idx="1">
+            <a:schemeClr val="accent1"/>
+          </a:lnRef>
+          <a:fillRef idx="3">
+            <a:schemeClr val="accent1"/>
+          </a:fillRef>
+          <a:effectRef idx="0">
+            <a:schemeClr val="accent1"/>
+          </a:effectRef>
+          <a:fontRef idx="minor">
+            <a:schemeClr val="lt1"/>
+          </a:fontRef>
+        </p:style>
+        <p:txBody>
+          <a:bodyPr rtlCol="0" anchor="ctr" wrap="square" lIns="72000" tIns="18000" rIns="72000" bIns="18000"/>
+          <a:lstStyle/>
+          <a:p>
+            <a:pPr algn="ctr"/>
+          </a:p>
+        </p:txBody>
+      </p:sp>
+      <p:sp>
+        <p:nvSpPr>
+          <p:cNvPr id="90" name="Oval 89"/>
+          <p:cNvSpPr/>
+          <p:nvPr/>
+        </p:nvSpPr>
+        <p:spPr>
+          <a:xfrm>
+            <a:off x="2355345" y="3897848"/>
+            <a:ext cx="50400" cy="50400"/>
+          </a:xfrm>
+          <a:prstGeom prst="ellipse">
+            <a:avLst/>
+          </a:prstGeom>
+          <a:solidFill>
+            <a:srgbClr val="2EC4B6"/>
+          </a:solidFill>
+          <a:ln>
+            <a:noFill/>
+          </a:ln>
+          <a:effectLst/>
+        </p:spPr>
+        <p:style>
+          <a:lnRef idx="1">
+            <a:schemeClr val="accent1"/>
+          </a:lnRef>
+          <a:fillRef idx="3">
+            <a:schemeClr val="accent1"/>
+          </a:fillRef>
+          <a:effectRef idx="0">
+            <a:schemeClr val="accent1"/>
+          </a:effectRef>
+          <a:fontRef idx="minor">
+            <a:schemeClr val="lt1"/>
+          </a:fontRef>
+        </p:style>
+        <p:txBody>
+          <a:bodyPr rtlCol="0" anchor="ctr" wrap="square" lIns="72000" tIns="18000" rIns="72000" bIns="18000"/>
+          <a:lstStyle/>
+          <a:p>
+            <a:pPr algn="ctr"/>
+          </a:p>
+        </p:txBody>
+      </p:sp>
+      <p:sp>
+        <p:nvSpPr>
+          <p:cNvPr id="91" name="Oval 90"/>
+          <p:cNvSpPr/>
+          <p:nvPr/>
+        </p:nvSpPr>
+        <p:spPr>
+          <a:xfrm>
+            <a:off x="2807047" y="3902289"/>
+            <a:ext cx="50400" cy="50400"/>
+          </a:xfrm>
+          <a:prstGeom prst="ellipse">
+            <a:avLst/>
+          </a:prstGeom>
+          <a:solidFill>
+            <a:srgbClr val="2EC4B6"/>
+          </a:solidFill>
+          <a:ln>
+            <a:noFill/>
+          </a:ln>
+          <a:effectLst/>
+        </p:spPr>
+        <p:style>
+          <a:lnRef idx="1">
+            <a:schemeClr val="accent1"/>
+          </a:lnRef>
+          <a:fillRef idx="3">
+            <a:schemeClr val="accent1"/>
+          </a:fillRef>
+          <a:effectRef idx="0">
+            <a:schemeClr val="accent1"/>
+          </a:effectRef>
+          <a:fontRef idx="minor">
+            <a:schemeClr val="lt1"/>
+          </a:fontRef>
+        </p:style>
+        <p:txBody>
+          <a:bodyPr rtlCol="0" anchor="ctr" wrap="square" lIns="72000" tIns="18000" rIns="72000" bIns="18000"/>
+          <a:lstStyle/>
+          <a:p>
+            <a:pPr algn="ctr"/>
+          </a:p>
+        </p:txBody>
+      </p:sp>
+      <p:sp>
+        <p:nvSpPr>
+          <p:cNvPr id="92" name="Rounded Rectangle 91"/>
+          <p:cNvSpPr/>
+          <p:nvPr/>
+        </p:nvSpPr>
+        <p:spPr>
+          <a:xfrm>
+            <a:off x="2875447" y="3902289"/>
+            <a:ext cx="131749" cy="50400"/>
+          </a:xfrm>
+          <a:prstGeom prst="roundRect">
+            <a:avLst>
+              <a:gd name="adj" fmla="val 50000"/>
+            </a:avLst>
+          </a:prstGeom>
+          <a:solidFill>
+            <a:srgbClr val="C9CED9"/>
+          </a:solidFill>
+          <a:ln>
+            <a:noFill/>
+          </a:ln>
+          <a:effectLst/>
+        </p:spPr>
+        <p:style>
+          <a:lnRef idx="1">
+            <a:schemeClr val="accent1"/>
+          </a:lnRef>
+          <a:fillRef idx="3">
+            <a:schemeClr val="accent1"/>
+          </a:fillRef>
+          <a:effectRef idx="0">
+            <a:schemeClr val="accent1"/>
+          </a:effectRef>
+          <a:fontRef idx="minor">
+            <a:schemeClr val="lt1"/>
+          </a:fontRef>
+        </p:style>
+        <p:txBody>
+          <a:bodyPr rtlCol="0" anchor="ctr" wrap="square" lIns="72000" tIns="18000" rIns="72000" bIns="18000"/>
+          <a:lstStyle/>
+          <a:p>
+            <a:pPr algn="ctr"/>
+          </a:p>
+        </p:txBody>
+      </p:sp>
+      <p:sp>
+        <p:nvSpPr>
+          <p:cNvPr id="93" name="Oval 92"/>
+          <p:cNvSpPr/>
+          <p:nvPr/>
+        </p:nvSpPr>
+        <p:spPr>
+          <a:xfrm>
+            <a:off x="2302450" y="3909216"/>
+            <a:ext cx="50400" cy="50400"/>
+          </a:xfrm>
+          <a:prstGeom prst="ellipse">
+            <a:avLst/>
+          </a:prstGeom>
+          <a:solidFill>
+            <a:srgbClr val="2EC4B6"/>
+          </a:solidFill>
+          <a:ln>
+            <a:noFill/>
+          </a:ln>
+          <a:effectLst/>
+        </p:spPr>
+        <p:style>
+          <a:lnRef idx="1">
+            <a:schemeClr val="accent1"/>
+          </a:lnRef>
+          <a:fillRef idx="3">
+            <a:schemeClr val="accent1"/>
+          </a:fillRef>
+          <a:effectRef idx="0">
+            <a:schemeClr val="accent1"/>
+          </a:effectRef>
+          <a:fontRef idx="minor">
+            <a:schemeClr val="lt1"/>
+          </a:fontRef>
+        </p:style>
+        <p:txBody>
+          <a:bodyPr rtlCol="0" anchor="ctr" wrap="square" lIns="72000" tIns="18000" rIns="72000" bIns="18000"/>
+          <a:lstStyle/>
+          <a:p>
+            <a:pPr algn="ctr"/>
+          </a:p>
+        </p:txBody>
+      </p:sp>
+      <p:sp>
+        <p:nvSpPr>
+          <p:cNvPr id="94" name="Oval 93"/>
+          <p:cNvSpPr/>
+          <p:nvPr/>
+        </p:nvSpPr>
+        <p:spPr>
+          <a:xfrm>
+            <a:off x="2568206" y="3910493"/>
+            <a:ext cx="50400" cy="50400"/>
+          </a:xfrm>
+          <a:prstGeom prst="ellipse">
+            <a:avLst/>
+          </a:prstGeom>
+          <a:solidFill>
+            <a:srgbClr val="2EC4B6"/>
+          </a:solidFill>
+          <a:ln>
+            <a:noFill/>
+          </a:ln>
+          <a:effectLst/>
+        </p:spPr>
+        <p:style>
+          <a:lnRef idx="1">
+            <a:schemeClr val="accent1"/>
+          </a:lnRef>
+          <a:fillRef idx="3">
+            <a:schemeClr val="accent1"/>
+          </a:fillRef>
+          <a:effectRef idx="0">
+            <a:schemeClr val="accent1"/>
+          </a:effectRef>
+          <a:fontRef idx="minor">
+            <a:schemeClr val="lt1"/>
+          </a:fontRef>
+        </p:style>
+        <p:txBody>
+          <a:bodyPr rtlCol="0" anchor="ctr" wrap="square" lIns="72000" tIns="18000" rIns="72000" bIns="18000"/>
+          <a:lstStyle/>
+          <a:p>
+            <a:pPr algn="ctr"/>
+          </a:p>
+        </p:txBody>
+      </p:sp>
+      <p:sp>
+        <p:nvSpPr>
+          <p:cNvPr id="95" name="Oval 94"/>
+          <p:cNvSpPr/>
+          <p:nvPr/>
+        </p:nvSpPr>
+        <p:spPr>
+          <a:xfrm>
+            <a:off x="2683034" y="3921065"/>
+            <a:ext cx="50400" cy="50400"/>
+          </a:xfrm>
+          <a:prstGeom prst="ellipse">
+            <a:avLst/>
+          </a:prstGeom>
+          <a:solidFill>
+            <a:srgbClr val="2EC4B6"/>
+          </a:solidFill>
+          <a:ln>
+            <a:noFill/>
+          </a:ln>
+          <a:effectLst/>
+        </p:spPr>
+        <p:style>
+          <a:lnRef idx="1">
+            <a:schemeClr val="accent1"/>
+          </a:lnRef>
+          <a:fillRef idx="3">
+            <a:schemeClr val="accent1"/>
+          </a:fillRef>
+          <a:effectRef idx="0">
+            <a:schemeClr val="accent1"/>
+          </a:effectRef>
+          <a:fontRef idx="minor">
+            <a:schemeClr val="lt1"/>
+          </a:fontRef>
+        </p:style>
+        <p:txBody>
+          <a:bodyPr rtlCol="0" anchor="ctr" wrap="square" lIns="72000" tIns="18000" rIns="72000" bIns="18000"/>
+          <a:lstStyle/>
+          <a:p>
+            <a:pPr algn="ctr"/>
+          </a:p>
+        </p:txBody>
+      </p:sp>
+      <p:sp>
+        <p:nvSpPr>
+          <p:cNvPr id="96" name="Oval 95"/>
+          <p:cNvSpPr/>
+          <p:nvPr/>
+        </p:nvSpPr>
+        <p:spPr>
+          <a:xfrm>
+            <a:off x="2670786" y="3922781"/>
+            <a:ext cx="50400" cy="50400"/>
+          </a:xfrm>
+          <a:prstGeom prst="ellipse">
+            <a:avLst/>
+          </a:prstGeom>
+          <a:solidFill>
+            <a:srgbClr val="2EC4B6"/>
+          </a:solidFill>
+          <a:ln>
+            <a:noFill/>
+          </a:ln>
+          <a:effectLst/>
+        </p:spPr>
+        <p:style>
+          <a:lnRef idx="1">
+            <a:schemeClr val="accent1"/>
+          </a:lnRef>
+          <a:fillRef idx="3">
+            <a:schemeClr val="accent1"/>
+          </a:fillRef>
+          <a:effectRef idx="0">
+            <a:schemeClr val="accent1"/>
+          </a:effectRef>
+          <a:fontRef idx="minor">
+            <a:schemeClr val="lt1"/>
+          </a:fontRef>
+        </p:style>
+        <p:txBody>
+          <a:bodyPr rtlCol="0" anchor="ctr" wrap="square" lIns="72000" tIns="18000" rIns="72000" bIns="18000"/>
+          <a:lstStyle/>
+          <a:p>
+            <a:pPr algn="ctr"/>
+          </a:p>
+        </p:txBody>
+      </p:sp>
+      <p:sp>
+        <p:nvSpPr>
+          <p:cNvPr id="97" name="Rounded Rectangle 96"/>
+          <p:cNvSpPr/>
+          <p:nvPr/>
+        </p:nvSpPr>
+        <p:spPr>
+          <a:xfrm>
+            <a:off x="2739186" y="3922781"/>
+            <a:ext cx="195993" cy="50400"/>
+          </a:xfrm>
+          <a:prstGeom prst="roundRect">
+            <a:avLst>
+              <a:gd name="adj" fmla="val 50000"/>
+            </a:avLst>
+          </a:prstGeom>
+          <a:solidFill>
+            <a:srgbClr val="C9CED9"/>
+          </a:solidFill>
+          <a:ln>
+            <a:noFill/>
+          </a:ln>
+          <a:effectLst/>
+        </p:spPr>
+        <p:style>
+          <a:lnRef idx="1">
+            <a:schemeClr val="accent1"/>
+          </a:lnRef>
+          <a:fillRef idx="3">
+            <a:schemeClr val="accent1"/>
+          </a:fillRef>
+          <a:effectRef idx="0">
+            <a:schemeClr val="accent1"/>
+          </a:effectRef>
+          <a:fontRef idx="minor">
+            <a:schemeClr val="lt1"/>
+          </a:fontRef>
+        </p:style>
+        <p:txBody>
+          <a:bodyPr rtlCol="0" anchor="ctr" wrap="square" lIns="72000" tIns="18000" rIns="72000" bIns="18000"/>
+          <a:lstStyle/>
+          <a:p>
+            <a:pPr algn="ctr"/>
+          </a:p>
+        </p:txBody>
+      </p:sp>
+      <p:sp>
+        <p:nvSpPr>
+          <p:cNvPr id="98" name="Oval 97"/>
+          <p:cNvSpPr/>
+          <p:nvPr/>
+        </p:nvSpPr>
+        <p:spPr>
+          <a:xfrm>
+            <a:off x="2917810" y="3925757"/>
+            <a:ext cx="50400" cy="50400"/>
+          </a:xfrm>
+          <a:prstGeom prst="ellipse">
+            <a:avLst/>
+          </a:prstGeom>
+          <a:solidFill>
+            <a:srgbClr val="2EC4B6"/>
+          </a:solidFill>
+          <a:ln>
+            <a:noFill/>
+          </a:ln>
+          <a:effectLst/>
+        </p:spPr>
+        <p:style>
+          <a:lnRef idx="1">
+            <a:schemeClr val="accent1"/>
+          </a:lnRef>
+          <a:fillRef idx="3">
+            <a:schemeClr val="accent1"/>
+          </a:fillRef>
+          <a:effectRef idx="0">
+            <a:schemeClr val="accent1"/>
+          </a:effectRef>
+          <a:fontRef idx="minor">
+            <a:schemeClr val="lt1"/>
+          </a:fontRef>
+        </p:style>
+        <p:txBody>
+          <a:bodyPr rtlCol="0" anchor="ctr" wrap="square" lIns="72000" tIns="18000" rIns="72000" bIns="18000"/>
+          <a:lstStyle/>
+          <a:p>
+            <a:pPr algn="ctr"/>
+          </a:p>
+        </p:txBody>
+      </p:sp>
+      <p:sp>
+        <p:nvSpPr>
+          <p:cNvPr id="99" name="Oval 98"/>
+          <p:cNvSpPr/>
+          <p:nvPr/>
+        </p:nvSpPr>
+        <p:spPr>
+          <a:xfrm>
+            <a:off x="2859344" y="3932183"/>
+            <a:ext cx="50400" cy="50400"/>
+          </a:xfrm>
+          <a:prstGeom prst="ellipse">
+            <a:avLst/>
+          </a:prstGeom>
+          <a:solidFill>
+            <a:srgbClr val="2EC4B6"/>
+          </a:solidFill>
+          <a:ln>
+            <a:noFill/>
+          </a:ln>
+          <a:effectLst/>
+        </p:spPr>
+        <p:style>
+          <a:lnRef idx="1">
+            <a:schemeClr val="accent1"/>
+          </a:lnRef>
+          <a:fillRef idx="3">
+            <a:schemeClr val="accent1"/>
+          </a:fillRef>
+          <a:effectRef idx="0">
+            <a:schemeClr val="accent1"/>
+          </a:effectRef>
+          <a:fontRef idx="minor">
+            <a:schemeClr val="lt1"/>
+          </a:fontRef>
+        </p:style>
+        <p:txBody>
+          <a:bodyPr rtlCol="0" anchor="ctr" wrap="square" lIns="72000" tIns="18000" rIns="72000" bIns="18000"/>
+          <a:lstStyle/>
+          <a:p>
+            <a:pPr algn="ctr"/>
+          </a:p>
+        </p:txBody>
+      </p:sp>
+      <p:sp>
+        <p:nvSpPr>
+          <p:cNvPr id="100" name="Oval 99"/>
+          <p:cNvSpPr/>
+          <p:nvPr/>
+        </p:nvSpPr>
+        <p:spPr>
+          <a:xfrm>
+            <a:off x="3138954" y="3937598"/>
+            <a:ext cx="50400" cy="50400"/>
+          </a:xfrm>
+          <a:prstGeom prst="ellipse">
+            <a:avLst/>
+          </a:prstGeom>
+          <a:solidFill>
+            <a:srgbClr val="2EC4B6"/>
+          </a:solidFill>
+          <a:ln>
+            <a:noFill/>
+          </a:ln>
+          <a:effectLst/>
+        </p:spPr>
+        <p:style>
+          <a:lnRef idx="1">
+            <a:schemeClr val="accent1"/>
+          </a:lnRef>
+          <a:fillRef idx="3">
+            <a:schemeClr val="accent1"/>
+          </a:fillRef>
+          <a:effectRef idx="0">
+            <a:schemeClr val="accent1"/>
+          </a:effectRef>
+          <a:fontRef idx="minor">
+            <a:schemeClr val="lt1"/>
+          </a:fontRef>
+        </p:style>
+        <p:txBody>
+          <a:bodyPr rtlCol="0" anchor="ctr" wrap="square" lIns="72000" tIns="18000" rIns="72000" bIns="18000"/>
+          <a:lstStyle/>
+          <a:p>
+            <a:pPr algn="ctr"/>
+          </a:p>
+        </p:txBody>
+      </p:sp>
+      <p:sp>
+        <p:nvSpPr>
+          <p:cNvPr id="101" name="Oval 100"/>
+          <p:cNvSpPr/>
+          <p:nvPr/>
+        </p:nvSpPr>
+        <p:spPr>
+          <a:xfrm>
+            <a:off x="1674271" y="3938993"/>
+            <a:ext cx="50400" cy="50400"/>
+          </a:xfrm>
+          <a:prstGeom prst="ellipse">
+            <a:avLst/>
+          </a:prstGeom>
+          <a:solidFill>
+            <a:srgbClr val="2EC4B6"/>
+          </a:solidFill>
+          <a:ln>
+            <a:noFill/>
+          </a:ln>
+          <a:effectLst/>
+        </p:spPr>
+        <p:style>
+          <a:lnRef idx="1">
+            <a:schemeClr val="accent1"/>
+          </a:lnRef>
+          <a:fillRef idx="3">
+            <a:schemeClr val="accent1"/>
+          </a:fillRef>
+          <a:effectRef idx="0">
+            <a:schemeClr val="accent1"/>
+          </a:effectRef>
+          <a:fontRef idx="minor">
+            <a:schemeClr val="lt1"/>
+          </a:fontRef>
+        </p:style>
+        <p:txBody>
+          <a:bodyPr rtlCol="0" anchor="ctr" wrap="square" lIns="72000" tIns="18000" rIns="72000" bIns="18000"/>
+          <a:lstStyle/>
+          <a:p>
+            <a:pPr algn="ctr"/>
+          </a:p>
+        </p:txBody>
+      </p:sp>
+      <p:sp>
+        <p:nvSpPr>
+          <p:cNvPr id="102" name="Rounded Rectangle 101"/>
+          <p:cNvSpPr/>
+          <p:nvPr/>
+        </p:nvSpPr>
+        <p:spPr>
+          <a:xfrm>
+            <a:off x="1742671" y="3938993"/>
+            <a:ext cx="112380" cy="50400"/>
+          </a:xfrm>
+          <a:prstGeom prst="roundRect">
+            <a:avLst>
+              <a:gd name="adj" fmla="val 50000"/>
+            </a:avLst>
+          </a:prstGeom>
+          <a:solidFill>
+            <a:srgbClr val="C9CED9"/>
+          </a:solidFill>
+          <a:ln>
+            <a:noFill/>
+          </a:ln>
+          <a:effectLst/>
+        </p:spPr>
+        <p:style>
+          <a:lnRef idx="1">
+            <a:schemeClr val="accent1"/>
+          </a:lnRef>
+          <a:fillRef idx="3">
+            <a:schemeClr val="accent1"/>
+          </a:fillRef>
+          <a:effectRef idx="0">
+            <a:schemeClr val="accent1"/>
+          </a:effectRef>
+          <a:fontRef idx="minor">
+            <a:schemeClr val="lt1"/>
+          </a:fontRef>
+        </p:style>
+        <p:txBody>
+          <a:bodyPr rtlCol="0" anchor="ctr" wrap="square" lIns="72000" tIns="18000" rIns="72000" bIns="18000"/>
+          <a:lstStyle/>
+          <a:p>
+            <a:pPr algn="ctr"/>
+          </a:p>
+        </p:txBody>
+      </p:sp>
+      <p:sp>
+        <p:nvSpPr>
+          <p:cNvPr id="103" name="Oval 102"/>
+          <p:cNvSpPr/>
+          <p:nvPr/>
+        </p:nvSpPr>
+        <p:spPr>
+          <a:xfrm>
+            <a:off x="2177196" y="3939227"/>
+            <a:ext cx="50400" cy="50400"/>
+          </a:xfrm>
+          <a:prstGeom prst="ellipse">
+            <a:avLst/>
+          </a:prstGeom>
+          <a:solidFill>
+            <a:srgbClr val="2EC4B6"/>
+          </a:solidFill>
+          <a:ln>
+            <a:noFill/>
+          </a:ln>
+          <a:effectLst/>
+        </p:spPr>
+        <p:style>
+          <a:lnRef idx="1">
+            <a:schemeClr val="accent1"/>
+          </a:lnRef>
+          <a:fillRef idx="3">
+            <a:schemeClr val="accent1"/>
+          </a:fillRef>
+          <a:effectRef idx="0">
+            <a:schemeClr val="accent1"/>
+          </a:effectRef>
+          <a:fontRef idx="minor">
+            <a:schemeClr val="lt1"/>
+          </a:fontRef>
+        </p:style>
+        <p:txBody>
+          <a:bodyPr rtlCol="0" anchor="ctr" wrap="square" lIns="72000" tIns="18000" rIns="72000" bIns="18000"/>
+          <a:lstStyle/>
+          <a:p>
+            <a:pPr algn="ctr"/>
+          </a:p>
+        </p:txBody>
+      </p:sp>
+      <p:sp>
+        <p:nvSpPr>
+          <p:cNvPr id="104" name="Oval 103"/>
+          <p:cNvSpPr/>
+          <p:nvPr/>
+        </p:nvSpPr>
+        <p:spPr>
+          <a:xfrm>
+            <a:off x="2125735" y="3940361"/>
+            <a:ext cx="50400" cy="50400"/>
+          </a:xfrm>
+          <a:prstGeom prst="ellipse">
+            <a:avLst/>
+          </a:prstGeom>
+          <a:solidFill>
+            <a:srgbClr val="2EC4B6"/>
+          </a:solidFill>
+          <a:ln>
+            <a:noFill/>
+          </a:ln>
+          <a:effectLst/>
+        </p:spPr>
+        <p:style>
+          <a:lnRef idx="1">
+            <a:schemeClr val="accent1"/>
+          </a:lnRef>
+          <a:fillRef idx="3">
+            <a:schemeClr val="accent1"/>
+          </a:fillRef>
+          <a:effectRef idx="0">
+            <a:schemeClr val="accent1"/>
+          </a:effectRef>
+          <a:fontRef idx="minor">
+            <a:schemeClr val="lt1"/>
+          </a:fontRef>
+        </p:style>
+        <p:txBody>
+          <a:bodyPr rtlCol="0" anchor="ctr" wrap="square" lIns="72000" tIns="18000" rIns="72000" bIns="18000"/>
+          <a:lstStyle/>
+          <a:p>
+            <a:pPr algn="ctr"/>
+          </a:p>
+        </p:txBody>
+      </p:sp>
+      <p:sp>
+        <p:nvSpPr>
+          <p:cNvPr id="105" name="Oval 104"/>
+          <p:cNvSpPr/>
+          <p:nvPr/>
+        </p:nvSpPr>
+        <p:spPr>
+          <a:xfrm>
+            <a:off x="2493450" y="3940585"/>
+            <a:ext cx="50400" cy="50400"/>
+          </a:xfrm>
+          <a:prstGeom prst="ellipse">
+            <a:avLst/>
+          </a:prstGeom>
+          <a:solidFill>
+            <a:srgbClr val="2EC4B6"/>
+          </a:solidFill>
+          <a:ln>
+            <a:noFill/>
+          </a:ln>
+          <a:effectLst/>
+        </p:spPr>
+        <p:style>
+          <a:lnRef idx="1">
+            <a:schemeClr val="accent1"/>
+          </a:lnRef>
+          <a:fillRef idx="3">
+            <a:schemeClr val="accent1"/>
+          </a:fillRef>
+          <a:effectRef idx="0">
+            <a:schemeClr val="accent1"/>
+          </a:effectRef>
+          <a:fontRef idx="minor">
+            <a:schemeClr val="lt1"/>
+          </a:fontRef>
+        </p:style>
+        <p:txBody>
+          <a:bodyPr rtlCol="0" anchor="ctr" wrap="square" lIns="72000" tIns="18000" rIns="72000" bIns="18000"/>
+          <a:lstStyle/>
+          <a:p>
+            <a:pPr algn="ctr"/>
+          </a:p>
+        </p:txBody>
+      </p:sp>
+      <p:sp>
+        <p:nvSpPr>
+          <p:cNvPr id="106" name="Oval 105"/>
+          <p:cNvSpPr/>
+          <p:nvPr/>
+        </p:nvSpPr>
+        <p:spPr>
+          <a:xfrm>
+            <a:off x="1994463" y="3943482"/>
+            <a:ext cx="50400" cy="50400"/>
+          </a:xfrm>
+          <a:prstGeom prst="ellipse">
+            <a:avLst/>
+          </a:prstGeom>
+          <a:solidFill>
+            <a:srgbClr val="2EC4B6"/>
+          </a:solidFill>
+          <a:ln>
+            <a:noFill/>
+          </a:ln>
+          <a:effectLst/>
+        </p:spPr>
+        <p:style>
+          <a:lnRef idx="1">
+            <a:schemeClr val="accent1"/>
+          </a:lnRef>
+          <a:fillRef idx="3">
+            <a:schemeClr val="accent1"/>
+          </a:fillRef>
+          <a:effectRef idx="0">
+            <a:schemeClr val="accent1"/>
+          </a:effectRef>
+          <a:fontRef idx="minor">
+            <a:schemeClr val="lt1"/>
+          </a:fontRef>
+        </p:style>
+        <p:txBody>
+          <a:bodyPr rtlCol="0" anchor="ctr" wrap="square" lIns="72000" tIns="18000" rIns="72000" bIns="18000"/>
+          <a:lstStyle/>
+          <a:p>
+            <a:pPr algn="ctr"/>
+          </a:p>
+        </p:txBody>
+      </p:sp>
+      <p:sp>
+        <p:nvSpPr>
+          <p:cNvPr id="107" name="Rounded Rectangle 106"/>
+          <p:cNvSpPr/>
+          <p:nvPr/>
+        </p:nvSpPr>
+        <p:spPr>
+          <a:xfrm>
+            <a:off x="2062863" y="3943482"/>
+            <a:ext cx="193553" cy="50400"/>
+          </a:xfrm>
+          <a:prstGeom prst="roundRect">
+            <a:avLst>
+              <a:gd name="adj" fmla="val 50000"/>
+            </a:avLst>
+          </a:prstGeom>
+          <a:solidFill>
+            <a:srgbClr val="C9CED9"/>
+          </a:solidFill>
+          <a:ln>
+            <a:noFill/>
+          </a:ln>
+          <a:effectLst/>
+        </p:spPr>
+        <p:style>
+          <a:lnRef idx="1">
+            <a:schemeClr val="accent1"/>
+          </a:lnRef>
+          <a:fillRef idx="3">
+            <a:schemeClr val="accent1"/>
+          </a:fillRef>
+          <a:effectRef idx="0">
+            <a:schemeClr val="accent1"/>
+          </a:effectRef>
+          <a:fontRef idx="minor">
+            <a:schemeClr val="lt1"/>
+          </a:fontRef>
+        </p:style>
+        <p:txBody>
+          <a:bodyPr rtlCol="0" anchor="ctr" wrap="square" lIns="72000" tIns="18000" rIns="72000" bIns="18000"/>
+          <a:lstStyle/>
+          <a:p>
+            <a:pPr algn="ctr"/>
+          </a:p>
+        </p:txBody>
+      </p:sp>
+      <p:sp>
+        <p:nvSpPr>
+          <p:cNvPr id="108" name="Oval 107"/>
+          <p:cNvSpPr/>
+          <p:nvPr/>
+        </p:nvSpPr>
+        <p:spPr>
+          <a:xfrm>
+            <a:off x="2534627" y="3945834"/>
+            <a:ext cx="50400" cy="50400"/>
+          </a:xfrm>
+          <a:prstGeom prst="ellipse">
+            <a:avLst/>
+          </a:prstGeom>
+          <a:solidFill>
+            <a:srgbClr val="2EC4B6"/>
+          </a:solidFill>
+          <a:ln>
+            <a:noFill/>
+          </a:ln>
+          <a:effectLst/>
+        </p:spPr>
+        <p:style>
+          <a:lnRef idx="1">
+            <a:schemeClr val="accent1"/>
+          </a:lnRef>
+          <a:fillRef idx="3">
+            <a:schemeClr val="accent1"/>
+          </a:fillRef>
+          <a:effectRef idx="0">
+            <a:schemeClr val="accent1"/>
+          </a:effectRef>
+          <a:fontRef idx="minor">
+            <a:schemeClr val="lt1"/>
+          </a:fontRef>
+        </p:style>
+        <p:txBody>
+          <a:bodyPr rtlCol="0" anchor="ctr" wrap="square" lIns="72000" tIns="18000" rIns="72000" bIns="18000"/>
+          <a:lstStyle/>
+          <a:p>
+            <a:pPr algn="ctr"/>
+          </a:p>
+        </p:txBody>
+      </p:sp>
+      <p:sp>
+        <p:nvSpPr>
+          <p:cNvPr id="109" name="Oval 108"/>
+          <p:cNvSpPr/>
+          <p:nvPr/>
+        </p:nvSpPr>
+        <p:spPr>
+          <a:xfrm>
+            <a:off x="1718189" y="3947432"/>
+            <a:ext cx="50400" cy="50400"/>
+          </a:xfrm>
+          <a:prstGeom prst="ellipse">
+            <a:avLst/>
+          </a:prstGeom>
+          <a:solidFill>
+            <a:srgbClr val="2EC4B6"/>
+          </a:solidFill>
+          <a:ln>
+            <a:noFill/>
+          </a:ln>
+          <a:effectLst/>
+        </p:spPr>
+        <p:style>
+          <a:lnRef idx="1">
+            <a:schemeClr val="accent1"/>
+          </a:lnRef>
+          <a:fillRef idx="3">
+            <a:schemeClr val="accent1"/>
+          </a:fillRef>
+          <a:effectRef idx="0">
+            <a:schemeClr val="accent1"/>
+          </a:effectRef>
+          <a:fontRef idx="minor">
+            <a:schemeClr val="lt1"/>
+          </a:fontRef>
+        </p:style>
+        <p:txBody>
+          <a:bodyPr rtlCol="0" anchor="ctr" wrap="square" lIns="72000" tIns="18000" rIns="72000" bIns="18000"/>
+          <a:lstStyle/>
+          <a:p>
+            <a:pPr algn="ctr"/>
+          </a:p>
+        </p:txBody>
+      </p:sp>
+      <p:sp>
+        <p:nvSpPr>
+          <p:cNvPr id="110" name="Oval 109"/>
+          <p:cNvSpPr/>
+          <p:nvPr/>
+        </p:nvSpPr>
+        <p:spPr>
+          <a:xfrm>
+            <a:off x="2652575" y="3948553"/>
+            <a:ext cx="50400" cy="50400"/>
+          </a:xfrm>
+          <a:prstGeom prst="ellipse">
+            <a:avLst/>
+          </a:prstGeom>
+          <a:solidFill>
+            <a:srgbClr val="2EC4B6"/>
+          </a:solidFill>
+          <a:ln>
+            <a:noFill/>
+          </a:ln>
+          <a:effectLst/>
+        </p:spPr>
+        <p:style>
+          <a:lnRef idx="1">
+            <a:schemeClr val="accent1"/>
+          </a:lnRef>
+          <a:fillRef idx="3">
+            <a:schemeClr val="accent1"/>
+          </a:fillRef>
+          <a:effectRef idx="0">
+            <a:schemeClr val="accent1"/>
+          </a:effectRef>
+          <a:fontRef idx="minor">
+            <a:schemeClr val="lt1"/>
+          </a:fontRef>
+        </p:style>
+        <p:txBody>
+          <a:bodyPr rtlCol="0" anchor="ctr" wrap="square" lIns="72000" tIns="18000" rIns="72000" bIns="18000"/>
+          <a:lstStyle/>
+          <a:p>
+            <a:pPr algn="ctr"/>
+          </a:p>
+        </p:txBody>
+      </p:sp>
+      <p:sp>
+        <p:nvSpPr>
+          <p:cNvPr id="111" name="Oval 110"/>
+          <p:cNvSpPr/>
+          <p:nvPr/>
+        </p:nvSpPr>
+        <p:spPr>
+          <a:xfrm>
+            <a:off x="2888649" y="3948879"/>
+            <a:ext cx="50400" cy="50400"/>
+          </a:xfrm>
+          <a:prstGeom prst="ellipse">
+            <a:avLst/>
+          </a:prstGeom>
+          <a:solidFill>
+            <a:srgbClr val="2EC4B6"/>
+          </a:solidFill>
+          <a:ln>
+            <a:noFill/>
+          </a:ln>
+          <a:effectLst/>
+        </p:spPr>
+        <p:style>
+          <a:lnRef idx="1">
+            <a:schemeClr val="accent1"/>
+          </a:lnRef>
+          <a:fillRef idx="3">
+            <a:schemeClr val="accent1"/>
+          </a:fillRef>
+          <a:effectRef idx="0">
+            <a:schemeClr val="accent1"/>
+          </a:effectRef>
+          <a:fontRef idx="minor">
+            <a:schemeClr val="lt1"/>
+          </a:fontRef>
+        </p:style>
+        <p:txBody>
+          <a:bodyPr rtlCol="0" anchor="ctr" wrap="square" lIns="72000" tIns="18000" rIns="72000" bIns="18000"/>
+          <a:lstStyle/>
+          <a:p>
+            <a:pPr algn="ctr"/>
+          </a:p>
+        </p:txBody>
+      </p:sp>
+      <p:sp>
+        <p:nvSpPr>
+          <p:cNvPr id="112" name="Rounded Rectangle 111"/>
+          <p:cNvSpPr/>
+          <p:nvPr/>
+        </p:nvSpPr>
+        <p:spPr>
+          <a:xfrm>
+            <a:off x="2957049" y="3948879"/>
+            <a:ext cx="266517" cy="50400"/>
+          </a:xfrm>
+          <a:prstGeom prst="roundRect">
+            <a:avLst>
+              <a:gd name="adj" fmla="val 50000"/>
+            </a:avLst>
+          </a:prstGeom>
+          <a:solidFill>
+            <a:srgbClr val="C9CED9"/>
+          </a:solidFill>
+          <a:ln>
+            <a:noFill/>
+          </a:ln>
+          <a:effectLst/>
+        </p:spPr>
+        <p:style>
+          <a:lnRef idx="1">
+            <a:schemeClr val="accent1"/>
+          </a:lnRef>
+          <a:fillRef idx="3">
+            <a:schemeClr val="accent1"/>
+          </a:fillRef>
+          <a:effectRef idx="0">
+            <a:schemeClr val="accent1"/>
+          </a:effectRef>
+          <a:fontRef idx="minor">
+            <a:schemeClr val="lt1"/>
+          </a:fontRef>
+        </p:style>
+        <p:txBody>
+          <a:bodyPr rtlCol="0" anchor="ctr" wrap="square" lIns="72000" tIns="18000" rIns="72000" bIns="18000"/>
+          <a:lstStyle/>
+          <a:p>
+            <a:pPr algn="ctr"/>
+          </a:p>
+        </p:txBody>
+      </p:sp>
+      <p:sp>
+        <p:nvSpPr>
+          <p:cNvPr id="113" name="Oval 112"/>
+          <p:cNvSpPr/>
+          <p:nvPr/>
+        </p:nvSpPr>
+        <p:spPr>
+          <a:xfrm>
+            <a:off x="2315739" y="3949182"/>
+            <a:ext cx="50400" cy="50400"/>
+          </a:xfrm>
+          <a:prstGeom prst="ellipse">
+            <a:avLst/>
+          </a:prstGeom>
+          <a:solidFill>
+            <a:srgbClr val="2EC4B6"/>
+          </a:solidFill>
+          <a:ln>
+            <a:noFill/>
+          </a:ln>
+          <a:effectLst/>
+        </p:spPr>
+        <p:style>
+          <a:lnRef idx="1">
+            <a:schemeClr val="accent1"/>
+          </a:lnRef>
+          <a:fillRef idx="3">
+            <a:schemeClr val="accent1"/>
+          </a:fillRef>
+          <a:effectRef idx="0">
+            <a:schemeClr val="accent1"/>
+          </a:effectRef>
+          <a:fontRef idx="minor">
+            <a:schemeClr val="lt1"/>
+          </a:fontRef>
+        </p:style>
+        <p:txBody>
+          <a:bodyPr rtlCol="0" anchor="ctr" wrap="square" lIns="72000" tIns="18000" rIns="72000" bIns="18000"/>
+          <a:lstStyle/>
+          <a:p>
+            <a:pPr algn="ctr"/>
+          </a:p>
+        </p:txBody>
+      </p:sp>
+      <p:sp>
+        <p:nvSpPr>
+          <p:cNvPr id="114" name="Oval 113"/>
+          <p:cNvSpPr/>
+          <p:nvPr/>
+        </p:nvSpPr>
+        <p:spPr>
+          <a:xfrm>
+            <a:off x="2004961" y="3950196"/>
+            <a:ext cx="50400" cy="50400"/>
+          </a:xfrm>
+          <a:prstGeom prst="ellipse">
+            <a:avLst/>
+          </a:prstGeom>
+          <a:solidFill>
+            <a:srgbClr val="2EC4B6"/>
+          </a:solidFill>
+          <a:ln>
+            <a:noFill/>
+          </a:ln>
+          <a:effectLst/>
+        </p:spPr>
+        <p:style>
+          <a:lnRef idx="1">
+            <a:schemeClr val="accent1"/>
+          </a:lnRef>
+          <a:fillRef idx="3">
+            <a:schemeClr val="accent1"/>
+          </a:fillRef>
+          <a:effectRef idx="0">
+            <a:schemeClr val="accent1"/>
+          </a:effectRef>
+          <a:fontRef idx="minor">
+            <a:schemeClr val="lt1"/>
+          </a:fontRef>
+        </p:style>
+        <p:txBody>
+          <a:bodyPr rtlCol="0" anchor="ctr" wrap="square" lIns="72000" tIns="18000" rIns="72000" bIns="18000"/>
+          <a:lstStyle/>
+          <a:p>
+            <a:pPr algn="ctr"/>
+          </a:p>
+        </p:txBody>
+      </p:sp>
+      <p:sp>
+        <p:nvSpPr>
+          <p:cNvPr id="115" name="Oval 114"/>
+          <p:cNvSpPr/>
+          <p:nvPr/>
+        </p:nvSpPr>
+        <p:spPr>
+          <a:xfrm>
+            <a:off x="2637251" y="3950701"/>
+            <a:ext cx="50400" cy="50400"/>
+          </a:xfrm>
+          <a:prstGeom prst="ellipse">
+            <a:avLst/>
+          </a:prstGeom>
+          <a:solidFill>
+            <a:srgbClr val="2EC4B6"/>
+          </a:solidFill>
+          <a:ln>
+            <a:noFill/>
+          </a:ln>
+          <a:effectLst/>
+        </p:spPr>
+        <p:style>
+          <a:lnRef idx="1">
+            <a:schemeClr val="accent1"/>
+          </a:lnRef>
+          <a:fillRef idx="3">
+            <a:schemeClr val="accent1"/>
+          </a:fillRef>
+          <a:effectRef idx="0">
+            <a:schemeClr val="accent1"/>
+          </a:effectRef>
+          <a:fontRef idx="minor">
+            <a:schemeClr val="lt1"/>
+          </a:fontRef>
+        </p:style>
+        <p:txBody>
+          <a:bodyPr rtlCol="0" anchor="ctr" wrap="square" lIns="72000" tIns="18000" rIns="72000" bIns="18000"/>
+          <a:lstStyle/>
+          <a:p>
+            <a:pPr algn="ctr"/>
+          </a:p>
+        </p:txBody>
+      </p:sp>
+      <p:sp>
+        <p:nvSpPr>
+          <p:cNvPr id="116" name="Oval 115"/>
+          <p:cNvSpPr/>
+          <p:nvPr/>
+        </p:nvSpPr>
+        <p:spPr>
+          <a:xfrm>
+            <a:off x="2591900" y="3952372"/>
+            <a:ext cx="50400" cy="50400"/>
+          </a:xfrm>
+          <a:prstGeom prst="ellipse">
+            <a:avLst/>
+          </a:prstGeom>
+          <a:solidFill>
+            <a:srgbClr val="2EC4B6"/>
+          </a:solidFill>
+          <a:ln>
+            <a:noFill/>
+          </a:ln>
+          <a:effectLst/>
+        </p:spPr>
+        <p:style>
+          <a:lnRef idx="1">
+            <a:schemeClr val="accent1"/>
+          </a:lnRef>
+          <a:fillRef idx="3">
+            <a:schemeClr val="accent1"/>
+          </a:fillRef>
+          <a:effectRef idx="0">
+            <a:schemeClr val="accent1"/>
+          </a:effectRef>
+          <a:fontRef idx="minor">
+            <a:schemeClr val="lt1"/>
+          </a:fontRef>
+        </p:style>
+        <p:txBody>
+          <a:bodyPr rtlCol="0" anchor="ctr" wrap="square" lIns="72000" tIns="18000" rIns="72000" bIns="18000"/>
+          <a:lstStyle/>
+          <a:p>
+            <a:pPr algn="ctr"/>
+          </a:p>
+        </p:txBody>
+      </p:sp>
+      <p:sp>
+        <p:nvSpPr>
+          <p:cNvPr id="117" name="Rounded Rectangle 116"/>
+          <p:cNvSpPr/>
+          <p:nvPr/>
+        </p:nvSpPr>
+        <p:spPr>
+          <a:xfrm>
+            <a:off x="2660300" y="3952372"/>
+            <a:ext cx="247858" cy="50400"/>
+          </a:xfrm>
+          <a:prstGeom prst="roundRect">
+            <a:avLst>
+              <a:gd name="adj" fmla="val 50000"/>
+            </a:avLst>
+          </a:prstGeom>
+          <a:solidFill>
+            <a:srgbClr val="C9CED9"/>
+          </a:solidFill>
+          <a:ln>
+            <a:noFill/>
+          </a:ln>
+          <a:effectLst/>
+        </p:spPr>
+        <p:style>
+          <a:lnRef idx="1">
+            <a:schemeClr val="accent1"/>
+          </a:lnRef>
+          <a:fillRef idx="3">
+            <a:schemeClr val="accent1"/>
+          </a:fillRef>
+          <a:effectRef idx="0">
+            <a:schemeClr val="accent1"/>
+          </a:effectRef>
+          <a:fontRef idx="minor">
+            <a:schemeClr val="lt1"/>
+          </a:fontRef>
+        </p:style>
+        <p:txBody>
+          <a:bodyPr rtlCol="0" anchor="ctr" wrap="square" lIns="72000" tIns="18000" rIns="72000" bIns="18000"/>
+          <a:lstStyle/>
+          <a:p>
+            <a:pPr algn="ctr"/>
+          </a:p>
+        </p:txBody>
+      </p:sp>
+      <p:sp>
+        <p:nvSpPr>
+          <p:cNvPr id="118" name="Oval 117"/>
+          <p:cNvSpPr/>
+          <p:nvPr/>
+        </p:nvSpPr>
+        <p:spPr>
+          <a:xfrm>
+            <a:off x="2771783" y="3952799"/>
+            <a:ext cx="50400" cy="50400"/>
+          </a:xfrm>
+          <a:prstGeom prst="ellipse">
+            <a:avLst/>
+          </a:prstGeom>
+          <a:solidFill>
+            <a:srgbClr val="2EC4B6"/>
+          </a:solidFill>
+          <a:ln>
+            <a:noFill/>
+          </a:ln>
+          <a:effectLst/>
+        </p:spPr>
+        <p:style>
+          <a:lnRef idx="1">
+            <a:schemeClr val="accent1"/>
+          </a:lnRef>
+          <a:fillRef idx="3">
+            <a:schemeClr val="accent1"/>
+          </a:fillRef>
+          <a:effectRef idx="0">
+            <a:schemeClr val="accent1"/>
+          </a:effectRef>
+          <a:fontRef idx="minor">
+            <a:schemeClr val="lt1"/>
+          </a:fontRef>
+        </p:style>
+        <p:txBody>
+          <a:bodyPr rtlCol="0" anchor="ctr" wrap="square" lIns="72000" tIns="18000" rIns="72000" bIns="18000"/>
+          <a:lstStyle/>
+          <a:p>
+            <a:pPr algn="ctr"/>
+          </a:p>
+        </p:txBody>
+      </p:sp>
+      <p:sp>
+        <p:nvSpPr>
+          <p:cNvPr id="119" name="TextBox 118"/>
           <p:cNvSpPr txBox="1"/>
           <p:nvPr/>
         </p:nvSpPr>
         <p:spPr>
           <a:xfrm>
-            <a:off x="2430000" y="2995200"/>
-            <a:ext cx="180000" cy="259200"/>
+            <a:off x="792000" y="4194000"/>
+            <a:ext cx="3096000" cy="180000"/>
           </a:xfrm>
           <a:prstGeom prst="rect">
             <a:avLst/>
@@ -15380,7 +18550,7 @@
           <a:noFill/>
         </p:spPr>
         <p:txBody>
-          <a:bodyPr wrap="square" anchor="ctr" lIns="36000" rIns="36000" tIns="18000" bIns="18000">
+          <a:bodyPr wrap="square" anchor="t" lIns="36000" rIns="36000" tIns="18000" bIns="18000">
             <a:spAutoFit/>
           </a:bodyPr>
           <a:lstStyle/>
@@ -15394,7 +18564,7 @@
               </a:spcAft>
             </a:pPr>
             <a:r>
-              <a:rPr sz="800" b="1">
+              <a:rPr sz="800" b="0">
                 <a:solidFill>
                   <a:srgbClr val="7F7F7F"/>
                 </a:solidFill>
@@ -15402,29 +18572,113 @@
                 <a:ea typeface="メイリオ"/>
                 <a:cs typeface="メイリオ"/>
               </a:rPr>
-              <a:t>2</a:t>
-            </a:r>
-          </a:p>
-        </p:txBody>
-      </p:sp>
-      <p:sp>
-        <p:nvSpPr>
-          <p:cNvPr id="48" name="Rounded Rectangle 47"/>
+              <a:t>※実際の前後検索データをもとに分析（キーワードは案件ごと）</a:t>
+            </a:r>
+          </a:p>
+        </p:txBody>
+      </p:sp>
+      <p:sp>
+        <p:nvSpPr>
+          <p:cNvPr id="120" name="TextBox 119"/>
+          <p:cNvSpPr txBox="1"/>
+          <p:nvPr/>
+        </p:nvSpPr>
+        <p:spPr>
+          <a:xfrm>
+            <a:off x="900000" y="4392000"/>
+            <a:ext cx="2880000" cy="1080000"/>
+          </a:xfrm>
+          <a:prstGeom prst="rect">
+            <a:avLst/>
+          </a:prstGeom>
+          <a:noFill/>
+        </p:spPr>
+        <p:txBody>
+          <a:bodyPr wrap="square" anchor="t" lIns="36000" rIns="36000" tIns="18000" bIns="18000">
+            <a:spAutoFit/>
+          </a:bodyPr>
+          <a:lstStyle/>
+          <a:p>
+            <a:pPr algn="l">
+              <a:lnSpc>
+                <a:spcPct val="110000"/>
+              </a:lnSpc>
+              <a:spcAft>
+                <a:spcPts val="400"/>
+              </a:spcAft>
+            </a:pPr>
+            <a:r>
+              <a:rPr sz="1050" b="0">
+                <a:solidFill>
+                  <a:srgbClr val="333333"/>
+                </a:solidFill>
+                <a:latin typeface="メイリオ"/>
+                <a:ea typeface="メイリオ"/>
+                <a:cs typeface="メイリオ"/>
+              </a:rPr>
+              <a:t>検討前に何を検索しているか</a:t>
+            </a:r>
+          </a:p>
+          <a:p>
+            <a:pPr algn="l">
+              <a:lnSpc>
+                <a:spcPct val="110000"/>
+              </a:lnSpc>
+              <a:spcAft>
+                <a:spcPts val="400"/>
+              </a:spcAft>
+            </a:pPr>
+            <a:r>
+              <a:rPr sz="1050" b="0">
+                <a:solidFill>
+                  <a:srgbClr val="333333"/>
+                </a:solidFill>
+                <a:latin typeface="メイリオ"/>
+                <a:ea typeface="メイリオ"/>
+                <a:cs typeface="メイリオ"/>
+              </a:rPr>
+              <a:t>検討後に何を検索しているか</a:t>
+            </a:r>
+          </a:p>
+          <a:p>
+            <a:pPr algn="l">
+              <a:lnSpc>
+                <a:spcPct val="110000"/>
+              </a:lnSpc>
+              <a:spcAft>
+                <a:spcPts val="400"/>
+              </a:spcAft>
+            </a:pPr>
+            <a:r>
+              <a:rPr sz="1050" b="0">
+                <a:solidFill>
+                  <a:srgbClr val="333333"/>
+                </a:solidFill>
+                <a:latin typeface="メイリオ"/>
+                <a:ea typeface="メイリオ"/>
+                <a:cs typeface="メイリオ"/>
+              </a:rPr>
+              <a:t>ユーザーの不安・比較軸・関心テーマを把握</a:t>
+            </a:r>
+          </a:p>
+        </p:txBody>
+      </p:sp>
+      <p:sp>
+        <p:nvSpPr>
+          <p:cNvPr id="121" name="Rectangle 120"/>
           <p:cNvSpPr/>
           <p:nvPr/>
         </p:nvSpPr>
         <p:spPr>
           <a:xfrm>
-            <a:off x="2610000" y="3072960"/>
-            <a:ext cx="489599" cy="103679"/>
-          </a:xfrm>
-          <a:prstGeom prst="roundRect">
-            <a:avLst>
-              <a:gd name="adj" fmla="val 50000"/>
-            </a:avLst>
-          </a:prstGeom>
-          <a:solidFill>
-            <a:srgbClr val="D9D9D9"/>
+            <a:off x="4284000" y="2376000"/>
+            <a:ext cx="1260000" cy="270000"/>
+          </a:xfrm>
+          <a:prstGeom prst="rect">
+            <a:avLst/>
+          </a:prstGeom>
+          <a:solidFill>
+            <a:srgbClr val="E4E8F6"/>
           </a:solidFill>
           <a:ln>
             <a:noFill/>
@@ -15447,111 +18701,6 @@
         </p:style>
         <p:txBody>
           <a:bodyPr rtlCol="0" anchor="ctr" wrap="square" lIns="72000" tIns="18000" rIns="72000" bIns="18000"/>
-          <a:lstStyle/>
-          <a:p>
-            <a:pPr algn="ctr"/>
-          </a:p>
-        </p:txBody>
-      </p:sp>
-      <p:sp>
-        <p:nvSpPr>
-          <p:cNvPr id="49" name="Rectangle 48"/>
-          <p:cNvSpPr/>
-          <p:nvPr/>
-        </p:nvSpPr>
-        <p:spPr>
-          <a:xfrm>
-            <a:off x="3366000" y="3078144"/>
-            <a:ext cx="374400" cy="93312"/>
-          </a:xfrm>
-          <a:prstGeom prst="rect">
-            <a:avLst/>
-          </a:prstGeom>
-          <a:solidFill>
-            <a:srgbClr val="1F285A"/>
-          </a:solidFill>
-          <a:ln>
-            <a:noFill/>
-          </a:ln>
-          <a:effectLst/>
-        </p:spPr>
-        <p:style>
-          <a:lnRef idx="1">
-            <a:schemeClr val="accent1"/>
-          </a:lnRef>
-          <a:fillRef idx="3">
-            <a:schemeClr val="accent1"/>
-          </a:fillRef>
-          <a:effectRef idx="0">
-            <a:schemeClr val="accent1"/>
-          </a:effectRef>
-          <a:fontRef idx="minor">
-            <a:schemeClr val="lt1"/>
-          </a:fontRef>
-        </p:style>
-        <p:txBody>
-          <a:bodyPr rtlCol="0" anchor="ctr" wrap="square" lIns="72000" tIns="18000" rIns="72000" bIns="18000"/>
-          <a:lstStyle/>
-          <a:p>
-            <a:pPr algn="ctr"/>
-          </a:p>
-        </p:txBody>
-      </p:sp>
-      <p:cxnSp>
-        <p:nvCxnSpPr>
-          <p:cNvPr id="50" name="Connector 49"/>
-          <p:cNvCxnSpPr/>
-          <p:nvPr/>
-        </p:nvCxnSpPr>
-        <p:spPr>
-          <a:xfrm>
-            <a:off x="2448000" y="3254399"/>
-            <a:ext cx="1404000" cy="0"/>
-          </a:xfrm>
-          <a:prstGeom prst="line">
-            <a:avLst/>
-          </a:prstGeom>
-          <a:ln w="6350">
-            <a:solidFill>
-              <a:srgbClr val="F2F2F2"/>
-            </a:solidFill>
-          </a:ln>
-        </p:spPr>
-        <p:style>
-          <a:lnRef idx="2">
-            <a:schemeClr val="accent1"/>
-          </a:lnRef>
-          <a:fillRef idx="0">
-            <a:schemeClr val="accent1"/>
-          </a:fillRef>
-          <a:effectRef idx="0">
-            <a:schemeClr val="accent1"/>
-          </a:effectRef>
-          <a:fontRef idx="minor">
-            <a:schemeClr val="tx1"/>
-          </a:fontRef>
-        </p:style>
-      </p:cxnSp>
-      <p:sp>
-        <p:nvSpPr>
-          <p:cNvPr id="51" name="TextBox 50"/>
-          <p:cNvSpPr txBox="1"/>
-          <p:nvPr/>
-        </p:nvSpPr>
-        <p:spPr>
-          <a:xfrm>
-            <a:off x="2430000" y="3254399"/>
-            <a:ext cx="180000" cy="259200"/>
-          </a:xfrm>
-          <a:prstGeom prst="rect">
-            <a:avLst/>
-          </a:prstGeom>
-          <a:noFill/>
-        </p:spPr>
-        <p:txBody>
-          <a:bodyPr wrap="square" anchor="ctr" lIns="36000" rIns="36000" tIns="18000" bIns="18000">
-            <a:spAutoFit/>
-          </a:bodyPr>
           <a:lstStyle/>
           <a:p>
             <a:pPr algn="ctr">
@@ -15563,37 +18712,35 @@
               </a:spcAft>
             </a:pPr>
             <a:r>
-              <a:rPr sz="800" b="1">
-                <a:solidFill>
-                  <a:srgbClr val="7F7F7F"/>
+              <a:rPr sz="1050" b="1">
+                <a:solidFill>
+                  <a:srgbClr val="1F285A"/>
                 </a:solidFill>
                 <a:latin typeface="メイリオ"/>
                 <a:ea typeface="メイリオ"/>
                 <a:cs typeface="メイリオ"/>
               </a:rPr>
-              <a:t>3</a:t>
-            </a:r>
-          </a:p>
-        </p:txBody>
-      </p:sp>
-      <p:sp>
-        <p:nvSpPr>
-          <p:cNvPr id="52" name="Rounded Rectangle 51"/>
+              <a:t>検索データ</a:t>
+            </a:r>
+          </a:p>
+        </p:txBody>
+      </p:sp>
+      <p:sp>
+        <p:nvSpPr>
+          <p:cNvPr id="122" name="Rectangle 121"/>
           <p:cNvSpPr/>
           <p:nvPr/>
         </p:nvSpPr>
         <p:spPr>
           <a:xfrm>
-            <a:off x="2610000" y="3332159"/>
-            <a:ext cx="302399" cy="103679"/>
-          </a:xfrm>
-          <a:prstGeom prst="roundRect">
-            <a:avLst>
-              <a:gd name="adj" fmla="val 50000"/>
-            </a:avLst>
-          </a:prstGeom>
-          <a:solidFill>
-            <a:srgbClr val="D9D9D9"/>
+            <a:off x="6120000" y="2376000"/>
+            <a:ext cx="1260000" cy="270000"/>
+          </a:xfrm>
+          <a:prstGeom prst="rect">
+            <a:avLst/>
+          </a:prstGeom>
+          <a:solidFill>
+            <a:srgbClr val="E8F8EE"/>
           </a:solidFill>
           <a:ln>
             <a:noFill/>
@@ -15616,111 +18763,6 @@
         </p:style>
         <p:txBody>
           <a:bodyPr rtlCol="0" anchor="ctr" wrap="square" lIns="72000" tIns="18000" rIns="72000" bIns="18000"/>
-          <a:lstStyle/>
-          <a:p>
-            <a:pPr algn="ctr"/>
-          </a:p>
-        </p:txBody>
-      </p:sp>
-      <p:sp>
-        <p:nvSpPr>
-          <p:cNvPr id="53" name="Rectangle 52"/>
-          <p:cNvSpPr/>
-          <p:nvPr/>
-        </p:nvSpPr>
-        <p:spPr>
-          <a:xfrm>
-            <a:off x="3366000" y="3337343"/>
-            <a:ext cx="280800" cy="93312"/>
-          </a:xfrm>
-          <a:prstGeom prst="rect">
-            <a:avLst/>
-          </a:prstGeom>
-          <a:solidFill>
-            <a:srgbClr val="1F285A"/>
-          </a:solidFill>
-          <a:ln>
-            <a:noFill/>
-          </a:ln>
-          <a:effectLst/>
-        </p:spPr>
-        <p:style>
-          <a:lnRef idx="1">
-            <a:schemeClr val="accent1"/>
-          </a:lnRef>
-          <a:fillRef idx="3">
-            <a:schemeClr val="accent1"/>
-          </a:fillRef>
-          <a:effectRef idx="0">
-            <a:schemeClr val="accent1"/>
-          </a:effectRef>
-          <a:fontRef idx="minor">
-            <a:schemeClr val="lt1"/>
-          </a:fontRef>
-        </p:style>
-        <p:txBody>
-          <a:bodyPr rtlCol="0" anchor="ctr" wrap="square" lIns="72000" tIns="18000" rIns="72000" bIns="18000"/>
-          <a:lstStyle/>
-          <a:p>
-            <a:pPr algn="ctr"/>
-          </a:p>
-        </p:txBody>
-      </p:sp>
-      <p:cxnSp>
-        <p:nvCxnSpPr>
-          <p:cNvPr id="54" name="Connector 53"/>
-          <p:cNvCxnSpPr/>
-          <p:nvPr/>
-        </p:nvCxnSpPr>
-        <p:spPr>
-          <a:xfrm>
-            <a:off x="2448000" y="3513600"/>
-            <a:ext cx="1404000" cy="0"/>
-          </a:xfrm>
-          <a:prstGeom prst="line">
-            <a:avLst/>
-          </a:prstGeom>
-          <a:ln w="6350">
-            <a:solidFill>
-              <a:srgbClr val="F2F2F2"/>
-            </a:solidFill>
-          </a:ln>
-        </p:spPr>
-        <p:style>
-          <a:lnRef idx="2">
-            <a:schemeClr val="accent1"/>
-          </a:lnRef>
-          <a:fillRef idx="0">
-            <a:schemeClr val="accent1"/>
-          </a:fillRef>
-          <a:effectRef idx="0">
-            <a:schemeClr val="accent1"/>
-          </a:effectRef>
-          <a:fontRef idx="minor">
-            <a:schemeClr val="tx1"/>
-          </a:fontRef>
-        </p:style>
-      </p:cxnSp>
-      <p:sp>
-        <p:nvSpPr>
-          <p:cNvPr id="55" name="TextBox 54"/>
-          <p:cNvSpPr txBox="1"/>
-          <p:nvPr/>
-        </p:nvSpPr>
-        <p:spPr>
-          <a:xfrm>
-            <a:off x="2430000" y="3513600"/>
-            <a:ext cx="180000" cy="259200"/>
-          </a:xfrm>
-          <a:prstGeom prst="rect">
-            <a:avLst/>
-          </a:prstGeom>
-          <a:noFill/>
-        </p:spPr>
-        <p:txBody>
-          <a:bodyPr wrap="square" anchor="ctr" lIns="36000" rIns="36000" tIns="18000" bIns="18000">
-            <a:spAutoFit/>
-          </a:bodyPr>
           <a:lstStyle/>
           <a:p>
             <a:pPr algn="ctr">
@@ -15732,40 +18774,40 @@
               </a:spcAft>
             </a:pPr>
             <a:r>
-              <a:rPr sz="800" b="1">
-                <a:solidFill>
-                  <a:srgbClr val="7F7F7F"/>
+              <a:rPr sz="1050" b="1">
+                <a:solidFill>
+                  <a:srgbClr val="0B7A3B"/>
                 </a:solidFill>
                 <a:latin typeface="メイリオ"/>
                 <a:ea typeface="メイリオ"/>
                 <a:cs typeface="メイリオ"/>
               </a:rPr>
-              <a:t>4</a:t>
-            </a:r>
-          </a:p>
-        </p:txBody>
-      </p:sp>
-      <p:sp>
-        <p:nvSpPr>
-          <p:cNvPr id="56" name="Rounded Rectangle 55"/>
+              <a:t>LINE配信</a:t>
+            </a:r>
+          </a:p>
+        </p:txBody>
+      </p:sp>
+      <p:sp>
+        <p:nvSpPr>
+          <p:cNvPr id="123" name="Rectangle 122"/>
           <p:cNvSpPr/>
           <p:nvPr/>
         </p:nvSpPr>
         <p:spPr>
           <a:xfrm>
-            <a:off x="2610000" y="3591359"/>
-            <a:ext cx="431999" cy="103679"/>
-          </a:xfrm>
-          <a:prstGeom prst="roundRect">
-            <a:avLst>
-              <a:gd name="adj" fmla="val 50000"/>
-            </a:avLst>
-          </a:prstGeom>
-          <a:solidFill>
-            <a:srgbClr val="D9D9D9"/>
-          </a:solidFill>
-          <a:ln>
-            <a:noFill/>
+            <a:off x="4284000" y="2808000"/>
+            <a:ext cx="1260000" cy="396000"/>
+          </a:xfrm>
+          <a:prstGeom prst="rect">
+            <a:avLst/>
+          </a:prstGeom>
+          <a:solidFill>
+            <a:srgbClr val="FFFFFF"/>
+          </a:solidFill>
+          <a:ln w="12700">
+            <a:solidFill>
+              <a:srgbClr val="1F285A"/>
+            </a:solidFill>
           </a:ln>
           <a:effectLst/>
         </p:spPr>
@@ -15785,111 +18827,6 @@
         </p:style>
         <p:txBody>
           <a:bodyPr rtlCol="0" anchor="ctr" wrap="square" lIns="72000" tIns="18000" rIns="72000" bIns="18000"/>
-          <a:lstStyle/>
-          <a:p>
-            <a:pPr algn="ctr"/>
-          </a:p>
-        </p:txBody>
-      </p:sp>
-      <p:sp>
-        <p:nvSpPr>
-          <p:cNvPr id="57" name="Rectangle 56"/>
-          <p:cNvSpPr/>
-          <p:nvPr/>
-        </p:nvSpPr>
-        <p:spPr>
-          <a:xfrm>
-            <a:off x="3366000" y="3596543"/>
-            <a:ext cx="210600" cy="93312"/>
-          </a:xfrm>
-          <a:prstGeom prst="rect">
-            <a:avLst/>
-          </a:prstGeom>
-          <a:solidFill>
-            <a:srgbClr val="1F285A"/>
-          </a:solidFill>
-          <a:ln>
-            <a:noFill/>
-          </a:ln>
-          <a:effectLst/>
-        </p:spPr>
-        <p:style>
-          <a:lnRef idx="1">
-            <a:schemeClr val="accent1"/>
-          </a:lnRef>
-          <a:fillRef idx="3">
-            <a:schemeClr val="accent1"/>
-          </a:fillRef>
-          <a:effectRef idx="0">
-            <a:schemeClr val="accent1"/>
-          </a:effectRef>
-          <a:fontRef idx="minor">
-            <a:schemeClr val="lt1"/>
-          </a:fontRef>
-        </p:style>
-        <p:txBody>
-          <a:bodyPr rtlCol="0" anchor="ctr" wrap="square" lIns="72000" tIns="18000" rIns="72000" bIns="18000"/>
-          <a:lstStyle/>
-          <a:p>
-            <a:pPr algn="ctr"/>
-          </a:p>
-        </p:txBody>
-      </p:sp>
-      <p:cxnSp>
-        <p:nvCxnSpPr>
-          <p:cNvPr id="58" name="Connector 57"/>
-          <p:cNvCxnSpPr/>
-          <p:nvPr/>
-        </p:nvCxnSpPr>
-        <p:spPr>
-          <a:xfrm>
-            <a:off x="2448000" y="3772800"/>
-            <a:ext cx="1404000" cy="0"/>
-          </a:xfrm>
-          <a:prstGeom prst="line">
-            <a:avLst/>
-          </a:prstGeom>
-          <a:ln w="6350">
-            <a:solidFill>
-              <a:srgbClr val="F2F2F2"/>
-            </a:solidFill>
-          </a:ln>
-        </p:spPr>
-        <p:style>
-          <a:lnRef idx="2">
-            <a:schemeClr val="accent1"/>
-          </a:lnRef>
-          <a:fillRef idx="0">
-            <a:schemeClr val="accent1"/>
-          </a:fillRef>
-          <a:effectRef idx="0">
-            <a:schemeClr val="accent1"/>
-          </a:effectRef>
-          <a:fontRef idx="minor">
-            <a:schemeClr val="tx1"/>
-          </a:fontRef>
-        </p:style>
-      </p:cxnSp>
-      <p:sp>
-        <p:nvSpPr>
-          <p:cNvPr id="59" name="TextBox 58"/>
-          <p:cNvSpPr txBox="1"/>
-          <p:nvPr/>
-        </p:nvSpPr>
-        <p:spPr>
-          <a:xfrm>
-            <a:off x="2430000" y="3772800"/>
-            <a:ext cx="180000" cy="259200"/>
-          </a:xfrm>
-          <a:prstGeom prst="rect">
-            <a:avLst/>
-          </a:prstGeom>
-          <a:noFill/>
-        </p:spPr>
-        <p:txBody>
-          <a:bodyPr wrap="square" anchor="ctr" lIns="36000" rIns="36000" tIns="18000" bIns="18000">
-            <a:spAutoFit/>
-          </a:bodyPr>
           <a:lstStyle/>
           <a:p>
             <a:pPr algn="ctr">
@@ -15901,37 +18838,73 @@
               </a:spcAft>
             </a:pPr>
             <a:r>
-              <a:rPr sz="800" b="1">
-                <a:solidFill>
-                  <a:srgbClr val="7F7F7F"/>
+              <a:rPr sz="1150" b="1">
+                <a:solidFill>
+                  <a:srgbClr val="1F285A"/>
                 </a:solidFill>
                 <a:latin typeface="メイリオ"/>
                 <a:ea typeface="メイリオ"/>
                 <a:cs typeface="メイリオ"/>
               </a:rPr>
-              <a:t>5</a:t>
-            </a:r>
-          </a:p>
-        </p:txBody>
-      </p:sp>
-      <p:sp>
-        <p:nvSpPr>
-          <p:cNvPr id="60" name="Rounded Rectangle 59"/>
+              <a:t>不安</a:t>
+            </a:r>
+          </a:p>
+        </p:txBody>
+      </p:sp>
+      <p:cxnSp>
+        <p:nvCxnSpPr>
+          <p:cNvPr id="124" name="Connector 123"/>
+          <p:cNvCxnSpPr/>
+          <p:nvPr/>
+        </p:nvCxnSpPr>
+        <p:spPr>
+          <a:xfrm>
+            <a:off x="5616000" y="3006000"/>
+            <a:ext cx="432000" cy="0"/>
+          </a:xfrm>
+          <a:prstGeom prst="line">
+            <a:avLst/>
+          </a:prstGeom>
+          <a:ln w="22225">
+            <a:solidFill>
+              <a:srgbClr val="1F285A"/>
+            </a:solidFill>
+            <a:tailEnd type="triangle" w="med" len="med"/>
+          </a:ln>
+        </p:spPr>
+        <p:style>
+          <a:lnRef idx="2">
+            <a:schemeClr val="accent1"/>
+          </a:lnRef>
+          <a:fillRef idx="0">
+            <a:schemeClr val="accent1"/>
+          </a:fillRef>
+          <a:effectRef idx="0">
+            <a:schemeClr val="accent1"/>
+          </a:effectRef>
+          <a:fontRef idx="minor">
+            <a:schemeClr val="tx1"/>
+          </a:fontRef>
+        </p:style>
+      </p:cxnSp>
+      <p:sp>
+        <p:nvSpPr>
+          <p:cNvPr id="125" name="Rounded Rectangle 124"/>
           <p:cNvSpPr/>
           <p:nvPr/>
         </p:nvSpPr>
         <p:spPr>
           <a:xfrm>
-            <a:off x="2610000" y="3850560"/>
-            <a:ext cx="331199" cy="103679"/>
+            <a:off x="6120000" y="2808000"/>
+            <a:ext cx="1260000" cy="396000"/>
           </a:xfrm>
           <a:prstGeom prst="roundRect">
             <a:avLst>
-              <a:gd name="adj" fmla="val 50000"/>
+              <a:gd name="adj" fmla="val 30000"/>
             </a:avLst>
           </a:prstGeom>
           <a:solidFill>
-            <a:srgbClr val="D9D9D9"/>
+            <a:srgbClr val="06C755"/>
           </a:solidFill>
           <a:ln>
             <a:noFill/>
@@ -15954,76 +18927,6 @@
         </p:style>
         <p:txBody>
           <a:bodyPr rtlCol="0" anchor="ctr" wrap="square" lIns="72000" tIns="18000" rIns="72000" bIns="18000"/>
-          <a:lstStyle/>
-          <a:p>
-            <a:pPr algn="ctr"/>
-          </a:p>
-        </p:txBody>
-      </p:sp>
-      <p:sp>
-        <p:nvSpPr>
-          <p:cNvPr id="61" name="Rectangle 60"/>
-          <p:cNvSpPr/>
-          <p:nvPr/>
-        </p:nvSpPr>
-        <p:spPr>
-          <a:xfrm>
-            <a:off x="3366000" y="3855744"/>
-            <a:ext cx="140400" cy="93312"/>
-          </a:xfrm>
-          <a:prstGeom prst="rect">
-            <a:avLst/>
-          </a:prstGeom>
-          <a:solidFill>
-            <a:srgbClr val="1F285A"/>
-          </a:solidFill>
-          <a:ln>
-            <a:noFill/>
-          </a:ln>
-          <a:effectLst/>
-        </p:spPr>
-        <p:style>
-          <a:lnRef idx="1">
-            <a:schemeClr val="accent1"/>
-          </a:lnRef>
-          <a:fillRef idx="3">
-            <a:schemeClr val="accent1"/>
-          </a:fillRef>
-          <a:effectRef idx="0">
-            <a:schemeClr val="accent1"/>
-          </a:effectRef>
-          <a:fontRef idx="minor">
-            <a:schemeClr val="lt1"/>
-          </a:fontRef>
-        </p:style>
-        <p:txBody>
-          <a:bodyPr rtlCol="0" anchor="ctr" wrap="square" lIns="72000" tIns="18000" rIns="72000" bIns="18000"/>
-          <a:lstStyle/>
-          <a:p>
-            <a:pPr algn="ctr"/>
-          </a:p>
-        </p:txBody>
-      </p:sp>
-      <p:sp>
-        <p:nvSpPr>
-          <p:cNvPr id="62" name="TextBox 61"/>
-          <p:cNvSpPr txBox="1"/>
-          <p:nvPr/>
-        </p:nvSpPr>
-        <p:spPr>
-          <a:xfrm>
-            <a:off x="792000" y="4050000"/>
-            <a:ext cx="3096000" cy="180000"/>
-          </a:xfrm>
-          <a:prstGeom prst="rect">
-            <a:avLst/>
-          </a:prstGeom>
-          <a:noFill/>
-        </p:spPr>
-        <p:txBody>
-          <a:bodyPr wrap="square" anchor="t" lIns="36000" rIns="36000" tIns="18000" bIns="18000">
-            <a:spAutoFit/>
-          </a:bodyPr>
           <a:lstStyle/>
           <a:p>
             <a:pPr algn="ctr">
@@ -16035,124 +18938,40 @@
               </a:spcAft>
             </a:pPr>
             <a:r>
-              <a:rPr sz="800" b="0">
-                <a:solidFill>
-                  <a:srgbClr val="7F7F7F"/>
+              <a:rPr sz="1150" b="1">
+                <a:solidFill>
+                  <a:srgbClr val="FFFFFF"/>
                 </a:solidFill>
                 <a:latin typeface="メイリオ"/>
                 <a:ea typeface="メイリオ"/>
                 <a:cs typeface="メイリオ"/>
               </a:rPr>
-              <a:t>※実際の前後検索データをもとに分析（キーワードは案件ごと）</a:t>
-            </a:r>
-          </a:p>
-        </p:txBody>
-      </p:sp>
-      <p:sp>
-        <p:nvSpPr>
-          <p:cNvPr id="63" name="TextBox 62"/>
-          <p:cNvSpPr txBox="1"/>
-          <p:nvPr/>
-        </p:nvSpPr>
-        <p:spPr>
-          <a:xfrm>
-            <a:off x="900000" y="4356000"/>
-            <a:ext cx="2880000" cy="1080000"/>
+              <a:t>どの情報を</a:t>
+            </a:r>
+          </a:p>
+        </p:txBody>
+      </p:sp>
+      <p:sp>
+        <p:nvSpPr>
+          <p:cNvPr id="126" name="Rectangle 125"/>
+          <p:cNvSpPr/>
+          <p:nvPr/>
+        </p:nvSpPr>
+        <p:spPr>
+          <a:xfrm>
+            <a:off x="4284000" y="3401999"/>
+            <a:ext cx="1260000" cy="396000"/>
           </a:xfrm>
           <a:prstGeom prst="rect">
             <a:avLst/>
           </a:prstGeom>
-          <a:noFill/>
-        </p:spPr>
-        <p:txBody>
-          <a:bodyPr wrap="square" anchor="t" lIns="36000" rIns="36000" tIns="18000" bIns="18000">
-            <a:spAutoFit/>
-          </a:bodyPr>
-          <a:lstStyle/>
-          <a:p>
-            <a:pPr algn="l">
-              <a:lnSpc>
-                <a:spcPct val="110000"/>
-              </a:lnSpc>
-              <a:spcAft>
-                <a:spcPts val="400"/>
-              </a:spcAft>
-            </a:pPr>
-            <a:r>
-              <a:rPr sz="1050" b="0">
-                <a:solidFill>
-                  <a:srgbClr val="333333"/>
-                </a:solidFill>
-                <a:latin typeface="メイリオ"/>
-                <a:ea typeface="メイリオ"/>
-                <a:cs typeface="メイリオ"/>
-              </a:rPr>
-              <a:t>検討前に何を検索しているか</a:t>
-            </a:r>
-          </a:p>
-          <a:p>
-            <a:pPr algn="l">
-              <a:lnSpc>
-                <a:spcPct val="110000"/>
-              </a:lnSpc>
-              <a:spcAft>
-                <a:spcPts val="400"/>
-              </a:spcAft>
-            </a:pPr>
-            <a:r>
-              <a:rPr sz="1050" b="0">
-                <a:solidFill>
-                  <a:srgbClr val="333333"/>
-                </a:solidFill>
-                <a:latin typeface="メイリオ"/>
-                <a:ea typeface="メイリオ"/>
-                <a:cs typeface="メイリオ"/>
-              </a:rPr>
-              <a:t>検討後に何を検索しているか</a:t>
-            </a:r>
-          </a:p>
-          <a:p>
-            <a:pPr algn="l">
-              <a:lnSpc>
-                <a:spcPct val="110000"/>
-              </a:lnSpc>
-              <a:spcAft>
-                <a:spcPts val="400"/>
-              </a:spcAft>
-            </a:pPr>
-            <a:r>
-              <a:rPr sz="1050" b="0">
-                <a:solidFill>
-                  <a:srgbClr val="333333"/>
-                </a:solidFill>
-                <a:latin typeface="メイリオ"/>
-                <a:ea typeface="メイリオ"/>
-                <a:cs typeface="メイリオ"/>
-              </a:rPr>
-              <a:t>ユーザーの不安・比較軸・関心テーマを把握</a:t>
-            </a:r>
-          </a:p>
-        </p:txBody>
-      </p:sp>
-      <p:sp>
-        <p:nvSpPr>
-          <p:cNvPr id="64" name="Rectangle 63"/>
-          <p:cNvSpPr/>
-          <p:nvPr/>
-        </p:nvSpPr>
-        <p:spPr>
-          <a:xfrm>
-            <a:off x="4284000" y="2376000"/>
-            <a:ext cx="1260000" cy="270000"/>
-          </a:xfrm>
-          <a:prstGeom prst="rect">
-            <a:avLst/>
-          </a:prstGeom>
-          <a:solidFill>
-            <a:srgbClr val="E4E8F6"/>
-          </a:solidFill>
-          <a:ln>
-            <a:noFill/>
+          <a:solidFill>
+            <a:srgbClr val="FFFFFF"/>
+          </a:solidFill>
+          <a:ln w="12700">
+            <a:solidFill>
+              <a:srgbClr val="1F285A"/>
+            </a:solidFill>
           </a:ln>
           <a:effectLst/>
         </p:spPr>
@@ -16183,7 +19002,7 @@
               </a:spcAft>
             </a:pPr>
             <a:r>
-              <a:rPr sz="1050" b="1">
+              <a:rPr sz="1150" b="1">
                 <a:solidFill>
                   <a:srgbClr val="1F285A"/>
                 </a:solidFill>
@@ -16191,27 +19010,65 @@
                 <a:ea typeface="メイリオ"/>
                 <a:cs typeface="メイリオ"/>
               </a:rPr>
-              <a:t>検索データ</a:t>
-            </a:r>
-          </a:p>
-        </p:txBody>
-      </p:sp>
-      <p:sp>
-        <p:nvSpPr>
-          <p:cNvPr id="65" name="Rectangle 64"/>
+              <a:t>比較軸</a:t>
+            </a:r>
+          </a:p>
+        </p:txBody>
+      </p:sp>
+      <p:cxnSp>
+        <p:nvCxnSpPr>
+          <p:cNvPr id="127" name="Connector 126"/>
+          <p:cNvCxnSpPr/>
+          <p:nvPr/>
+        </p:nvCxnSpPr>
+        <p:spPr>
+          <a:xfrm>
+            <a:off x="5616000" y="3600000"/>
+            <a:ext cx="432000" cy="0"/>
+          </a:xfrm>
+          <a:prstGeom prst="line">
+            <a:avLst/>
+          </a:prstGeom>
+          <a:ln w="22225">
+            <a:solidFill>
+              <a:srgbClr val="1F285A"/>
+            </a:solidFill>
+            <a:tailEnd type="triangle" w="med" len="med"/>
+          </a:ln>
+        </p:spPr>
+        <p:style>
+          <a:lnRef idx="2">
+            <a:schemeClr val="accent1"/>
+          </a:lnRef>
+          <a:fillRef idx="0">
+            <a:schemeClr val="accent1"/>
+          </a:fillRef>
+          <a:effectRef idx="0">
+            <a:schemeClr val="accent1"/>
+          </a:effectRef>
+          <a:fontRef idx="minor">
+            <a:schemeClr val="tx1"/>
+          </a:fontRef>
+        </p:style>
+      </p:cxnSp>
+      <p:sp>
+        <p:nvSpPr>
+          <p:cNvPr id="128" name="Rounded Rectangle 127"/>
           <p:cNvSpPr/>
           <p:nvPr/>
         </p:nvSpPr>
         <p:spPr>
           <a:xfrm>
-            <a:off x="6120000" y="2376000"/>
-            <a:ext cx="1260000" cy="270000"/>
-          </a:xfrm>
-          <a:prstGeom prst="rect">
-            <a:avLst/>
-          </a:prstGeom>
-          <a:solidFill>
-            <a:srgbClr val="E8F8EE"/>
+            <a:off x="6120000" y="3401999"/>
+            <a:ext cx="1260000" cy="396000"/>
+          </a:xfrm>
+          <a:prstGeom prst="roundRect">
+            <a:avLst>
+              <a:gd name="adj" fmla="val 30000"/>
+            </a:avLst>
+          </a:prstGeom>
+          <a:solidFill>
+            <a:srgbClr val="06C755"/>
           </a:solidFill>
           <a:ln>
             <a:noFill/>
@@ -16245,28 +19102,28 @@
               </a:spcAft>
             </a:pPr>
             <a:r>
-              <a:rPr sz="1050" b="1">
-                <a:solidFill>
-                  <a:srgbClr val="0B7A3B"/>
+              <a:rPr sz="1150" b="1">
+                <a:solidFill>
+                  <a:srgbClr val="FFFFFF"/>
                 </a:solidFill>
                 <a:latin typeface="メイリオ"/>
                 <a:ea typeface="メイリオ"/>
                 <a:cs typeface="メイリオ"/>
               </a:rPr>
-              <a:t>LINE配信</a:t>
-            </a:r>
-          </a:p>
-        </p:txBody>
-      </p:sp>
-      <p:sp>
-        <p:nvSpPr>
-          <p:cNvPr id="66" name="Rectangle 65"/>
+              <a:t>どの順番で</a:t>
+            </a:r>
+          </a:p>
+        </p:txBody>
+      </p:sp>
+      <p:sp>
+        <p:nvSpPr>
+          <p:cNvPr id="129" name="Rectangle 128"/>
           <p:cNvSpPr/>
           <p:nvPr/>
         </p:nvSpPr>
         <p:spPr>
           <a:xfrm>
-            <a:off x="4284000" y="2808000"/>
+            <a:off x="4284000" y="3996000"/>
             <a:ext cx="1260000" cy="396000"/>
           </a:xfrm>
           <a:prstGeom prst="rect">
@@ -16317,20 +19174,20 @@
                 <a:ea typeface="メイリオ"/>
                 <a:cs typeface="メイリオ"/>
               </a:rPr>
-              <a:t>不安</a:t>
+              <a:t>関心テーマ</a:t>
             </a:r>
           </a:p>
         </p:txBody>
       </p:sp>
       <p:cxnSp>
         <p:nvCxnSpPr>
-          <p:cNvPr id="67" name="Connector 66"/>
+          <p:cNvPr id="130" name="Connector 129"/>
           <p:cNvCxnSpPr/>
           <p:nvPr/>
         </p:nvCxnSpPr>
         <p:spPr>
           <a:xfrm>
-            <a:off x="5616000" y="3006000"/>
+            <a:off x="5616000" y="4194000"/>
             <a:ext cx="432000" cy="0"/>
           </a:xfrm>
           <a:prstGeom prst="line">
@@ -16360,13 +19217,13 @@
       </p:cxnSp>
       <p:sp>
         <p:nvSpPr>
-          <p:cNvPr id="68" name="Rounded Rectangle 67"/>
+          <p:cNvPr id="131" name="Rounded Rectangle 130"/>
           <p:cNvSpPr/>
           <p:nvPr/>
         </p:nvSpPr>
         <p:spPr>
           <a:xfrm>
-            <a:off x="6120000" y="2808000"/>
+            <a:off x="6120000" y="3996000"/>
             <a:ext cx="1260000" cy="396000"/>
           </a:xfrm>
           <a:prstGeom prst="roundRect">
@@ -16417,52 +19274,53 @@
                 <a:ea typeface="メイリオ"/>
                 <a:cs typeface="メイリオ"/>
               </a:rPr>
-              <a:t>どの情報を</a:t>
-            </a:r>
-          </a:p>
-        </p:txBody>
-      </p:sp>
-      <p:sp>
-        <p:nvSpPr>
-          <p:cNvPr id="69" name="Rectangle 68"/>
-          <p:cNvSpPr/>
-          <p:nvPr/>
-        </p:nvSpPr>
-        <p:spPr>
-          <a:xfrm>
-            <a:off x="4284000" y="3401999"/>
-            <a:ext cx="1260000" cy="396000"/>
+              <a:t>いつ配信するか</a:t>
+            </a:r>
+          </a:p>
+        </p:txBody>
+      </p:sp>
+      <p:sp>
+        <p:nvSpPr>
+          <p:cNvPr id="132" name="TextBox 131"/>
+          <p:cNvSpPr txBox="1"/>
+          <p:nvPr/>
+        </p:nvSpPr>
+        <p:spPr>
+          <a:xfrm>
+            <a:off x="4284000" y="4662000"/>
+            <a:ext cx="3096000" cy="576000"/>
           </a:xfrm>
           <a:prstGeom prst="rect">
             <a:avLst/>
           </a:prstGeom>
-          <a:solidFill>
-            <a:srgbClr val="FFFFFF"/>
-          </a:solidFill>
-          <a:ln w="12700">
-            <a:solidFill>
-              <a:srgbClr val="1F285A"/>
-            </a:solidFill>
-          </a:ln>
-          <a:effectLst/>
-        </p:spPr>
-        <p:style>
-          <a:lnRef idx="1">
-            <a:schemeClr val="accent1"/>
-          </a:lnRef>
-          <a:fillRef idx="3">
-            <a:schemeClr val="accent1"/>
-          </a:fillRef>
-          <a:effectRef idx="0">
-            <a:schemeClr val="accent1"/>
-          </a:effectRef>
-          <a:fontRef idx="minor">
-            <a:schemeClr val="lt1"/>
-          </a:fontRef>
-        </p:style>
-        <p:txBody>
-          <a:bodyPr rtlCol="0" anchor="ctr" wrap="square" lIns="72000" tIns="18000" rIns="72000" bIns="18000"/>
-          <a:lstStyle/>
+          <a:noFill/>
+        </p:spPr>
+        <p:txBody>
+          <a:bodyPr wrap="square" anchor="t" lIns="36000" rIns="36000" tIns="18000" bIns="18000">
+            <a:spAutoFit/>
+          </a:bodyPr>
+          <a:lstStyle/>
+          <a:p>
+            <a:pPr algn="ctr">
+              <a:lnSpc>
+                <a:spcPct val="110000"/>
+              </a:lnSpc>
+              <a:spcAft>
+                <a:spcPts val="200"/>
+              </a:spcAft>
+            </a:pPr>
+            <a:r>
+              <a:rPr sz="1050" b="0">
+                <a:solidFill>
+                  <a:srgbClr val="333333"/>
+                </a:solidFill>
+                <a:latin typeface="メイリオ"/>
+                <a:ea typeface="メイリオ"/>
+                <a:cs typeface="メイリオ"/>
+              </a:rPr>
+              <a:t>ニーズをもとに、配信内容・順番・タイミングを</a:t>
+            </a:r>
+          </a:p>
           <a:p>
             <a:pPr algn="ctr">
               <a:lnSpc>
@@ -16473,38 +19331,37 @@
               </a:spcAft>
             </a:pPr>
             <a:r>
-              <a:rPr sz="1150" b="1">
-                <a:solidFill>
-                  <a:srgbClr val="1F285A"/>
+              <a:rPr sz="1050" b="0">
+                <a:solidFill>
+                  <a:srgbClr val="333333"/>
                 </a:solidFill>
                 <a:latin typeface="メイリオ"/>
                 <a:ea typeface="メイリオ"/>
                 <a:cs typeface="メイリオ"/>
               </a:rPr>
-              <a:t>比較軸</a:t>
+              <a:t>業界・商材ごとに設計</a:t>
             </a:r>
           </a:p>
         </p:txBody>
       </p:sp>
       <p:cxnSp>
         <p:nvCxnSpPr>
-          <p:cNvPr id="70" name="Connector 69"/>
+          <p:cNvPr id="133" name="Connector 132"/>
           <p:cNvCxnSpPr/>
           <p:nvPr/>
         </p:nvCxnSpPr>
         <p:spPr>
           <a:xfrm>
-            <a:off x="5616000" y="3600000"/>
-            <a:ext cx="432000" cy="0"/>
+            <a:off x="8819999" y="2484000"/>
+            <a:ext cx="0" cy="2556000"/>
           </a:xfrm>
           <a:prstGeom prst="line">
             <a:avLst/>
           </a:prstGeom>
-          <a:ln w="22225">
+          <a:ln w="25400">
             <a:solidFill>
-              <a:srgbClr val="1F285A"/>
+              <a:srgbClr val="06C755"/>
             </a:solidFill>
-            <a:tailEnd type="triangle" w="med" len="med"/>
           </a:ln>
         </p:spPr>
         <p:style>
@@ -16524,14 +19381,238 @@
       </p:cxnSp>
       <p:sp>
         <p:nvSpPr>
-          <p:cNvPr id="71" name="Rounded Rectangle 70"/>
+          <p:cNvPr id="134" name="Oval 133"/>
           <p:cNvSpPr/>
           <p:nvPr/>
         </p:nvSpPr>
         <p:spPr>
           <a:xfrm>
-            <a:off x="6120000" y="3401999"/>
-            <a:ext cx="1260000" cy="396000"/>
+            <a:off x="8711999" y="2376000"/>
+            <a:ext cx="216000" cy="216000"/>
+          </a:xfrm>
+          <a:prstGeom prst="ellipse">
+            <a:avLst/>
+          </a:prstGeom>
+          <a:solidFill>
+            <a:srgbClr val="06C755"/>
+          </a:solidFill>
+          <a:ln w="25400">
+            <a:solidFill>
+              <a:srgbClr val="06C755"/>
+            </a:solidFill>
+          </a:ln>
+          <a:effectLst/>
+        </p:spPr>
+        <p:style>
+          <a:lnRef idx="1">
+            <a:schemeClr val="accent1"/>
+          </a:lnRef>
+          <a:fillRef idx="3">
+            <a:schemeClr val="accent1"/>
+          </a:fillRef>
+          <a:effectRef idx="0">
+            <a:schemeClr val="accent1"/>
+          </a:effectRef>
+          <a:fontRef idx="minor">
+            <a:schemeClr val="lt1"/>
+          </a:fontRef>
+        </p:style>
+        <p:txBody>
+          <a:bodyPr rtlCol="0" anchor="ctr" wrap="square" lIns="72000" tIns="18000" rIns="72000" bIns="18000"/>
+          <a:lstStyle/>
+          <a:p>
+            <a:pPr algn="ctr"/>
+          </a:p>
+        </p:txBody>
+      </p:sp>
+      <p:sp>
+        <p:nvSpPr>
+          <p:cNvPr id="135" name="TextBox 134"/>
+          <p:cNvSpPr txBox="1"/>
+          <p:nvPr/>
+        </p:nvSpPr>
+        <p:spPr>
+          <a:xfrm>
+            <a:off x="7775999" y="2304000"/>
+            <a:ext cx="900000" cy="360000"/>
+          </a:xfrm>
+          <a:prstGeom prst="rect">
+            <a:avLst/>
+          </a:prstGeom>
+          <a:noFill/>
+        </p:spPr>
+        <p:txBody>
+          <a:bodyPr wrap="square" anchor="ctr" lIns="36000" rIns="36000" tIns="18000" bIns="18000">
+            <a:spAutoFit/>
+          </a:bodyPr>
+          <a:lstStyle/>
+          <a:p>
+            <a:pPr algn="r">
+              <a:lnSpc>
+                <a:spcPct val="110000"/>
+              </a:lnSpc>
+              <a:spcAft>
+                <a:spcPts val="0"/>
+              </a:spcAft>
+            </a:pPr>
+            <a:r>
+              <a:rPr sz="1200" b="1">
+                <a:solidFill>
+                  <a:srgbClr val="0B7A3B"/>
+                </a:solidFill>
+                <a:latin typeface="メイリオ"/>
+                <a:ea typeface="メイリオ"/>
+                <a:cs typeface="メイリオ"/>
+              </a:rPr>
+              <a:t>友だち追加</a:t>
+            </a:r>
+          </a:p>
+        </p:txBody>
+      </p:sp>
+      <p:sp>
+        <p:nvSpPr>
+          <p:cNvPr id="136" name="TextBox 135"/>
+          <p:cNvSpPr txBox="1"/>
+          <p:nvPr/>
+        </p:nvSpPr>
+        <p:spPr>
+          <a:xfrm>
+            <a:off x="9071999" y="2304000"/>
+            <a:ext cx="2340000" cy="360000"/>
+          </a:xfrm>
+          <a:prstGeom prst="rect">
+            <a:avLst/>
+          </a:prstGeom>
+          <a:noFill/>
+        </p:spPr>
+        <p:txBody>
+          <a:bodyPr wrap="square" anchor="ctr" lIns="36000" rIns="36000" tIns="18000" bIns="18000">
+            <a:spAutoFit/>
+          </a:bodyPr>
+          <a:lstStyle/>
+          <a:p>
+            <a:pPr algn="l">
+              <a:lnSpc>
+                <a:spcPct val="110000"/>
+              </a:lnSpc>
+              <a:spcAft>
+                <a:spcPts val="0"/>
+              </a:spcAft>
+            </a:pPr>
+            <a:r>
+              <a:rPr sz="1000" b="0">
+                <a:solidFill>
+                  <a:srgbClr val="7F7F7F"/>
+                </a:solidFill>
+                <a:latin typeface="メイリオ"/>
+                <a:ea typeface="メイリオ"/>
+                <a:cs typeface="メイリオ"/>
+              </a:rPr>
+              <a:t>サンクスLINE誘導などで追加</a:t>
+            </a:r>
+          </a:p>
+        </p:txBody>
+      </p:sp>
+      <p:sp>
+        <p:nvSpPr>
+          <p:cNvPr id="137" name="Oval 136"/>
+          <p:cNvSpPr/>
+          <p:nvPr/>
+        </p:nvSpPr>
+        <p:spPr>
+          <a:xfrm>
+            <a:off x="8711999" y="3227999"/>
+            <a:ext cx="216000" cy="216000"/>
+          </a:xfrm>
+          <a:prstGeom prst="ellipse">
+            <a:avLst/>
+          </a:prstGeom>
+          <a:solidFill>
+            <a:srgbClr val="FFFFFF"/>
+          </a:solidFill>
+          <a:ln w="25400">
+            <a:solidFill>
+              <a:srgbClr val="06C755"/>
+            </a:solidFill>
+          </a:ln>
+          <a:effectLst/>
+        </p:spPr>
+        <p:style>
+          <a:lnRef idx="1">
+            <a:schemeClr val="accent1"/>
+          </a:lnRef>
+          <a:fillRef idx="3">
+            <a:schemeClr val="accent1"/>
+          </a:fillRef>
+          <a:effectRef idx="0">
+            <a:schemeClr val="accent1"/>
+          </a:effectRef>
+          <a:fontRef idx="minor">
+            <a:schemeClr val="lt1"/>
+          </a:fontRef>
+        </p:style>
+        <p:txBody>
+          <a:bodyPr rtlCol="0" anchor="ctr" wrap="square" lIns="72000" tIns="18000" rIns="72000" bIns="18000"/>
+          <a:lstStyle/>
+          <a:p>
+            <a:pPr algn="ctr"/>
+          </a:p>
+        </p:txBody>
+      </p:sp>
+      <p:sp>
+        <p:nvSpPr>
+          <p:cNvPr id="138" name="TextBox 137"/>
+          <p:cNvSpPr txBox="1"/>
+          <p:nvPr/>
+        </p:nvSpPr>
+        <p:spPr>
+          <a:xfrm>
+            <a:off x="7775999" y="3155999"/>
+            <a:ext cx="900000" cy="360000"/>
+          </a:xfrm>
+          <a:prstGeom prst="rect">
+            <a:avLst/>
+          </a:prstGeom>
+          <a:noFill/>
+        </p:spPr>
+        <p:txBody>
+          <a:bodyPr wrap="square" anchor="ctr" lIns="36000" rIns="36000" tIns="18000" bIns="18000">
+            <a:spAutoFit/>
+          </a:bodyPr>
+          <a:lstStyle/>
+          <a:p>
+            <a:pPr algn="r">
+              <a:lnSpc>
+                <a:spcPct val="110000"/>
+              </a:lnSpc>
+              <a:spcAft>
+                <a:spcPts val="0"/>
+              </a:spcAft>
+            </a:pPr>
+            <a:r>
+              <a:rPr sz="1100" b="1">
+                <a:solidFill>
+                  <a:srgbClr val="333333"/>
+                </a:solidFill>
+                <a:latin typeface="メイリオ"/>
+                <a:ea typeface="メイリオ"/>
+                <a:cs typeface="メイリオ"/>
+              </a:rPr>
+              <a:t>初回配信</a:t>
+            </a:r>
+          </a:p>
+        </p:txBody>
+      </p:sp>
+      <p:sp>
+        <p:nvSpPr>
+          <p:cNvPr id="139" name="Rounded Rectangle 138"/>
+          <p:cNvSpPr/>
+          <p:nvPr/>
+        </p:nvSpPr>
+        <p:spPr>
+          <a:xfrm>
+            <a:off x="9071999" y="3155999"/>
+            <a:ext cx="2340000" cy="360000"/>
           </a:xfrm>
           <a:prstGeom prst="roundRect">
             <a:avLst>
@@ -16539,7 +19620,7 @@
             </a:avLst>
           </a:prstGeom>
           <a:solidFill>
-            <a:srgbClr val="06C755"/>
+            <a:srgbClr val="E8F8EE"/>
           </a:solidFill>
           <a:ln>
             <a:noFill/>
@@ -16561,7 +19642,7 @@
           </a:fontRef>
         </p:style>
         <p:txBody>
-          <a:bodyPr rtlCol="0" anchor="ctr" wrap="square" lIns="72000" tIns="18000" rIns="72000" bIns="18000"/>
+          <a:bodyPr rtlCol="0" anchor="ctr" wrap="square" lIns="54000" tIns="0" rIns="54000" bIns="0"/>
           <a:lstStyle/>
           <a:p>
             <a:pPr algn="ctr">
@@ -16573,40 +19654,130 @@
               </a:spcAft>
             </a:pPr>
             <a:r>
-              <a:rPr sz="1150" b="1">
-                <a:solidFill>
-                  <a:srgbClr val="FFFFFF"/>
+              <a:rPr sz="1100" b="1">
+                <a:solidFill>
+                  <a:srgbClr val="0B7A3B"/>
                 </a:solidFill>
                 <a:latin typeface="メイリオ"/>
                 <a:ea typeface="メイリオ"/>
                 <a:cs typeface="メイリオ"/>
               </a:rPr>
-              <a:t>どの順番で</a:t>
-            </a:r>
-          </a:p>
-        </p:txBody>
-      </p:sp>
-      <p:sp>
-        <p:nvSpPr>
-          <p:cNvPr id="72" name="Rectangle 71"/>
+              <a:t>興味喚起</a:t>
+            </a:r>
+          </a:p>
+        </p:txBody>
+      </p:sp>
+      <p:sp>
+        <p:nvSpPr>
+          <p:cNvPr id="140" name="Oval 139"/>
           <p:cNvSpPr/>
           <p:nvPr/>
         </p:nvSpPr>
         <p:spPr>
           <a:xfrm>
-            <a:off x="4284000" y="3996000"/>
-            <a:ext cx="1260000" cy="396000"/>
+            <a:off x="8711999" y="4079999"/>
+            <a:ext cx="216000" cy="216000"/>
+          </a:xfrm>
+          <a:prstGeom prst="ellipse">
+            <a:avLst/>
+          </a:prstGeom>
+          <a:solidFill>
+            <a:srgbClr val="FFFFFF"/>
+          </a:solidFill>
+          <a:ln w="25400">
+            <a:solidFill>
+              <a:srgbClr val="06C755"/>
+            </a:solidFill>
+          </a:ln>
+          <a:effectLst/>
+        </p:spPr>
+        <p:style>
+          <a:lnRef idx="1">
+            <a:schemeClr val="accent1"/>
+          </a:lnRef>
+          <a:fillRef idx="3">
+            <a:schemeClr val="accent1"/>
+          </a:fillRef>
+          <a:effectRef idx="0">
+            <a:schemeClr val="accent1"/>
+          </a:effectRef>
+          <a:fontRef idx="minor">
+            <a:schemeClr val="lt1"/>
+          </a:fontRef>
+        </p:style>
+        <p:txBody>
+          <a:bodyPr rtlCol="0" anchor="ctr" wrap="square" lIns="72000" tIns="18000" rIns="72000" bIns="18000"/>
+          <a:lstStyle/>
+          <a:p>
+            <a:pPr algn="ctr"/>
+          </a:p>
+        </p:txBody>
+      </p:sp>
+      <p:sp>
+        <p:nvSpPr>
+          <p:cNvPr id="141" name="TextBox 140"/>
+          <p:cNvSpPr txBox="1"/>
+          <p:nvPr/>
+        </p:nvSpPr>
+        <p:spPr>
+          <a:xfrm>
+            <a:off x="7775999" y="4008000"/>
+            <a:ext cx="900000" cy="360000"/>
           </a:xfrm>
           <a:prstGeom prst="rect">
             <a:avLst/>
           </a:prstGeom>
-          <a:solidFill>
-            <a:srgbClr val="FFFFFF"/>
-          </a:solidFill>
-          <a:ln w="12700">
-            <a:solidFill>
-              <a:srgbClr val="1F285A"/>
-            </a:solidFill>
+          <a:noFill/>
+        </p:spPr>
+        <p:txBody>
+          <a:bodyPr wrap="square" anchor="ctr" lIns="36000" rIns="36000" tIns="18000" bIns="18000">
+            <a:spAutoFit/>
+          </a:bodyPr>
+          <a:lstStyle/>
+          <a:p>
+            <a:pPr algn="r">
+              <a:lnSpc>
+                <a:spcPct val="110000"/>
+              </a:lnSpc>
+              <a:spcAft>
+                <a:spcPts val="0"/>
+              </a:spcAft>
+            </a:pPr>
+            <a:r>
+              <a:rPr sz="1100" b="1">
+                <a:solidFill>
+                  <a:srgbClr val="333333"/>
+                </a:solidFill>
+                <a:latin typeface="メイリオ"/>
+                <a:ea typeface="メイリオ"/>
+                <a:cs typeface="メイリオ"/>
+              </a:rPr>
+              <a:t>数日後</a:t>
+            </a:r>
+          </a:p>
+        </p:txBody>
+      </p:sp>
+      <p:sp>
+        <p:nvSpPr>
+          <p:cNvPr id="142" name="Rounded Rectangle 141"/>
+          <p:cNvSpPr/>
+          <p:nvPr/>
+        </p:nvSpPr>
+        <p:spPr>
+          <a:xfrm>
+            <a:off x="9071999" y="4008000"/>
+            <a:ext cx="2340000" cy="360000"/>
+          </a:xfrm>
+          <a:prstGeom prst="roundRect">
+            <a:avLst>
+              <a:gd name="adj" fmla="val 30000"/>
+            </a:avLst>
+          </a:prstGeom>
+          <a:solidFill>
+            <a:srgbClr val="E8F8EE"/>
+          </a:solidFill>
+          <a:ln>
+            <a:noFill/>
           </a:ln>
           <a:effectLst/>
         </p:spPr>
@@ -16625,7 +19796,7 @@
           </a:fontRef>
         </p:style>
         <p:txBody>
-          <a:bodyPr rtlCol="0" anchor="ctr" wrap="square" lIns="72000" tIns="18000" rIns="72000" bIns="18000"/>
+          <a:bodyPr rtlCol="0" anchor="ctr" wrap="square" lIns="54000" tIns="0" rIns="54000" bIns="0"/>
           <a:lstStyle/>
           <a:p>
             <a:pPr algn="ctr">
@@ -16637,65 +19808,119 @@
               </a:spcAft>
             </a:pPr>
             <a:r>
-              <a:rPr sz="1150" b="1">
-                <a:solidFill>
-                  <a:srgbClr val="1F285A"/>
+              <a:rPr sz="1100" b="1">
+                <a:solidFill>
+                  <a:srgbClr val="0B7A3B"/>
                 </a:solidFill>
                 <a:latin typeface="メイリオ"/>
                 <a:ea typeface="メイリオ"/>
                 <a:cs typeface="メイリオ"/>
               </a:rPr>
-              <a:t>関心テーマ</a:t>
-            </a:r>
-          </a:p>
-        </p:txBody>
-      </p:sp>
-      <p:cxnSp>
-        <p:nvCxnSpPr>
-          <p:cNvPr id="73" name="Connector 72"/>
-          <p:cNvCxnSpPr/>
-          <p:nvPr/>
-        </p:nvCxnSpPr>
-        <p:spPr>
-          <a:xfrm>
-            <a:off x="5616000" y="4194000"/>
-            <a:ext cx="432000" cy="0"/>
-          </a:xfrm>
-          <a:prstGeom prst="line">
-            <a:avLst/>
-          </a:prstGeom>
-          <a:ln w="22225">
+              <a:t>比較検討情報・不安解消</a:t>
+            </a:r>
+          </a:p>
+        </p:txBody>
+      </p:sp>
+      <p:sp>
+        <p:nvSpPr>
+          <p:cNvPr id="143" name="Oval 142"/>
+          <p:cNvSpPr/>
+          <p:nvPr/>
+        </p:nvSpPr>
+        <p:spPr>
+          <a:xfrm>
+            <a:off x="8711999" y="4932000"/>
+            <a:ext cx="216000" cy="216000"/>
+          </a:xfrm>
+          <a:prstGeom prst="ellipse">
+            <a:avLst/>
+          </a:prstGeom>
+          <a:solidFill>
+            <a:srgbClr val="FFFFFF"/>
+          </a:solidFill>
+          <a:ln w="25400">
             <a:solidFill>
-              <a:srgbClr val="1F285A"/>
+              <a:srgbClr val="06C755"/>
             </a:solidFill>
-            <a:tailEnd type="triangle" w="med" len="med"/>
-          </a:ln>
-        </p:spPr>
-        <p:style>
-          <a:lnRef idx="2">
-            <a:schemeClr val="accent1"/>
-          </a:lnRef>
-          <a:fillRef idx="0">
-            <a:schemeClr val="accent1"/>
-          </a:fillRef>
-          <a:effectRef idx="0">
-            <a:schemeClr val="accent1"/>
-          </a:effectRef>
-          <a:fontRef idx="minor">
-            <a:schemeClr val="tx1"/>
-          </a:fontRef>
-        </p:style>
-      </p:cxnSp>
-      <p:sp>
-        <p:nvSpPr>
-          <p:cNvPr id="74" name="Rounded Rectangle 73"/>
+          </a:ln>
+          <a:effectLst/>
+        </p:spPr>
+        <p:style>
+          <a:lnRef idx="1">
+            <a:schemeClr val="accent1"/>
+          </a:lnRef>
+          <a:fillRef idx="3">
+            <a:schemeClr val="accent1"/>
+          </a:fillRef>
+          <a:effectRef idx="0">
+            <a:schemeClr val="accent1"/>
+          </a:effectRef>
+          <a:fontRef idx="minor">
+            <a:schemeClr val="lt1"/>
+          </a:fontRef>
+        </p:style>
+        <p:txBody>
+          <a:bodyPr rtlCol="0" anchor="ctr" wrap="square" lIns="72000" tIns="18000" rIns="72000" bIns="18000"/>
+          <a:lstStyle/>
+          <a:p>
+            <a:pPr algn="ctr"/>
+          </a:p>
+        </p:txBody>
+      </p:sp>
+      <p:sp>
+        <p:nvSpPr>
+          <p:cNvPr id="144" name="TextBox 143"/>
+          <p:cNvSpPr txBox="1"/>
+          <p:nvPr/>
+        </p:nvSpPr>
+        <p:spPr>
+          <a:xfrm>
+            <a:off x="7775999" y="4860000"/>
+            <a:ext cx="900000" cy="360000"/>
+          </a:xfrm>
+          <a:prstGeom prst="rect">
+            <a:avLst/>
+          </a:prstGeom>
+          <a:noFill/>
+        </p:spPr>
+        <p:txBody>
+          <a:bodyPr wrap="square" anchor="ctr" lIns="36000" rIns="36000" tIns="18000" bIns="18000">
+            <a:spAutoFit/>
+          </a:bodyPr>
+          <a:lstStyle/>
+          <a:p>
+            <a:pPr algn="r">
+              <a:lnSpc>
+                <a:spcPct val="110000"/>
+              </a:lnSpc>
+              <a:spcAft>
+                <a:spcPts val="0"/>
+              </a:spcAft>
+            </a:pPr>
+            <a:r>
+              <a:rPr sz="1100" b="1">
+                <a:solidFill>
+                  <a:srgbClr val="333333"/>
+                </a:solidFill>
+                <a:latin typeface="メイリオ"/>
+                <a:ea typeface="メイリオ"/>
+                <a:cs typeface="メイリオ"/>
+              </a:rPr>
+              <a:t>1〜2週間</a:t>
+            </a:r>
+          </a:p>
+        </p:txBody>
+      </p:sp>
+      <p:sp>
+        <p:nvSpPr>
+          <p:cNvPr id="145" name="Rounded Rectangle 144"/>
           <p:cNvSpPr/>
           <p:nvPr/>
         </p:nvSpPr>
         <p:spPr>
           <a:xfrm>
-            <a:off x="6120000" y="3996000"/>
-            <a:ext cx="1260000" cy="396000"/>
+            <a:off x="9071999" y="4860000"/>
+            <a:ext cx="2340000" cy="360000"/>
           </a:xfrm>
           <a:prstGeom prst="roundRect">
             <a:avLst>
@@ -16703,7 +19928,7 @@
             </a:avLst>
           </a:prstGeom>
           <a:solidFill>
-            <a:srgbClr val="06C755"/>
+            <a:srgbClr val="E8F8EE"/>
           </a:solidFill>
           <a:ln>
             <a:noFill/>
@@ -16725,7 +19950,7 @@
           </a:fontRef>
         </p:style>
         <p:txBody>
-          <a:bodyPr rtlCol="0" anchor="ctr" wrap="square" lIns="72000" tIns="18000" rIns="72000" bIns="18000"/>
+          <a:bodyPr rtlCol="0" anchor="ctr" wrap="square" lIns="54000" tIns="0" rIns="54000" bIns="0"/>
           <a:lstStyle/>
           <a:p>
             <a:pPr algn="ctr">
@@ -16737,29 +19962,29 @@
               </a:spcAft>
             </a:pPr>
             <a:r>
-              <a:rPr sz="1150" b="1">
-                <a:solidFill>
-                  <a:srgbClr val="FFFFFF"/>
+              <a:rPr sz="1100" b="1">
+                <a:solidFill>
+                  <a:srgbClr val="0B7A3B"/>
                 </a:solidFill>
                 <a:latin typeface="メイリオ"/>
                 <a:ea typeface="メイリオ"/>
                 <a:cs typeface="メイリオ"/>
               </a:rPr>
-              <a:t>いつ配信するか</a:t>
-            </a:r>
-          </a:p>
-        </p:txBody>
-      </p:sp>
-      <p:sp>
-        <p:nvSpPr>
-          <p:cNvPr id="75" name="TextBox 74"/>
+              <a:t>CVオファー</a:t>
+            </a:r>
+          </a:p>
+        </p:txBody>
+      </p:sp>
+      <p:sp>
+        <p:nvSpPr>
+          <p:cNvPr id="146" name="TextBox 145"/>
           <p:cNvSpPr txBox="1"/>
           <p:nvPr/>
         </p:nvSpPr>
         <p:spPr>
           <a:xfrm>
-            <a:off x="4284000" y="4662000"/>
-            <a:ext cx="3096000" cy="576000"/>
+            <a:off x="7775999" y="5418000"/>
+            <a:ext cx="3636000" cy="216000"/>
           </a:xfrm>
           <a:prstGeom prst="rect">
             <a:avLst/>
@@ -16768,196 +19993,6 @@
         </p:spPr>
         <p:txBody>
           <a:bodyPr wrap="square" anchor="t" lIns="36000" rIns="36000" tIns="18000" bIns="18000">
-            <a:spAutoFit/>
-          </a:bodyPr>
-          <a:lstStyle/>
-          <a:p>
-            <a:pPr algn="ctr">
-              <a:lnSpc>
-                <a:spcPct val="110000"/>
-              </a:lnSpc>
-              <a:spcAft>
-                <a:spcPts val="200"/>
-              </a:spcAft>
-            </a:pPr>
-            <a:r>
-              <a:rPr sz="1050" b="0">
-                <a:solidFill>
-                  <a:srgbClr val="333333"/>
-                </a:solidFill>
-                <a:latin typeface="メイリオ"/>
-                <a:ea typeface="メイリオ"/>
-                <a:cs typeface="メイリオ"/>
-              </a:rPr>
-              <a:t>ニーズをもとに、配信内容・順番・タイミングを</a:t>
-            </a:r>
-          </a:p>
-          <a:p>
-            <a:pPr algn="ctr">
-              <a:lnSpc>
-                <a:spcPct val="110000"/>
-              </a:lnSpc>
-              <a:spcAft>
-                <a:spcPts val="0"/>
-              </a:spcAft>
-            </a:pPr>
-            <a:r>
-              <a:rPr sz="1050" b="0">
-                <a:solidFill>
-                  <a:srgbClr val="333333"/>
-                </a:solidFill>
-                <a:latin typeface="メイリオ"/>
-                <a:ea typeface="メイリオ"/>
-                <a:cs typeface="メイリオ"/>
-              </a:rPr>
-              <a:t>業界・商材ごとに設計</a:t>
-            </a:r>
-          </a:p>
-        </p:txBody>
-      </p:sp>
-      <p:cxnSp>
-        <p:nvCxnSpPr>
-          <p:cNvPr id="76" name="Connector 75"/>
-          <p:cNvCxnSpPr/>
-          <p:nvPr/>
-        </p:nvCxnSpPr>
-        <p:spPr>
-          <a:xfrm>
-            <a:off x="8819999" y="2484000"/>
-            <a:ext cx="0" cy="2556000"/>
-          </a:xfrm>
-          <a:prstGeom prst="line">
-            <a:avLst/>
-          </a:prstGeom>
-          <a:ln w="25400">
-            <a:solidFill>
-              <a:srgbClr val="06C755"/>
-            </a:solidFill>
-          </a:ln>
-        </p:spPr>
-        <p:style>
-          <a:lnRef idx="2">
-            <a:schemeClr val="accent1"/>
-          </a:lnRef>
-          <a:fillRef idx="0">
-            <a:schemeClr val="accent1"/>
-          </a:fillRef>
-          <a:effectRef idx="0">
-            <a:schemeClr val="accent1"/>
-          </a:effectRef>
-          <a:fontRef idx="minor">
-            <a:schemeClr val="tx1"/>
-          </a:fontRef>
-        </p:style>
-      </p:cxnSp>
-      <p:sp>
-        <p:nvSpPr>
-          <p:cNvPr id="77" name="Oval 76"/>
-          <p:cNvSpPr/>
-          <p:nvPr/>
-        </p:nvSpPr>
-        <p:spPr>
-          <a:xfrm>
-            <a:off x="8711999" y="2376000"/>
-            <a:ext cx="216000" cy="216000"/>
-          </a:xfrm>
-          <a:prstGeom prst="ellipse">
-            <a:avLst/>
-          </a:prstGeom>
-          <a:solidFill>
-            <a:srgbClr val="06C755"/>
-          </a:solidFill>
-          <a:ln w="25400">
-            <a:solidFill>
-              <a:srgbClr val="06C755"/>
-            </a:solidFill>
-          </a:ln>
-          <a:effectLst/>
-        </p:spPr>
-        <p:style>
-          <a:lnRef idx="1">
-            <a:schemeClr val="accent1"/>
-          </a:lnRef>
-          <a:fillRef idx="3">
-            <a:schemeClr val="accent1"/>
-          </a:fillRef>
-          <a:effectRef idx="0">
-            <a:schemeClr val="accent1"/>
-          </a:effectRef>
-          <a:fontRef idx="minor">
-            <a:schemeClr val="lt1"/>
-          </a:fontRef>
-        </p:style>
-        <p:txBody>
-          <a:bodyPr rtlCol="0" anchor="ctr" wrap="square" lIns="72000" tIns="18000" rIns="72000" bIns="18000"/>
-          <a:lstStyle/>
-          <a:p>
-            <a:pPr algn="ctr"/>
-          </a:p>
-        </p:txBody>
-      </p:sp>
-      <p:sp>
-        <p:nvSpPr>
-          <p:cNvPr id="78" name="TextBox 77"/>
-          <p:cNvSpPr txBox="1"/>
-          <p:nvPr/>
-        </p:nvSpPr>
-        <p:spPr>
-          <a:xfrm>
-            <a:off x="7775999" y="2304000"/>
-            <a:ext cx="900000" cy="360000"/>
-          </a:xfrm>
-          <a:prstGeom prst="rect">
-            <a:avLst/>
-          </a:prstGeom>
-          <a:noFill/>
-        </p:spPr>
-        <p:txBody>
-          <a:bodyPr wrap="square" anchor="ctr" lIns="36000" rIns="36000" tIns="18000" bIns="18000">
-            <a:spAutoFit/>
-          </a:bodyPr>
-          <a:lstStyle/>
-          <a:p>
-            <a:pPr algn="r">
-              <a:lnSpc>
-                <a:spcPct val="110000"/>
-              </a:lnSpc>
-              <a:spcAft>
-                <a:spcPts val="0"/>
-              </a:spcAft>
-            </a:pPr>
-            <a:r>
-              <a:rPr sz="1200" b="1">
-                <a:solidFill>
-                  <a:srgbClr val="0B7A3B"/>
-                </a:solidFill>
-                <a:latin typeface="メイリオ"/>
-                <a:ea typeface="メイリオ"/>
-                <a:cs typeface="メイリオ"/>
-              </a:rPr>
-              <a:t>友だち追加</a:t>
-            </a:r>
-          </a:p>
-        </p:txBody>
-      </p:sp>
-      <p:sp>
-        <p:nvSpPr>
-          <p:cNvPr id="79" name="TextBox 78"/>
-          <p:cNvSpPr txBox="1"/>
-          <p:nvPr/>
-        </p:nvSpPr>
-        <p:spPr>
-          <a:xfrm>
-            <a:off x="9071999" y="2304000"/>
-            <a:ext cx="2340000" cy="360000"/>
-          </a:xfrm>
-          <a:prstGeom prst="rect">
-            <a:avLst/>
-          </a:prstGeom>
-          <a:noFill/>
-        </p:spPr>
-        <p:txBody>
-          <a:bodyPr wrap="square" anchor="ctr" lIns="36000" rIns="36000" tIns="18000" bIns="18000">
             <a:spAutoFit/>
           </a:bodyPr>
           <a:lstStyle/>
@@ -16971,512 +20006,6 @@
               </a:spcAft>
             </a:pPr>
             <a:r>
-              <a:rPr sz="1000" b="0">
-                <a:solidFill>
-                  <a:srgbClr val="7F7F7F"/>
-                </a:solidFill>
-                <a:latin typeface="メイリオ"/>
-                <a:ea typeface="メイリオ"/>
-                <a:cs typeface="メイリオ"/>
-              </a:rPr>
-              <a:t>サンクスLINE誘導などで追加</a:t>
-            </a:r>
-          </a:p>
-        </p:txBody>
-      </p:sp>
-      <p:sp>
-        <p:nvSpPr>
-          <p:cNvPr id="80" name="Oval 79"/>
-          <p:cNvSpPr/>
-          <p:nvPr/>
-        </p:nvSpPr>
-        <p:spPr>
-          <a:xfrm>
-            <a:off x="8711999" y="3227999"/>
-            <a:ext cx="216000" cy="216000"/>
-          </a:xfrm>
-          <a:prstGeom prst="ellipse">
-            <a:avLst/>
-          </a:prstGeom>
-          <a:solidFill>
-            <a:srgbClr val="FFFFFF"/>
-          </a:solidFill>
-          <a:ln w="25400">
-            <a:solidFill>
-              <a:srgbClr val="06C755"/>
-            </a:solidFill>
-          </a:ln>
-          <a:effectLst/>
-        </p:spPr>
-        <p:style>
-          <a:lnRef idx="1">
-            <a:schemeClr val="accent1"/>
-          </a:lnRef>
-          <a:fillRef idx="3">
-            <a:schemeClr val="accent1"/>
-          </a:fillRef>
-          <a:effectRef idx="0">
-            <a:schemeClr val="accent1"/>
-          </a:effectRef>
-          <a:fontRef idx="minor">
-            <a:schemeClr val="lt1"/>
-          </a:fontRef>
-        </p:style>
-        <p:txBody>
-          <a:bodyPr rtlCol="0" anchor="ctr" wrap="square" lIns="72000" tIns="18000" rIns="72000" bIns="18000"/>
-          <a:lstStyle/>
-          <a:p>
-            <a:pPr algn="ctr"/>
-          </a:p>
-        </p:txBody>
-      </p:sp>
-      <p:sp>
-        <p:nvSpPr>
-          <p:cNvPr id="81" name="TextBox 80"/>
-          <p:cNvSpPr txBox="1"/>
-          <p:nvPr/>
-        </p:nvSpPr>
-        <p:spPr>
-          <a:xfrm>
-            <a:off x="7775999" y="3155999"/>
-            <a:ext cx="900000" cy="360000"/>
-          </a:xfrm>
-          <a:prstGeom prst="rect">
-            <a:avLst/>
-          </a:prstGeom>
-          <a:noFill/>
-        </p:spPr>
-        <p:txBody>
-          <a:bodyPr wrap="square" anchor="ctr" lIns="36000" rIns="36000" tIns="18000" bIns="18000">
-            <a:spAutoFit/>
-          </a:bodyPr>
-          <a:lstStyle/>
-          <a:p>
-            <a:pPr algn="r">
-              <a:lnSpc>
-                <a:spcPct val="110000"/>
-              </a:lnSpc>
-              <a:spcAft>
-                <a:spcPts val="0"/>
-              </a:spcAft>
-            </a:pPr>
-            <a:r>
-              <a:rPr sz="1100" b="1">
-                <a:solidFill>
-                  <a:srgbClr val="333333"/>
-                </a:solidFill>
-                <a:latin typeface="メイリオ"/>
-                <a:ea typeface="メイリオ"/>
-                <a:cs typeface="メイリオ"/>
-              </a:rPr>
-              <a:t>初回配信</a:t>
-            </a:r>
-          </a:p>
-        </p:txBody>
-      </p:sp>
-      <p:sp>
-        <p:nvSpPr>
-          <p:cNvPr id="82" name="Rounded Rectangle 81"/>
-          <p:cNvSpPr/>
-          <p:nvPr/>
-        </p:nvSpPr>
-        <p:spPr>
-          <a:xfrm>
-            <a:off x="9071999" y="3155999"/>
-            <a:ext cx="2340000" cy="360000"/>
-          </a:xfrm>
-          <a:prstGeom prst="roundRect">
-            <a:avLst>
-              <a:gd name="adj" fmla="val 30000"/>
-            </a:avLst>
-          </a:prstGeom>
-          <a:solidFill>
-            <a:srgbClr val="E8F8EE"/>
-          </a:solidFill>
-          <a:ln>
-            <a:noFill/>
-          </a:ln>
-          <a:effectLst/>
-        </p:spPr>
-        <p:style>
-          <a:lnRef idx="1">
-            <a:schemeClr val="accent1"/>
-          </a:lnRef>
-          <a:fillRef idx="3">
-            <a:schemeClr val="accent1"/>
-          </a:fillRef>
-          <a:effectRef idx="0">
-            <a:schemeClr val="accent1"/>
-          </a:effectRef>
-          <a:fontRef idx="minor">
-            <a:schemeClr val="lt1"/>
-          </a:fontRef>
-        </p:style>
-        <p:txBody>
-          <a:bodyPr rtlCol="0" anchor="ctr" wrap="square" lIns="54000" tIns="0" rIns="54000" bIns="0"/>
-          <a:lstStyle/>
-          <a:p>
-            <a:pPr algn="ctr">
-              <a:lnSpc>
-                <a:spcPct val="110000"/>
-              </a:lnSpc>
-              <a:spcAft>
-                <a:spcPts val="0"/>
-              </a:spcAft>
-            </a:pPr>
-            <a:r>
-              <a:rPr sz="1100" b="1">
-                <a:solidFill>
-                  <a:srgbClr val="0B7A3B"/>
-                </a:solidFill>
-                <a:latin typeface="メイリオ"/>
-                <a:ea typeface="メイリオ"/>
-                <a:cs typeface="メイリオ"/>
-              </a:rPr>
-              <a:t>興味喚起</a:t>
-            </a:r>
-          </a:p>
-        </p:txBody>
-      </p:sp>
-      <p:sp>
-        <p:nvSpPr>
-          <p:cNvPr id="83" name="Oval 82"/>
-          <p:cNvSpPr/>
-          <p:nvPr/>
-        </p:nvSpPr>
-        <p:spPr>
-          <a:xfrm>
-            <a:off x="8711999" y="4079999"/>
-            <a:ext cx="216000" cy="216000"/>
-          </a:xfrm>
-          <a:prstGeom prst="ellipse">
-            <a:avLst/>
-          </a:prstGeom>
-          <a:solidFill>
-            <a:srgbClr val="FFFFFF"/>
-          </a:solidFill>
-          <a:ln w="25400">
-            <a:solidFill>
-              <a:srgbClr val="06C755"/>
-            </a:solidFill>
-          </a:ln>
-          <a:effectLst/>
-        </p:spPr>
-        <p:style>
-          <a:lnRef idx="1">
-            <a:schemeClr val="accent1"/>
-          </a:lnRef>
-          <a:fillRef idx="3">
-            <a:schemeClr val="accent1"/>
-          </a:fillRef>
-          <a:effectRef idx="0">
-            <a:schemeClr val="accent1"/>
-          </a:effectRef>
-          <a:fontRef idx="minor">
-            <a:schemeClr val="lt1"/>
-          </a:fontRef>
-        </p:style>
-        <p:txBody>
-          <a:bodyPr rtlCol="0" anchor="ctr" wrap="square" lIns="72000" tIns="18000" rIns="72000" bIns="18000"/>
-          <a:lstStyle/>
-          <a:p>
-            <a:pPr algn="ctr"/>
-          </a:p>
-        </p:txBody>
-      </p:sp>
-      <p:sp>
-        <p:nvSpPr>
-          <p:cNvPr id="84" name="TextBox 83"/>
-          <p:cNvSpPr txBox="1"/>
-          <p:nvPr/>
-        </p:nvSpPr>
-        <p:spPr>
-          <a:xfrm>
-            <a:off x="7775999" y="4008000"/>
-            <a:ext cx="900000" cy="360000"/>
-          </a:xfrm>
-          <a:prstGeom prst="rect">
-            <a:avLst/>
-          </a:prstGeom>
-          <a:noFill/>
-        </p:spPr>
-        <p:txBody>
-          <a:bodyPr wrap="square" anchor="ctr" lIns="36000" rIns="36000" tIns="18000" bIns="18000">
-            <a:spAutoFit/>
-          </a:bodyPr>
-          <a:lstStyle/>
-          <a:p>
-            <a:pPr algn="r">
-              <a:lnSpc>
-                <a:spcPct val="110000"/>
-              </a:lnSpc>
-              <a:spcAft>
-                <a:spcPts val="0"/>
-              </a:spcAft>
-            </a:pPr>
-            <a:r>
-              <a:rPr sz="1100" b="1">
-                <a:solidFill>
-                  <a:srgbClr val="333333"/>
-                </a:solidFill>
-                <a:latin typeface="メイリオ"/>
-                <a:ea typeface="メイリオ"/>
-                <a:cs typeface="メイリオ"/>
-              </a:rPr>
-              <a:t>数日後</a:t>
-            </a:r>
-          </a:p>
-        </p:txBody>
-      </p:sp>
-      <p:sp>
-        <p:nvSpPr>
-          <p:cNvPr id="85" name="Rounded Rectangle 84"/>
-          <p:cNvSpPr/>
-          <p:nvPr/>
-        </p:nvSpPr>
-        <p:spPr>
-          <a:xfrm>
-            <a:off x="9071999" y="4008000"/>
-            <a:ext cx="2340000" cy="360000"/>
-          </a:xfrm>
-          <a:prstGeom prst="roundRect">
-            <a:avLst>
-              <a:gd name="adj" fmla="val 30000"/>
-            </a:avLst>
-          </a:prstGeom>
-          <a:solidFill>
-            <a:srgbClr val="E8F8EE"/>
-          </a:solidFill>
-          <a:ln>
-            <a:noFill/>
-          </a:ln>
-          <a:effectLst/>
-        </p:spPr>
-        <p:style>
-          <a:lnRef idx="1">
-            <a:schemeClr val="accent1"/>
-          </a:lnRef>
-          <a:fillRef idx="3">
-            <a:schemeClr val="accent1"/>
-          </a:fillRef>
-          <a:effectRef idx="0">
-            <a:schemeClr val="accent1"/>
-          </a:effectRef>
-          <a:fontRef idx="minor">
-            <a:schemeClr val="lt1"/>
-          </a:fontRef>
-        </p:style>
-        <p:txBody>
-          <a:bodyPr rtlCol="0" anchor="ctr" wrap="square" lIns="54000" tIns="0" rIns="54000" bIns="0"/>
-          <a:lstStyle/>
-          <a:p>
-            <a:pPr algn="ctr">
-              <a:lnSpc>
-                <a:spcPct val="110000"/>
-              </a:lnSpc>
-              <a:spcAft>
-                <a:spcPts val="0"/>
-              </a:spcAft>
-            </a:pPr>
-            <a:r>
-              <a:rPr sz="1100" b="1">
-                <a:solidFill>
-                  <a:srgbClr val="0B7A3B"/>
-                </a:solidFill>
-                <a:latin typeface="メイリオ"/>
-                <a:ea typeface="メイリオ"/>
-                <a:cs typeface="メイリオ"/>
-              </a:rPr>
-              <a:t>比較検討情報・不安解消</a:t>
-            </a:r>
-          </a:p>
-        </p:txBody>
-      </p:sp>
-      <p:sp>
-        <p:nvSpPr>
-          <p:cNvPr id="86" name="Oval 85"/>
-          <p:cNvSpPr/>
-          <p:nvPr/>
-        </p:nvSpPr>
-        <p:spPr>
-          <a:xfrm>
-            <a:off x="8711999" y="4932000"/>
-            <a:ext cx="216000" cy="216000"/>
-          </a:xfrm>
-          <a:prstGeom prst="ellipse">
-            <a:avLst/>
-          </a:prstGeom>
-          <a:solidFill>
-            <a:srgbClr val="FFFFFF"/>
-          </a:solidFill>
-          <a:ln w="25400">
-            <a:solidFill>
-              <a:srgbClr val="06C755"/>
-            </a:solidFill>
-          </a:ln>
-          <a:effectLst/>
-        </p:spPr>
-        <p:style>
-          <a:lnRef idx="1">
-            <a:schemeClr val="accent1"/>
-          </a:lnRef>
-          <a:fillRef idx="3">
-            <a:schemeClr val="accent1"/>
-          </a:fillRef>
-          <a:effectRef idx="0">
-            <a:schemeClr val="accent1"/>
-          </a:effectRef>
-          <a:fontRef idx="minor">
-            <a:schemeClr val="lt1"/>
-          </a:fontRef>
-        </p:style>
-        <p:txBody>
-          <a:bodyPr rtlCol="0" anchor="ctr" wrap="square" lIns="72000" tIns="18000" rIns="72000" bIns="18000"/>
-          <a:lstStyle/>
-          <a:p>
-            <a:pPr algn="ctr"/>
-          </a:p>
-        </p:txBody>
-      </p:sp>
-      <p:sp>
-        <p:nvSpPr>
-          <p:cNvPr id="87" name="TextBox 86"/>
-          <p:cNvSpPr txBox="1"/>
-          <p:nvPr/>
-        </p:nvSpPr>
-        <p:spPr>
-          <a:xfrm>
-            <a:off x="7775999" y="4860000"/>
-            <a:ext cx="900000" cy="360000"/>
-          </a:xfrm>
-          <a:prstGeom prst="rect">
-            <a:avLst/>
-          </a:prstGeom>
-          <a:noFill/>
-        </p:spPr>
-        <p:txBody>
-          <a:bodyPr wrap="square" anchor="ctr" lIns="36000" rIns="36000" tIns="18000" bIns="18000">
-            <a:spAutoFit/>
-          </a:bodyPr>
-          <a:lstStyle/>
-          <a:p>
-            <a:pPr algn="r">
-              <a:lnSpc>
-                <a:spcPct val="110000"/>
-              </a:lnSpc>
-              <a:spcAft>
-                <a:spcPts val="0"/>
-              </a:spcAft>
-            </a:pPr>
-            <a:r>
-              <a:rPr sz="1100" b="1">
-                <a:solidFill>
-                  <a:srgbClr val="333333"/>
-                </a:solidFill>
-                <a:latin typeface="メイリオ"/>
-                <a:ea typeface="メイリオ"/>
-                <a:cs typeface="メイリオ"/>
-              </a:rPr>
-              <a:t>1〜2週間</a:t>
-            </a:r>
-          </a:p>
-        </p:txBody>
-      </p:sp>
-      <p:sp>
-        <p:nvSpPr>
-          <p:cNvPr id="88" name="Rounded Rectangle 87"/>
-          <p:cNvSpPr/>
-          <p:nvPr/>
-        </p:nvSpPr>
-        <p:spPr>
-          <a:xfrm>
-            <a:off x="9071999" y="4860000"/>
-            <a:ext cx="2340000" cy="360000"/>
-          </a:xfrm>
-          <a:prstGeom prst="roundRect">
-            <a:avLst>
-              <a:gd name="adj" fmla="val 30000"/>
-            </a:avLst>
-          </a:prstGeom>
-          <a:solidFill>
-            <a:srgbClr val="E8F8EE"/>
-          </a:solidFill>
-          <a:ln>
-            <a:noFill/>
-          </a:ln>
-          <a:effectLst/>
-        </p:spPr>
-        <p:style>
-          <a:lnRef idx="1">
-            <a:schemeClr val="accent1"/>
-          </a:lnRef>
-          <a:fillRef idx="3">
-            <a:schemeClr val="accent1"/>
-          </a:fillRef>
-          <a:effectRef idx="0">
-            <a:schemeClr val="accent1"/>
-          </a:effectRef>
-          <a:fontRef idx="minor">
-            <a:schemeClr val="lt1"/>
-          </a:fontRef>
-        </p:style>
-        <p:txBody>
-          <a:bodyPr rtlCol="0" anchor="ctr" wrap="square" lIns="54000" tIns="0" rIns="54000" bIns="0"/>
-          <a:lstStyle/>
-          <a:p>
-            <a:pPr algn="ctr">
-              <a:lnSpc>
-                <a:spcPct val="110000"/>
-              </a:lnSpc>
-              <a:spcAft>
-                <a:spcPts val="0"/>
-              </a:spcAft>
-            </a:pPr>
-            <a:r>
-              <a:rPr sz="1100" b="1">
-                <a:solidFill>
-                  <a:srgbClr val="0B7A3B"/>
-                </a:solidFill>
-                <a:latin typeface="メイリオ"/>
-                <a:ea typeface="メイリオ"/>
-                <a:cs typeface="メイリオ"/>
-              </a:rPr>
-              <a:t>CVオファー</a:t>
-            </a:r>
-          </a:p>
-        </p:txBody>
-      </p:sp>
-      <p:sp>
-        <p:nvSpPr>
-          <p:cNvPr id="89" name="TextBox 88"/>
-          <p:cNvSpPr txBox="1"/>
-          <p:nvPr/>
-        </p:nvSpPr>
-        <p:spPr>
-          <a:xfrm>
-            <a:off x="7775999" y="5418000"/>
-            <a:ext cx="3636000" cy="216000"/>
-          </a:xfrm>
-          <a:prstGeom prst="rect">
-            <a:avLst/>
-          </a:prstGeom>
-          <a:noFill/>
-        </p:spPr>
-        <p:txBody>
-          <a:bodyPr wrap="square" anchor="t" lIns="36000" rIns="36000" tIns="18000" bIns="18000">
-            <a:spAutoFit/>
-          </a:bodyPr>
-          <a:lstStyle/>
-          <a:p>
-            <a:pPr algn="l">
-              <a:lnSpc>
-                <a:spcPct val="110000"/>
-              </a:lnSpc>
-              <a:spcAft>
-                <a:spcPts val="0"/>
-              </a:spcAft>
-            </a:pPr>
-            <a:r>
               <a:rPr sz="900" b="0">
                 <a:solidFill>
                   <a:srgbClr val="7F7F7F"/>
@@ -17492,7 +20021,7 @@
       </p:sp>
       <p:sp>
         <p:nvSpPr>
-          <p:cNvPr id="90" name="TextBox 89"/>
+          <p:cNvPr id="147" name="TextBox 146"/>
           <p:cNvSpPr txBox="1"/>
           <p:nvPr/>
         </p:nvSpPr>
